--- a/卒業制作 テーマ・中間発表.pptx
+++ b/卒業制作 テーマ・中間発表.pptx
@@ -5,16 +5,21 @@
     <p:sldMasterId id="2147483648" r:id="rId1"/>
   </p:sldMasterIdLst>
   <p:notesMasterIdLst>
-    <p:notesMasterId r:id="rId9"/>
+    <p:notesMasterId r:id="rId14"/>
   </p:notesMasterIdLst>
   <p:sldIdLst>
     <p:sldId id="256" r:id="rId2"/>
-    <p:sldId id="257" r:id="rId3"/>
-    <p:sldId id="258" r:id="rId4"/>
+    <p:sldId id="258" r:id="rId3"/>
+    <p:sldId id="257" r:id="rId4"/>
     <p:sldId id="259" r:id="rId5"/>
     <p:sldId id="260" r:id="rId6"/>
-    <p:sldId id="261" r:id="rId7"/>
-    <p:sldId id="262" r:id="rId8"/>
+    <p:sldId id="263" r:id="rId7"/>
+    <p:sldId id="261" r:id="rId8"/>
+    <p:sldId id="264" r:id="rId9"/>
+    <p:sldId id="265" r:id="rId10"/>
+    <p:sldId id="268" r:id="rId11"/>
+    <p:sldId id="267" r:id="rId12"/>
+    <p:sldId id="262" r:id="rId13"/>
   </p:sldIdLst>
   <p:sldSz cx="12192000" cy="6858000"/>
   <p:notesSz cx="6858000" cy="9144000"/>
@@ -252,7 +257,7 @@
       <p15:sldGuideLst xmlns:p15="http://schemas.microsoft.com/office/powerpoint/2012/main"/>
     </p:ext>
     <p:ext uri="GoogleSlidesCustomDataVersion2">
-      <go:slidesCustomData xmlns:go="http://customooxmlschemas.google.com/" xmlns:ahyp="http://schemas.microsoft.com/office/drawing/2018/hyperlinkcolor" xmlns:p15="http://schemas.microsoft.com/office/powerpoint/2012/main" xmlns:p14="http://schemas.microsoft.com/office/powerpoint/2010/main" xmlns:com="http://schemas.openxmlformats.org/drawingml/2006/compatibility" xmlns:pvml="urn:schemas-microsoft-com:office:powerpoint" xmlns:v="urn:schemas-microsoft-com:vml" xmlns:o="urn:schemas-microsoft-com:office:office" xmlns:dgm="http://schemas.openxmlformats.org/drawingml/2006/diagram" xmlns:c="http://schemas.openxmlformats.org/drawingml/2006/chart" xmlns:mv="urn:schemas-microsoft-com:mac:vml" xmlns:mc="http://schemas.openxmlformats.org/markup-compatibility/2006" xmlns="" r:id="rId12" roundtripDataSignature="AMtx7miZ4l44vHPzKZImSivDlVkC4Y8KPg=="/>
+      <go:slidesCustomData xmlns:go="http://customooxmlschemas.google.com/" xmlns:ahyp="http://schemas.microsoft.com/office/drawing/2018/hyperlinkcolor" xmlns:p15="http://schemas.microsoft.com/office/powerpoint/2012/main" xmlns:p14="http://schemas.microsoft.com/office/powerpoint/2010/main" xmlns:com="http://schemas.openxmlformats.org/drawingml/2006/compatibility" xmlns:pvml="urn:schemas-microsoft-com:office:powerpoint" xmlns:v="urn:schemas-microsoft-com:vml" xmlns:o="urn:schemas-microsoft-com:office:office" xmlns:dgm="http://schemas.openxmlformats.org/drawingml/2006/diagram" xmlns:c="http://schemas.openxmlformats.org/drawingml/2006/chart" xmlns:mv="urn:schemas-microsoft-com:mac:vml" xmlns:mc="http://schemas.openxmlformats.org/markup-compatibility/2006" xmlns="" r:id="rId15" roundtripDataSignature="AMtx7miZ4l44vHPzKZImSivDlVkC4Y8KPg=="/>
     </p:ext>
   </p:extLst>
 </p:presentation>
@@ -961,7 +966,7 @@
   <p:cSld>
     <p:spTree>
       <p:nvGrpSpPr>
-        <p:cNvPr id="1" name="Shape 86"/>
+        <p:cNvPr id="1" name="Shape 92"/>
         <p:cNvGrpSpPr/>
         <p:nvPr/>
       </p:nvGrpSpPr>
@@ -975,7 +980,7 @@
       </p:grpSpPr>
       <p:sp>
         <p:nvSpPr>
-          <p:cNvPr id="87" name="Google Shape;87;p2:notes"/>
+          <p:cNvPr id="93" name="Google Shape;93;g15565c702ff_0_5:notes"/>
           <p:cNvSpPr txBox="1">
             <a:spLocks noGrp="1"/>
           </p:cNvSpPr>
@@ -1021,7 +1026,7 @@
       </p:sp>
       <p:sp>
         <p:nvSpPr>
-          <p:cNvPr id="88" name="Google Shape;88;p2:notes"/>
+          <p:cNvPr id="94" name="Google Shape;94;g15565c702ff_0_5:notes"/>
           <p:cNvSpPr>
             <a:spLocks noGrp="1" noRot="1" noChangeAspect="1"/>
           </p:cNvSpPr>
@@ -1083,7 +1088,7 @@
   <p:cSld>
     <p:spTree>
       <p:nvGrpSpPr>
-        <p:cNvPr id="1" name="Shape 92"/>
+        <p:cNvPr id="1" name="Shape 86"/>
         <p:cNvGrpSpPr/>
         <p:nvPr/>
       </p:nvGrpSpPr>
@@ -1097,7 +1102,7 @@
       </p:grpSpPr>
       <p:sp>
         <p:nvSpPr>
-          <p:cNvPr id="93" name="Google Shape;93;g15565c702ff_0_5:notes"/>
+          <p:cNvPr id="87" name="Google Shape;87;p2:notes"/>
           <p:cNvSpPr txBox="1">
             <a:spLocks noGrp="1"/>
           </p:cNvSpPr>
@@ -1143,7 +1148,7 @@
       </p:sp>
       <p:sp>
         <p:nvSpPr>
-          <p:cNvPr id="94" name="Google Shape;94;g15565c702ff_0_5:notes"/>
+          <p:cNvPr id="88" name="Google Shape;88;p2:notes"/>
           <p:cNvSpPr>
             <a:spLocks noGrp="1" noRot="1" noChangeAspect="1"/>
           </p:cNvSpPr>
@@ -15124,12 +15129,12 @@
 </p:sld>
 </file>
 
-<file path=ppt/slides/slide2.xml><?xml version="1.0" encoding="utf-8"?>
+<file path=ppt/slides/slide10.xml><?xml version="1.0" encoding="utf-8"?>
 <p:sld xmlns:a="http://schemas.openxmlformats.org/drawingml/2006/main" xmlns:r="http://schemas.openxmlformats.org/officeDocument/2006/relationships" xmlns:p="http://schemas.openxmlformats.org/presentationml/2006/main">
   <p:cSld>
     <p:spTree>
       <p:nvGrpSpPr>
-        <p:cNvPr id="1" name="Shape 89"/>
+        <p:cNvPr id="1" name=""/>
         <p:cNvGrpSpPr/>
         <p:nvPr/>
       </p:nvGrpSpPr>
@@ -15143,7 +15148,759 @@
       </p:grpSpPr>
       <p:sp>
         <p:nvSpPr>
-          <p:cNvPr id="90" name="Google Shape;90;p2"/>
+          <p:cNvPr id="5" name="正方形/長方形 4">
+            <a:extLst>
+              <a:ext uri="{FF2B5EF4-FFF2-40B4-BE49-F238E27FC236}">
+                <a16:creationId xmlns:a16="http://schemas.microsoft.com/office/drawing/2014/main" id="{C1188D7F-DF62-29D6-20F0-E6FAF8239E14}"/>
+              </a:ext>
+            </a:extLst>
+          </p:cNvPr>
+          <p:cNvSpPr/>
+          <p:nvPr/>
+        </p:nvSpPr>
+        <p:spPr>
+          <a:xfrm>
+            <a:off x="999460" y="467833"/>
+            <a:ext cx="8371368" cy="772632"/>
+          </a:xfrm>
+          <a:prstGeom prst="rect">
+            <a:avLst/>
+          </a:prstGeom>
+          <a:noFill/>
+        </p:spPr>
+        <p:style>
+          <a:lnRef idx="2">
+            <a:schemeClr val="accent1">
+              <a:shade val="15000"/>
+            </a:schemeClr>
+          </a:lnRef>
+          <a:fillRef idx="1">
+            <a:schemeClr val="accent1"/>
+          </a:fillRef>
+          <a:effectRef idx="0">
+            <a:schemeClr val="accent1"/>
+          </a:effectRef>
+          <a:fontRef idx="minor">
+            <a:schemeClr val="lt1"/>
+          </a:fontRef>
+        </p:style>
+        <p:txBody>
+          <a:bodyPr rtlCol="0" anchor="ctr"/>
+          <a:lstStyle/>
+          <a:p>
+            <a:pPr algn="ctr"/>
+            <a:endParaRPr kumimoji="1" lang="ja-JP" altLang="en-US"/>
+          </a:p>
+        </p:txBody>
+      </p:sp>
+      <p:sp>
+        <p:nvSpPr>
+          <p:cNvPr id="7" name="正方形/長方形 6">
+            <a:extLst>
+              <a:ext uri="{FF2B5EF4-FFF2-40B4-BE49-F238E27FC236}">
+                <a16:creationId xmlns:a16="http://schemas.microsoft.com/office/drawing/2014/main" id="{9583FE68-3CF9-7530-9F6A-8D1AB7CAF37F}"/>
+              </a:ext>
+            </a:extLst>
+          </p:cNvPr>
+          <p:cNvSpPr/>
+          <p:nvPr/>
+        </p:nvSpPr>
+        <p:spPr>
+          <a:xfrm>
+            <a:off x="999460" y="1368056"/>
+            <a:ext cx="4245935" cy="5238307"/>
+          </a:xfrm>
+          <a:prstGeom prst="rect">
+            <a:avLst/>
+          </a:prstGeom>
+          <a:noFill/>
+        </p:spPr>
+        <p:style>
+          <a:lnRef idx="2">
+            <a:schemeClr val="accent1">
+              <a:shade val="15000"/>
+            </a:schemeClr>
+          </a:lnRef>
+          <a:fillRef idx="1">
+            <a:schemeClr val="accent1"/>
+          </a:fillRef>
+          <a:effectRef idx="0">
+            <a:schemeClr val="accent1"/>
+          </a:effectRef>
+          <a:fontRef idx="minor">
+            <a:schemeClr val="lt1"/>
+          </a:fontRef>
+        </p:style>
+        <p:txBody>
+          <a:bodyPr rtlCol="0" anchor="ctr"/>
+          <a:lstStyle/>
+          <a:p>
+            <a:pPr algn="ctr"/>
+            <a:endParaRPr kumimoji="1" lang="ja-JP" altLang="en-US"/>
+          </a:p>
+        </p:txBody>
+      </p:sp>
+      <p:sp>
+        <p:nvSpPr>
+          <p:cNvPr id="9" name="正方形/長方形 8">
+            <a:extLst>
+              <a:ext uri="{FF2B5EF4-FFF2-40B4-BE49-F238E27FC236}">
+                <a16:creationId xmlns:a16="http://schemas.microsoft.com/office/drawing/2014/main" id="{D1701C82-17E2-FF0B-9605-5A6D8D6615E4}"/>
+              </a:ext>
+            </a:extLst>
+          </p:cNvPr>
+          <p:cNvSpPr/>
+          <p:nvPr/>
+        </p:nvSpPr>
+        <p:spPr>
+          <a:xfrm>
+            <a:off x="5372986" y="1368056"/>
+            <a:ext cx="3948223" cy="2225749"/>
+          </a:xfrm>
+          <a:prstGeom prst="rect">
+            <a:avLst/>
+          </a:prstGeom>
+          <a:noFill/>
+        </p:spPr>
+        <p:style>
+          <a:lnRef idx="2">
+            <a:schemeClr val="accent1">
+              <a:shade val="15000"/>
+            </a:schemeClr>
+          </a:lnRef>
+          <a:fillRef idx="1">
+            <a:schemeClr val="accent1"/>
+          </a:fillRef>
+          <a:effectRef idx="0">
+            <a:schemeClr val="accent1"/>
+          </a:effectRef>
+          <a:fontRef idx="minor">
+            <a:schemeClr val="lt1"/>
+          </a:fontRef>
+        </p:style>
+        <p:txBody>
+          <a:bodyPr rtlCol="0" anchor="ctr"/>
+          <a:lstStyle/>
+          <a:p>
+            <a:pPr algn="ctr"/>
+            <a:endParaRPr kumimoji="1" lang="ja-JP" altLang="en-US"/>
+          </a:p>
+        </p:txBody>
+      </p:sp>
+      <p:sp>
+        <p:nvSpPr>
+          <p:cNvPr id="11" name="正方形/長方形 10">
+            <a:extLst>
+              <a:ext uri="{FF2B5EF4-FFF2-40B4-BE49-F238E27FC236}">
+                <a16:creationId xmlns:a16="http://schemas.microsoft.com/office/drawing/2014/main" id="{AE6FC325-C46D-A0A2-8522-FC04748F6FCA}"/>
+              </a:ext>
+            </a:extLst>
+          </p:cNvPr>
+          <p:cNvSpPr/>
+          <p:nvPr/>
+        </p:nvSpPr>
+        <p:spPr>
+          <a:xfrm>
+            <a:off x="5372986" y="3749749"/>
+            <a:ext cx="3997842" cy="2856614"/>
+          </a:xfrm>
+          <a:prstGeom prst="rect">
+            <a:avLst/>
+          </a:prstGeom>
+          <a:noFill/>
+        </p:spPr>
+        <p:style>
+          <a:lnRef idx="2">
+            <a:schemeClr val="accent1">
+              <a:shade val="15000"/>
+            </a:schemeClr>
+          </a:lnRef>
+          <a:fillRef idx="1">
+            <a:schemeClr val="accent1"/>
+          </a:fillRef>
+          <a:effectRef idx="0">
+            <a:schemeClr val="accent1"/>
+          </a:effectRef>
+          <a:fontRef idx="minor">
+            <a:schemeClr val="lt1"/>
+          </a:fontRef>
+        </p:style>
+        <p:txBody>
+          <a:bodyPr rtlCol="0" anchor="ctr"/>
+          <a:lstStyle/>
+          <a:p>
+            <a:pPr algn="ctr"/>
+            <a:endParaRPr kumimoji="1" lang="ja-JP" altLang="en-US"/>
+          </a:p>
+        </p:txBody>
+      </p:sp>
+      <p:sp>
+        <p:nvSpPr>
+          <p:cNvPr id="13" name="正方形/長方形 12">
+            <a:extLst>
+              <a:ext uri="{FF2B5EF4-FFF2-40B4-BE49-F238E27FC236}">
+                <a16:creationId xmlns:a16="http://schemas.microsoft.com/office/drawing/2014/main" id="{0DAC9EE9-FDB6-433E-96ED-39ECD89387C3}"/>
+              </a:ext>
+            </a:extLst>
+          </p:cNvPr>
+          <p:cNvSpPr/>
+          <p:nvPr/>
+        </p:nvSpPr>
+        <p:spPr>
+          <a:xfrm>
+            <a:off x="9094381" y="1368056"/>
+            <a:ext cx="226828" cy="2225749"/>
+          </a:xfrm>
+          <a:prstGeom prst="rect">
+            <a:avLst/>
+          </a:prstGeom>
+          <a:noFill/>
+        </p:spPr>
+        <p:style>
+          <a:lnRef idx="2">
+            <a:schemeClr val="accent1">
+              <a:shade val="15000"/>
+            </a:schemeClr>
+          </a:lnRef>
+          <a:fillRef idx="1">
+            <a:schemeClr val="accent1"/>
+          </a:fillRef>
+          <a:effectRef idx="0">
+            <a:schemeClr val="accent1"/>
+          </a:effectRef>
+          <a:fontRef idx="minor">
+            <a:schemeClr val="lt1"/>
+          </a:fontRef>
+        </p:style>
+        <p:txBody>
+          <a:bodyPr rtlCol="0" anchor="ctr"/>
+          <a:lstStyle/>
+          <a:p>
+            <a:pPr algn="ctr"/>
+            <a:endParaRPr kumimoji="1" lang="ja-JP" altLang="en-US"/>
+          </a:p>
+        </p:txBody>
+      </p:sp>
+      <p:sp>
+        <p:nvSpPr>
+          <p:cNvPr id="17" name="テキスト ボックス 16">
+            <a:extLst>
+              <a:ext uri="{FF2B5EF4-FFF2-40B4-BE49-F238E27FC236}">
+                <a16:creationId xmlns:a16="http://schemas.microsoft.com/office/drawing/2014/main" id="{3FA126C7-18B5-333F-3696-F895B74FD127}"/>
+              </a:ext>
+            </a:extLst>
+          </p:cNvPr>
+          <p:cNvSpPr txBox="1"/>
+          <p:nvPr/>
+        </p:nvSpPr>
+        <p:spPr>
+          <a:xfrm>
+            <a:off x="2137144" y="620764"/>
+            <a:ext cx="6096000" cy="523220"/>
+          </a:xfrm>
+          <a:prstGeom prst="rect">
+            <a:avLst/>
+          </a:prstGeom>
+          <a:noFill/>
+        </p:spPr>
+        <p:txBody>
+          <a:bodyPr wrap="square">
+            <a:spAutoFit/>
+          </a:bodyPr>
+          <a:lstStyle/>
+          <a:p>
+            <a:pPr algn="ctr"/>
+            <a:r>
+              <a:rPr lang="ja-JP" altLang="ja-JP" dirty="0"/>
+              <a:t>はじめてでも安心！飼いやすいペット </a:t>
+            </a:r>
+            <a:endParaRPr lang="en-US" altLang="ja-JP" dirty="0"/>
+          </a:p>
+          <a:p>
+            <a:pPr algn="ctr"/>
+            <a:r>
+              <a:rPr lang="ja-JP" altLang="ja-JP" dirty="0"/>
+              <a:t>ホーム｜ペット紹介｜飼育方法｜必要な費用</a:t>
+            </a:r>
+            <a:endParaRPr lang="ja-JP" altLang="en-US" dirty="0"/>
+          </a:p>
+        </p:txBody>
+      </p:sp>
+      <p:sp>
+        <p:nvSpPr>
+          <p:cNvPr id="19" name="テキスト ボックス 18">
+            <a:extLst>
+              <a:ext uri="{FF2B5EF4-FFF2-40B4-BE49-F238E27FC236}">
+                <a16:creationId xmlns:a16="http://schemas.microsoft.com/office/drawing/2014/main" id="{729A11CF-ADF1-4F94-5449-0803BFD985F2}"/>
+              </a:ext>
+            </a:extLst>
+          </p:cNvPr>
+          <p:cNvSpPr txBox="1"/>
+          <p:nvPr/>
+        </p:nvSpPr>
+        <p:spPr>
+          <a:xfrm>
+            <a:off x="2137144" y="2033441"/>
+            <a:ext cx="6096000" cy="307777"/>
+          </a:xfrm>
+          <a:prstGeom prst="rect">
+            <a:avLst/>
+          </a:prstGeom>
+          <a:noFill/>
+        </p:spPr>
+        <p:txBody>
+          <a:bodyPr wrap="square">
+            <a:spAutoFit/>
+          </a:bodyPr>
+          <a:lstStyle/>
+          <a:p>
+            <a:r>
+              <a:rPr lang="ja-JP" altLang="ja-JP"/>
+              <a:t>メイン画像 </a:t>
+            </a:r>
+            <a:endParaRPr lang="ja-JP" altLang="en-US" dirty="0"/>
+          </a:p>
+        </p:txBody>
+      </p:sp>
+      <p:sp>
+        <p:nvSpPr>
+          <p:cNvPr id="21" name="テキスト ボックス 20">
+            <a:extLst>
+              <a:ext uri="{FF2B5EF4-FFF2-40B4-BE49-F238E27FC236}">
+                <a16:creationId xmlns:a16="http://schemas.microsoft.com/office/drawing/2014/main" id="{AF20AA87-DD16-3FE2-19F5-F8D4AC9934A2}"/>
+              </a:ext>
+            </a:extLst>
+          </p:cNvPr>
+          <p:cNvSpPr txBox="1"/>
+          <p:nvPr/>
+        </p:nvSpPr>
+        <p:spPr>
+          <a:xfrm>
+            <a:off x="2137144" y="3464860"/>
+            <a:ext cx="6096000" cy="307777"/>
+          </a:xfrm>
+          <a:prstGeom prst="rect">
+            <a:avLst/>
+          </a:prstGeom>
+          <a:noFill/>
+        </p:spPr>
+        <p:txBody>
+          <a:bodyPr wrap="square">
+            <a:spAutoFit/>
+          </a:bodyPr>
+          <a:lstStyle/>
+          <a:p>
+            <a:r>
+              <a:rPr lang="ja-JP" altLang="ja-JP" dirty="0"/>
+              <a:t>はじめての方へ</a:t>
+            </a:r>
+            <a:endParaRPr lang="ja-JP" altLang="en-US" dirty="0"/>
+          </a:p>
+        </p:txBody>
+      </p:sp>
+      <p:sp>
+        <p:nvSpPr>
+          <p:cNvPr id="23" name="テキスト ボックス 22">
+            <a:extLst>
+              <a:ext uri="{FF2B5EF4-FFF2-40B4-BE49-F238E27FC236}">
+                <a16:creationId xmlns:a16="http://schemas.microsoft.com/office/drawing/2014/main" id="{88ADE740-58BE-4E36-6809-FCAE5AA6EB7C}"/>
+              </a:ext>
+            </a:extLst>
+          </p:cNvPr>
+          <p:cNvSpPr txBox="1"/>
+          <p:nvPr/>
+        </p:nvSpPr>
+        <p:spPr>
+          <a:xfrm>
+            <a:off x="2261191" y="3854932"/>
+            <a:ext cx="6096000" cy="307777"/>
+          </a:xfrm>
+          <a:prstGeom prst="rect">
+            <a:avLst/>
+          </a:prstGeom>
+          <a:noFill/>
+        </p:spPr>
+        <p:txBody>
+          <a:bodyPr wrap="square">
+            <a:spAutoFit/>
+          </a:bodyPr>
+          <a:lstStyle/>
+          <a:p>
+            <a:r>
+              <a:rPr lang="ja-JP" altLang="ja-JP" dirty="0"/>
+              <a:t>紹介文</a:t>
+            </a:r>
+            <a:endParaRPr lang="ja-JP" altLang="en-US" dirty="0"/>
+          </a:p>
+        </p:txBody>
+      </p:sp>
+      <p:sp>
+        <p:nvSpPr>
+          <p:cNvPr id="25" name="テキスト ボックス 24">
+            <a:extLst>
+              <a:ext uri="{FF2B5EF4-FFF2-40B4-BE49-F238E27FC236}">
+                <a16:creationId xmlns:a16="http://schemas.microsoft.com/office/drawing/2014/main" id="{AD655E8C-426B-84A2-3DFC-EF47F47D8CBC}"/>
+              </a:ext>
+            </a:extLst>
+          </p:cNvPr>
+          <p:cNvSpPr txBox="1"/>
+          <p:nvPr/>
+        </p:nvSpPr>
+        <p:spPr>
+          <a:xfrm>
+            <a:off x="2137144" y="4250723"/>
+            <a:ext cx="6096000" cy="307777"/>
+          </a:xfrm>
+          <a:prstGeom prst="rect">
+            <a:avLst/>
+          </a:prstGeom>
+          <a:noFill/>
+        </p:spPr>
+        <p:txBody>
+          <a:bodyPr wrap="square">
+            <a:spAutoFit/>
+          </a:bodyPr>
+          <a:lstStyle/>
+          <a:p>
+            <a:r>
+              <a:rPr lang="ja-JP" altLang="ja-JP"/>
+              <a:t>詳しく見る</a:t>
+            </a:r>
+            <a:endParaRPr lang="ja-JP" altLang="en-US" dirty="0"/>
+          </a:p>
+        </p:txBody>
+      </p:sp>
+      <p:sp>
+        <p:nvSpPr>
+          <p:cNvPr id="27" name="テキスト ボックス 26">
+            <a:extLst>
+              <a:ext uri="{FF2B5EF4-FFF2-40B4-BE49-F238E27FC236}">
+                <a16:creationId xmlns:a16="http://schemas.microsoft.com/office/drawing/2014/main" id="{4708FF8D-4D9C-6114-AFF1-84F8E5F22A73}"/>
+              </a:ext>
+            </a:extLst>
+          </p:cNvPr>
+          <p:cNvSpPr txBox="1"/>
+          <p:nvPr/>
+        </p:nvSpPr>
+        <p:spPr>
+          <a:xfrm>
+            <a:off x="6450419" y="4318653"/>
+            <a:ext cx="6096000" cy="307777"/>
+          </a:xfrm>
+          <a:prstGeom prst="rect">
+            <a:avLst/>
+          </a:prstGeom>
+          <a:noFill/>
+        </p:spPr>
+        <p:txBody>
+          <a:bodyPr wrap="square">
+            <a:spAutoFit/>
+          </a:bodyPr>
+          <a:lstStyle/>
+          <a:p>
+            <a:r>
+              <a:rPr lang="ja-JP" altLang="ja-JP" dirty="0"/>
+              <a:t>飼う前に知ること</a:t>
+            </a:r>
+            <a:endParaRPr lang="ja-JP" altLang="en-US" dirty="0"/>
+          </a:p>
+        </p:txBody>
+      </p:sp>
+      <p:sp>
+        <p:nvSpPr>
+          <p:cNvPr id="29" name="テキスト ボックス 28">
+            <a:extLst>
+              <a:ext uri="{FF2B5EF4-FFF2-40B4-BE49-F238E27FC236}">
+                <a16:creationId xmlns:a16="http://schemas.microsoft.com/office/drawing/2014/main" id="{4AD9EFE5-8234-5A9F-38E4-4D69BE25726D}"/>
+              </a:ext>
+            </a:extLst>
+          </p:cNvPr>
+          <p:cNvSpPr txBox="1"/>
+          <p:nvPr/>
+        </p:nvSpPr>
+        <p:spPr>
+          <a:xfrm>
+            <a:off x="6450419" y="4819627"/>
+            <a:ext cx="6273800" cy="307777"/>
+          </a:xfrm>
+          <a:prstGeom prst="rect">
+            <a:avLst/>
+          </a:prstGeom>
+          <a:noFill/>
+        </p:spPr>
+        <p:txBody>
+          <a:bodyPr wrap="square">
+            <a:spAutoFit/>
+          </a:bodyPr>
+          <a:lstStyle/>
+          <a:p>
+            <a:r>
+              <a:rPr lang="ja-JP" altLang="ja-JP" dirty="0"/>
+              <a:t>・必要な用品 </a:t>
+            </a:r>
+            <a:endParaRPr lang="ja-JP" altLang="en-US" dirty="0"/>
+          </a:p>
+        </p:txBody>
+      </p:sp>
+      <p:sp>
+        <p:nvSpPr>
+          <p:cNvPr id="31" name="テキスト ボックス 30">
+            <a:extLst>
+              <a:ext uri="{FF2B5EF4-FFF2-40B4-BE49-F238E27FC236}">
+                <a16:creationId xmlns:a16="http://schemas.microsoft.com/office/drawing/2014/main" id="{15DACD1B-4DA1-3950-5891-43347E5962A2}"/>
+              </a:ext>
+            </a:extLst>
+          </p:cNvPr>
+          <p:cNvSpPr txBox="1"/>
+          <p:nvPr/>
+        </p:nvSpPr>
+        <p:spPr>
+          <a:xfrm>
+            <a:off x="6450419" y="5212021"/>
+            <a:ext cx="6362700" cy="307777"/>
+          </a:xfrm>
+          <a:prstGeom prst="rect">
+            <a:avLst/>
+          </a:prstGeom>
+          <a:noFill/>
+        </p:spPr>
+        <p:txBody>
+          <a:bodyPr wrap="square">
+            <a:spAutoFit/>
+          </a:bodyPr>
+          <a:lstStyle/>
+          <a:p>
+            <a:r>
+              <a:rPr lang="ja-JP" altLang="ja-JP" dirty="0"/>
+              <a:t>・必要な費用 </a:t>
+            </a:r>
+            <a:endParaRPr lang="ja-JP" altLang="en-US" dirty="0"/>
+          </a:p>
+        </p:txBody>
+      </p:sp>
+      <p:sp>
+        <p:nvSpPr>
+          <p:cNvPr id="33" name="テキスト ボックス 32">
+            <a:extLst>
+              <a:ext uri="{FF2B5EF4-FFF2-40B4-BE49-F238E27FC236}">
+                <a16:creationId xmlns:a16="http://schemas.microsoft.com/office/drawing/2014/main" id="{421DA6EE-49E1-0F15-BEBF-1277FDD69A2A}"/>
+              </a:ext>
+            </a:extLst>
+          </p:cNvPr>
+          <p:cNvSpPr txBox="1"/>
+          <p:nvPr/>
+        </p:nvSpPr>
+        <p:spPr>
+          <a:xfrm>
+            <a:off x="6450419" y="5675742"/>
+            <a:ext cx="6405032" cy="307777"/>
+          </a:xfrm>
+          <a:prstGeom prst="rect">
+            <a:avLst/>
+          </a:prstGeom>
+          <a:noFill/>
+        </p:spPr>
+        <p:txBody>
+          <a:bodyPr wrap="square">
+            <a:spAutoFit/>
+          </a:bodyPr>
+          <a:lstStyle/>
+          <a:p>
+            <a:r>
+              <a:rPr lang="ja-JP" altLang="ja-JP" dirty="0"/>
+              <a:t>・飼育のコツ </a:t>
+            </a:r>
+            <a:endParaRPr lang="ja-JP" altLang="en-US" dirty="0"/>
+          </a:p>
+        </p:txBody>
+      </p:sp>
+      <p:sp>
+        <p:nvSpPr>
+          <p:cNvPr id="35" name="テキスト ボックス 34">
+            <a:extLst>
+              <a:ext uri="{FF2B5EF4-FFF2-40B4-BE49-F238E27FC236}">
+                <a16:creationId xmlns:a16="http://schemas.microsoft.com/office/drawing/2014/main" id="{F9B56841-06BB-1894-7C04-B33258AB3170}"/>
+              </a:ext>
+            </a:extLst>
+          </p:cNvPr>
+          <p:cNvSpPr txBox="1"/>
+          <p:nvPr/>
+        </p:nvSpPr>
+        <p:spPr>
+          <a:xfrm>
+            <a:off x="6418669" y="2423513"/>
+            <a:ext cx="6426200" cy="307777"/>
+          </a:xfrm>
+          <a:prstGeom prst="rect">
+            <a:avLst/>
+          </a:prstGeom>
+          <a:noFill/>
+        </p:spPr>
+        <p:txBody>
+          <a:bodyPr wrap="square">
+            <a:spAutoFit/>
+          </a:bodyPr>
+          <a:lstStyle/>
+          <a:p>
+            <a:r>
+              <a:rPr lang="ja-JP" altLang="ja-JP" dirty="0"/>
+              <a:t>おすすめのペット</a:t>
+            </a:r>
+            <a:endParaRPr lang="ja-JP" altLang="en-US" dirty="0"/>
+          </a:p>
+        </p:txBody>
+      </p:sp>
+    </p:spTree>
+    <p:extLst>
+      <p:ext uri="{BB962C8B-B14F-4D97-AF65-F5344CB8AC3E}">
+        <p14:creationId xmlns:p14="http://schemas.microsoft.com/office/powerpoint/2010/main" val="2004223033"/>
+      </p:ext>
+    </p:extLst>
+  </p:cSld>
+  <p:clrMapOvr>
+    <a:masterClrMapping/>
+  </p:clrMapOvr>
+</p:sld>
+</file>
+
+<file path=ppt/slides/slide11.xml><?xml version="1.0" encoding="utf-8"?>
+<p:sld xmlns:a="http://schemas.openxmlformats.org/drawingml/2006/main" xmlns:r="http://schemas.openxmlformats.org/officeDocument/2006/relationships" xmlns:p="http://schemas.openxmlformats.org/presentationml/2006/main">
+  <p:cSld>
+    <p:spTree>
+      <p:nvGrpSpPr>
+        <p:cNvPr id="1" name=""/>
+        <p:cNvGrpSpPr/>
+        <p:nvPr/>
+      </p:nvGrpSpPr>
+      <p:grpSpPr>
+        <a:xfrm>
+          <a:off x="0" y="0"/>
+          <a:ext cx="0" cy="0"/>
+          <a:chOff x="0" y="0"/>
+          <a:chExt cx="0" cy="0"/>
+        </a:xfrm>
+      </p:grpSpPr>
+      <p:sp>
+        <p:nvSpPr>
+          <p:cNvPr id="4" name="テキスト ボックス 3">
+            <a:extLst>
+              <a:ext uri="{FF2B5EF4-FFF2-40B4-BE49-F238E27FC236}">
+                <a16:creationId xmlns:a16="http://schemas.microsoft.com/office/drawing/2014/main" id="{F2556059-9C64-CBA4-AB48-BB177E7EEF16}"/>
+              </a:ext>
+            </a:extLst>
+          </p:cNvPr>
+          <p:cNvSpPr txBox="1"/>
+          <p:nvPr/>
+        </p:nvSpPr>
+        <p:spPr>
+          <a:xfrm>
+            <a:off x="3522133" y="1320730"/>
+            <a:ext cx="4779454" cy="4216539"/>
+          </a:xfrm>
+          <a:prstGeom prst="rect">
+            <a:avLst/>
+          </a:prstGeom>
+          <a:noFill/>
+        </p:spPr>
+        <p:txBody>
+          <a:bodyPr wrap="square" rtlCol="0">
+            <a:spAutoFit/>
+          </a:bodyPr>
+          <a:lstStyle/>
+          <a:p>
+            <a:pPr algn="ctr"/>
+            <a:r>
+              <a:rPr kumimoji="1" lang="ja-JP" altLang="en-US" sz="3200" dirty="0"/>
+              <a:t>今後の流れ</a:t>
+            </a:r>
+            <a:endParaRPr kumimoji="1" lang="en-US" altLang="ja-JP" sz="3200" dirty="0"/>
+          </a:p>
+          <a:p>
+            <a:pPr algn="ctr"/>
+            <a:endParaRPr kumimoji="1" lang="en-US" altLang="ja-JP" sz="3200" dirty="0"/>
+          </a:p>
+          <a:p>
+            <a:pPr algn="ctr"/>
+            <a:endParaRPr kumimoji="1" lang="en-US" altLang="ja-JP" sz="3200" dirty="0"/>
+          </a:p>
+          <a:p>
+            <a:pPr algn="ctr"/>
+            <a:endParaRPr kumimoji="1" lang="en-US" altLang="ja-JP" sz="3200" dirty="0"/>
+          </a:p>
+          <a:p>
+            <a:pPr algn="ctr"/>
+            <a:endParaRPr kumimoji="1" lang="en-US" altLang="ja-JP" dirty="0"/>
+          </a:p>
+          <a:p>
+            <a:pPr algn="ctr"/>
+            <a:endParaRPr kumimoji="1" lang="en-US" altLang="ja-JP" dirty="0"/>
+          </a:p>
+          <a:p>
+            <a:pPr algn="ctr"/>
+            <a:endParaRPr kumimoji="1" lang="en-US" altLang="ja-JP" dirty="0"/>
+          </a:p>
+          <a:p>
+            <a:pPr algn="ctr"/>
+            <a:endParaRPr kumimoji="1" lang="en-US" altLang="ja-JP" dirty="0"/>
+          </a:p>
+          <a:p>
+            <a:pPr algn="ctr"/>
+            <a:r>
+              <a:rPr kumimoji="1" lang="ja-JP" altLang="en-US" sz="2800" dirty="0"/>
+              <a:t>７月構成を考える</a:t>
+            </a:r>
+            <a:endParaRPr kumimoji="1" lang="en-US" altLang="ja-JP" sz="2800" dirty="0"/>
+          </a:p>
+          <a:p>
+            <a:pPr algn="ctr"/>
+            <a:r>
+              <a:rPr kumimoji="1" lang="ja-JP" altLang="en-US" sz="2800" dirty="0"/>
+              <a:t>８～９月　素材撮影</a:t>
+            </a:r>
+            <a:endParaRPr kumimoji="1" lang="en-US" altLang="ja-JP" sz="2800" dirty="0"/>
+          </a:p>
+          <a:p>
+            <a:pPr algn="ctr"/>
+            <a:r>
+              <a:rPr kumimoji="1" lang="ja-JP" altLang="en-US" sz="2800" dirty="0"/>
+              <a:t>１０～１２　編集</a:t>
+            </a:r>
+          </a:p>
+        </p:txBody>
+      </p:sp>
+    </p:spTree>
+    <p:extLst>
+      <p:ext uri="{BB962C8B-B14F-4D97-AF65-F5344CB8AC3E}">
+        <p14:creationId xmlns:p14="http://schemas.microsoft.com/office/powerpoint/2010/main" val="1823131148"/>
+      </p:ext>
+    </p:extLst>
+  </p:cSld>
+  <p:clrMapOvr>
+    <a:masterClrMapping/>
+  </p:clrMapOvr>
+</p:sld>
+</file>
+
+<file path=ppt/slides/slide12.xml><?xml version="1.0" encoding="utf-8"?>
+<p:sld xmlns:a="http://schemas.openxmlformats.org/drawingml/2006/main" xmlns:r="http://schemas.openxmlformats.org/officeDocument/2006/relationships" xmlns:p="http://schemas.openxmlformats.org/presentationml/2006/main">
+  <p:cSld>
+    <p:spTree>
+      <p:nvGrpSpPr>
+        <p:cNvPr id="1" name="Shape 119"/>
+        <p:cNvGrpSpPr/>
+        <p:nvPr/>
+      </p:nvGrpSpPr>
+      <p:grpSpPr>
+        <a:xfrm>
+          <a:off x="0" y="0"/>
+          <a:ext cx="0" cy="0"/>
+          <a:chOff x="0" y="0"/>
+          <a:chExt cx="0" cy="0"/>
+        </a:xfrm>
+      </p:grpSpPr>
+      <p:sp>
+        <p:nvSpPr>
+          <p:cNvPr id="120" name="Google Shape;120;g15565c702ff_2_10"/>
           <p:cNvSpPr txBox="1">
             <a:spLocks noGrp="1"/>
           </p:cNvSpPr>
@@ -15154,66 +15911,7 @@
         <p:spPr>
           <a:xfrm>
             <a:off x="838200" y="365125"/>
-            <a:ext cx="10515600" cy="1325563"/>
-          </a:xfrm>
-        </p:spPr>
-        <p:txBody>
-          <a:bodyPr spcFirstLastPara="1" wrap="square" lIns="91425" tIns="45700" rIns="91425" bIns="45700" anchor="ctr" anchorCtr="0">
-            <a:normAutofit/>
-          </a:bodyPr>
-          <a:lstStyle/>
-          <a:p>
-            <a:pPr marL="0" lvl="0" indent="0" rtl="0">
-              <a:spcBef>
-                <a:spcPts val="0"/>
-              </a:spcBef>
-              <a:spcAft>
-                <a:spcPts val="0"/>
-              </a:spcAft>
-              <a:buClr>
-                <a:schemeClr val="dk1"/>
-              </a:buClr>
-              <a:buSzPts val="4400"/>
-              <a:buFont typeface="Arial"/>
-              <a:buNone/>
-            </a:pPr>
-            <a:r>
-              <a:rPr lang="ja-JP" dirty="0"/>
-              <a:t>テーマ</a:t>
-            </a:r>
-            <a:r>
-              <a:rPr lang="ja-JP" altLang="en-US" dirty="0"/>
-              <a:t>日田市の魅力</a:t>
-            </a:r>
-            <a:endParaRPr lang="ja-JP" altLang="en-US"/>
-          </a:p>
-        </p:txBody>
-      </p:sp>
-      <p:pic>
-        <p:nvPicPr>
-          <p:cNvPr id="2" name="図 1" descr="大分県日田市の地図 | Map-It マップ・イット">
-            <a:extLst>
-              <a:ext uri="{FF2B5EF4-FFF2-40B4-BE49-F238E27FC236}">
-                <a16:creationId xmlns:a16="http://schemas.microsoft.com/office/drawing/2014/main" id="{2A8B2B49-4F68-A3FE-F8C3-CF2D23259FFB}"/>
-              </a:ext>
-            </a:extLst>
-          </p:cNvPr>
-          <p:cNvPicPr>
-            <a:picLocks noChangeAspect="1"/>
-          </p:cNvPicPr>
-          <p:nvPr/>
-        </p:nvPicPr>
-        <p:blipFill>
-          <a:blip r:embed="rId3"/>
-          <a:srcRect t="939" r="-6" b="13161"/>
-          <a:stretch>
-            <a:fillRect/>
-          </a:stretch>
-        </p:blipFill>
-        <p:spPr>
-          <a:xfrm>
-            <a:off x="1028700" y="1779588"/>
-            <a:ext cx="5067300" cy="4352544"/>
+            <a:ext cx="10515600" cy="1325700"/>
           </a:xfrm>
           <a:prstGeom prst="rect">
             <a:avLst/>
@@ -15223,7 +15921,165 @@
             <a:noFill/>
           </a:ln>
         </p:spPr>
-      </p:pic>
+        <p:txBody>
+          <a:bodyPr spcFirstLastPara="1" wrap="square" lIns="91425" tIns="45700" rIns="91425" bIns="45700" anchor="ctr" anchorCtr="0">
+            <a:normAutofit/>
+          </a:bodyPr>
+          <a:lstStyle/>
+          <a:p>
+            <a:pPr marL="0" lvl="0" indent="0" algn="ctr" rtl="0">
+              <a:lnSpc>
+                <a:spcPct val="90000"/>
+              </a:lnSpc>
+              <a:spcBef>
+                <a:spcPts val="0"/>
+              </a:spcBef>
+              <a:spcAft>
+                <a:spcPts val="0"/>
+              </a:spcAft>
+              <a:buClr>
+                <a:schemeClr val="dk1"/>
+              </a:buClr>
+              <a:buSzPts val="4400"/>
+              <a:buFont typeface="Arial"/>
+              <a:buNone/>
+            </a:pPr>
+            <a:r>
+              <a:rPr lang="ja-JP" altLang="en-US" dirty="0"/>
+              <a:t>制作・研究方法</a:t>
+            </a:r>
+          </a:p>
+        </p:txBody>
+      </p:sp>
+      <p:graphicFrame>
+        <p:nvGraphicFramePr>
+          <p:cNvPr id="2" name="表 1">
+            <a:extLst>
+              <a:ext uri="{FF2B5EF4-FFF2-40B4-BE49-F238E27FC236}">
+                <a16:creationId xmlns:a16="http://schemas.microsoft.com/office/drawing/2014/main" id="{18E3E2D3-8C68-C5FC-18EF-54654B3554F8}"/>
+              </a:ext>
+            </a:extLst>
+          </p:cNvPr>
+          <p:cNvGraphicFramePr>
+            <a:graphicFrameLocks noGrp="1"/>
+          </p:cNvGraphicFramePr>
+          <p:nvPr>
+            <p:extLst>
+              <p:ext uri="{D42A27DB-BD31-4B8C-83A1-F6EECF244321}">
+                <p14:modId xmlns:p14="http://schemas.microsoft.com/office/powerpoint/2010/main" val="505898620"/>
+              </p:ext>
+            </p:extLst>
+          </p:nvPr>
+        </p:nvGraphicFramePr>
+        <p:xfrm>
+          <a:off x="2032000" y="4351867"/>
+          <a:ext cx="8128000" cy="914400"/>
+        </p:xfrm>
+        <a:graphic>
+          <a:graphicData uri="http://schemas.openxmlformats.org/drawingml/2006/table">
+            <a:tbl>
+              <a:tblPr firstRow="1" bandRow="1">
+                <a:tableStyleId>{5940675A-B579-460E-94D1-54222C63F5DA}</a:tableStyleId>
+              </a:tblPr>
+              <a:tblGrid>
+                <a:gridCol w="4064000">
+                  <a:extLst>
+                    <a:ext uri="{9D8B030D-6E8A-4147-A177-3AD203B41FA5}">
+                      <a16:colId xmlns:a16="http://schemas.microsoft.com/office/drawing/2014/main" val="4181133430"/>
+                    </a:ext>
+                  </a:extLst>
+                </a:gridCol>
+                <a:gridCol w="4064000">
+                  <a:extLst>
+                    <a:ext uri="{9D8B030D-6E8A-4147-A177-3AD203B41FA5}">
+                      <a16:colId xmlns:a16="http://schemas.microsoft.com/office/drawing/2014/main" val="1519175667"/>
+                    </a:ext>
+                  </a:extLst>
+                </a:gridCol>
+              </a:tblGrid>
+              <a:tr h="370840">
+                <a:tc>
+                  <a:txBody>
+                    <a:bodyPr/>
+                    <a:lstStyle/>
+                    <a:p>
+                      <a:pPr algn="ctr"/>
+                      <a:r>
+                        <a:rPr kumimoji="1" lang="ja-JP" altLang="en-US" sz="2400" dirty="0"/>
+                        <a:t>撮影機材</a:t>
+                      </a:r>
+                    </a:p>
+                  </a:txBody>
+                  <a:tcPr/>
+                </a:tc>
+                <a:tc>
+                  <a:txBody>
+                    <a:bodyPr/>
+                    <a:lstStyle/>
+                    <a:p>
+                      <a:pPr algn="ctr"/>
+                      <a:r>
+                        <a:rPr kumimoji="1" lang="ja-JP" altLang="en-US" sz="2400" dirty="0"/>
+                        <a:t>スマホ</a:t>
+                      </a:r>
+                    </a:p>
+                  </a:txBody>
+                  <a:tcPr/>
+                </a:tc>
+                <a:extLst>
+                  <a:ext uri="{0D108BD9-81ED-4DB2-BD59-A6C34878D82A}">
+                    <a16:rowId xmlns:a16="http://schemas.microsoft.com/office/drawing/2014/main" val="1469269899"/>
+                  </a:ext>
+                </a:extLst>
+              </a:tr>
+              <a:tr h="370840">
+                <a:tc>
+                  <a:txBody>
+                    <a:bodyPr/>
+                    <a:lstStyle/>
+                    <a:p>
+                      <a:pPr algn="ctr"/>
+                      <a:r>
+                        <a:rPr kumimoji="1" lang="ja-JP" altLang="en-US" sz="2400" dirty="0"/>
+                        <a:t>編集</a:t>
+                      </a:r>
+                    </a:p>
+                  </a:txBody>
+                  <a:tcPr/>
+                </a:tc>
+                <a:tc>
+                  <a:txBody>
+                    <a:bodyPr/>
+                    <a:lstStyle/>
+                    <a:p>
+                      <a:pPr algn="ctr"/>
+                      <a:r>
+                        <a:rPr kumimoji="1" lang="en-US" altLang="ja-JP" sz="2400" dirty="0"/>
+                        <a:t>HTML</a:t>
+                      </a:r>
+                      <a:r>
+                        <a:rPr kumimoji="1" lang="ja-JP" altLang="en-US" sz="2400" dirty="0"/>
+                        <a:t>、</a:t>
+                      </a:r>
+                      <a:r>
+                        <a:rPr kumimoji="1" lang="en-US" altLang="ja-JP" sz="2400" dirty="0"/>
+                        <a:t>CSS</a:t>
+                      </a:r>
+                      <a:endParaRPr kumimoji="1" lang="ja-JP" altLang="en-US" sz="2400" dirty="0"/>
+                    </a:p>
+                  </a:txBody>
+                  <a:tcPr/>
+                </a:tc>
+                <a:extLst>
+                  <a:ext uri="{0D108BD9-81ED-4DB2-BD59-A6C34878D82A}">
+                    <a16:rowId xmlns:a16="http://schemas.microsoft.com/office/drawing/2014/main" val="247675461"/>
+                  </a:ext>
+                </a:extLst>
+              </a:tr>
+            </a:tbl>
+          </a:graphicData>
+        </a:graphic>
+      </p:graphicFrame>
     </p:spTree>
   </p:cSld>
   <p:clrMapOvr>
@@ -15232,7 +16088,7 @@
 </p:sld>
 </file>
 
-<file path=ppt/slides/slide3.xml><?xml version="1.0" encoding="utf-8"?>
+<file path=ppt/slides/slide2.xml><?xml version="1.0" encoding="utf-8"?>
 <p:sld xmlns:a="http://schemas.openxmlformats.org/drawingml/2006/main" xmlns:r="http://schemas.openxmlformats.org/officeDocument/2006/relationships" xmlns:p="http://schemas.openxmlformats.org/presentationml/2006/main">
   <p:cSld>
     <p:spTree>
@@ -15408,6 +16264,359 @@
               <a:buNone/>
             </a:pPr>
             <a:endParaRPr lang="en-US" altLang="ja-JP" dirty="0"/>
+          </a:p>
+        </p:txBody>
+      </p:sp>
+    </p:spTree>
+  </p:cSld>
+  <p:clrMapOvr>
+    <a:masterClrMapping/>
+  </p:clrMapOvr>
+</p:sld>
+</file>
+
+<file path=ppt/slides/slide3.xml><?xml version="1.0" encoding="utf-8"?>
+<p:sld xmlns:a="http://schemas.openxmlformats.org/drawingml/2006/main" xmlns:r="http://schemas.openxmlformats.org/officeDocument/2006/relationships" xmlns:p="http://schemas.openxmlformats.org/presentationml/2006/main">
+  <p:cSld>
+    <p:spTree>
+      <p:nvGrpSpPr>
+        <p:cNvPr id="1" name="Shape 89"/>
+        <p:cNvGrpSpPr/>
+        <p:nvPr/>
+      </p:nvGrpSpPr>
+      <p:grpSpPr>
+        <a:xfrm>
+          <a:off x="0" y="0"/>
+          <a:ext cx="0" cy="0"/>
+          <a:chOff x="0" y="0"/>
+          <a:chExt cx="0" cy="0"/>
+        </a:xfrm>
+      </p:grpSpPr>
+      <p:sp>
+        <p:nvSpPr>
+          <p:cNvPr id="90" name="Google Shape;90;p2"/>
+          <p:cNvSpPr txBox="1">
+            <a:spLocks noGrp="1"/>
+          </p:cNvSpPr>
+          <p:nvPr>
+            <p:ph type="title"/>
+          </p:nvPr>
+        </p:nvSpPr>
+        <p:spPr>
+          <a:xfrm>
+            <a:off x="838200" y="365125"/>
+            <a:ext cx="10515600" cy="1325563"/>
+          </a:xfrm>
+        </p:spPr>
+        <p:txBody>
+          <a:bodyPr spcFirstLastPara="1" wrap="square" lIns="91425" tIns="45700" rIns="91425" bIns="45700" anchor="ctr" anchorCtr="0">
+            <a:normAutofit/>
+          </a:bodyPr>
+          <a:lstStyle/>
+          <a:p>
+            <a:pPr marL="0" lvl="0" indent="0" algn="ctr" rtl="0">
+              <a:spcBef>
+                <a:spcPts val="0"/>
+              </a:spcBef>
+              <a:spcAft>
+                <a:spcPts val="0"/>
+              </a:spcAft>
+              <a:buClr>
+                <a:schemeClr val="dk1"/>
+              </a:buClr>
+              <a:buSzPts val="4400"/>
+              <a:buFont typeface="Arial"/>
+              <a:buNone/>
+            </a:pPr>
+            <a:r>
+              <a:rPr lang="ja-JP" dirty="0"/>
+              <a:t>テーマ</a:t>
+            </a:r>
+            <a:r>
+              <a:rPr lang="ja-JP" altLang="en-US" dirty="0"/>
+              <a:t>１日田市の魅力</a:t>
+            </a:r>
+          </a:p>
+        </p:txBody>
+      </p:sp>
+      <p:sp>
+        <p:nvSpPr>
+          <p:cNvPr id="4" name="テキスト ボックス 3">
+            <a:extLst>
+              <a:ext uri="{FF2B5EF4-FFF2-40B4-BE49-F238E27FC236}">
+                <a16:creationId xmlns:a16="http://schemas.microsoft.com/office/drawing/2014/main" id="{2AEBA4D4-BBF0-ACA9-663F-F662E48C82C3}"/>
+              </a:ext>
+            </a:extLst>
+          </p:cNvPr>
+          <p:cNvSpPr txBox="1"/>
+          <p:nvPr/>
+        </p:nvSpPr>
+        <p:spPr>
+          <a:xfrm>
+            <a:off x="3048000" y="2274838"/>
+            <a:ext cx="6096000" cy="2308324"/>
+          </a:xfrm>
+          <a:prstGeom prst="rect">
+            <a:avLst/>
+          </a:prstGeom>
+          <a:noFill/>
+        </p:spPr>
+        <p:txBody>
+          <a:bodyPr wrap="square">
+            <a:spAutoFit/>
+          </a:bodyPr>
+          <a:lstStyle/>
+          <a:p>
+            <a:pPr marL="177800" algn="ctr" rtl="0">
+              <a:buNone/>
+            </a:pPr>
+            <a:r>
+              <a:rPr lang="ja-JP" altLang="ja-JP" sz="1600" b="1" i="0" u="none" strike="noStrike" dirty="0">
+                <a:solidFill>
+                  <a:srgbClr val="000000"/>
+                </a:solidFill>
+                <a:effectLst/>
+                <a:latin typeface="Arial" panose="020B0604020202020204" pitchFamily="34" charset="0"/>
+              </a:rPr>
+              <a:t>目的　</a:t>
+            </a:r>
+            <a:endParaRPr lang="ja-JP" altLang="ja-JP" b="0" dirty="0">
+              <a:effectLst/>
+            </a:endParaRPr>
+          </a:p>
+          <a:p>
+            <a:pPr marL="177800" rtl="0">
+              <a:buNone/>
+            </a:pPr>
+            <a:r>
+              <a:rPr lang="ja-JP" altLang="ja-JP" sz="1400" b="0" i="0" u="none" strike="noStrike" dirty="0">
+                <a:solidFill>
+                  <a:srgbClr val="000000"/>
+                </a:solidFill>
+                <a:effectLst/>
+                <a:latin typeface="Arial" panose="020B0604020202020204" pitchFamily="34" charset="0"/>
+              </a:rPr>
+              <a:t>日田市の歴史や文化、グルメなど多くの人に知ってもらい観光や地域への関心を高める</a:t>
+            </a:r>
+            <a:endParaRPr lang="ja-JP" altLang="ja-JP" b="0" dirty="0">
+              <a:effectLst/>
+            </a:endParaRPr>
+          </a:p>
+          <a:p>
+            <a:pPr>
+              <a:buNone/>
+            </a:pPr>
+            <a:br>
+              <a:rPr lang="ja-JP" altLang="ja-JP" b="0" dirty="0">
+                <a:effectLst/>
+              </a:rPr>
+            </a:br>
+            <a:endParaRPr lang="ja-JP" altLang="ja-JP" b="0" dirty="0">
+              <a:effectLst/>
+            </a:endParaRPr>
+          </a:p>
+          <a:p>
+            <a:pPr marL="177800" indent="-50800" algn="ctr" rtl="0">
+              <a:buNone/>
+            </a:pPr>
+            <a:r>
+              <a:rPr lang="ja-JP" altLang="ja-JP" sz="1600" b="1" i="0" u="none" strike="noStrike" dirty="0">
+                <a:solidFill>
+                  <a:srgbClr val="000000"/>
+                </a:solidFill>
+                <a:effectLst/>
+                <a:latin typeface="Arial" panose="020B0604020202020204" pitchFamily="34" charset="0"/>
+              </a:rPr>
+              <a:t>背景 </a:t>
+            </a:r>
+            <a:endParaRPr lang="ja-JP" altLang="ja-JP" b="0" dirty="0">
+              <a:effectLst/>
+            </a:endParaRPr>
+          </a:p>
+          <a:p>
+            <a:pPr marL="177800" indent="-50800" rtl="0">
+              <a:buNone/>
+            </a:pPr>
+            <a:r>
+              <a:rPr lang="ja-JP" altLang="ja-JP" sz="1400" b="0" i="0" u="none" strike="noStrike" dirty="0">
+                <a:solidFill>
+                  <a:srgbClr val="000000"/>
+                </a:solidFill>
+                <a:effectLst/>
+                <a:latin typeface="Arial" panose="020B0604020202020204" pitchFamily="34" charset="0"/>
+              </a:rPr>
+              <a:t>歴史文化だけでなく、食や産業観光、アニメ・漫画をきっかけとした観光など、新たな魅力の発信にも取り組んでいる</a:t>
+            </a:r>
+            <a:endParaRPr lang="ja-JP" altLang="ja-JP" b="0" dirty="0">
+              <a:effectLst/>
+            </a:endParaRPr>
+          </a:p>
+          <a:p>
+            <a:pPr>
+              <a:buNone/>
+            </a:pPr>
+            <a:br>
+              <a:rPr lang="ja-JP" altLang="ja-JP" dirty="0"/>
+            </a:br>
+            <a:endParaRPr lang="ja-JP" altLang="en-US" dirty="0"/>
+          </a:p>
+        </p:txBody>
+      </p:sp>
+      <p:sp>
+        <p:nvSpPr>
+          <p:cNvPr id="6" name="テキスト ボックス 5">
+            <a:extLst>
+              <a:ext uri="{FF2B5EF4-FFF2-40B4-BE49-F238E27FC236}">
+                <a16:creationId xmlns:a16="http://schemas.microsoft.com/office/drawing/2014/main" id="{54965278-76A7-2407-20C4-27C4DE1041EB}"/>
+              </a:ext>
+            </a:extLst>
+          </p:cNvPr>
+          <p:cNvSpPr txBox="1"/>
+          <p:nvPr/>
+        </p:nvSpPr>
+        <p:spPr>
+          <a:xfrm>
+            <a:off x="3048000" y="5167312"/>
+            <a:ext cx="6096000" cy="1169551"/>
+          </a:xfrm>
+          <a:prstGeom prst="rect">
+            <a:avLst/>
+          </a:prstGeom>
+          <a:noFill/>
+        </p:spPr>
+        <p:txBody>
+          <a:bodyPr wrap="square">
+            <a:spAutoFit/>
+          </a:bodyPr>
+          <a:lstStyle/>
+          <a:p>
+            <a:pPr algn="ctr" rtl="0">
+              <a:buNone/>
+            </a:pPr>
+            <a:r>
+              <a:rPr lang="ja-JP" altLang="ja-JP" sz="1400" b="0" i="0" u="none" strike="noStrike">
+                <a:solidFill>
+                  <a:srgbClr val="000000"/>
+                </a:solidFill>
+                <a:effectLst/>
+                <a:latin typeface="Arial" panose="020B0604020202020204" pitchFamily="34" charset="0"/>
+              </a:rPr>
+              <a:t>20～40代の国内観光客</a:t>
+            </a:r>
+            <a:endParaRPr lang="ja-JP" altLang="ja-JP" b="0">
+              <a:effectLst/>
+            </a:endParaRPr>
+          </a:p>
+          <a:p>
+            <a:pPr algn="ctr" rtl="0">
+              <a:buNone/>
+            </a:pPr>
+            <a:r>
+              <a:rPr lang="ja-JP" altLang="ja-JP" sz="1400" b="0" i="0" u="none" strike="noStrike">
+                <a:solidFill>
+                  <a:srgbClr val="000000"/>
+                </a:solidFill>
+                <a:effectLst/>
+                <a:latin typeface="Arial" panose="020B0604020202020204" pitchFamily="34" charset="0"/>
+              </a:rPr>
+              <a:t>九州旅行を計画している人</a:t>
+            </a:r>
+            <a:endParaRPr lang="ja-JP" altLang="ja-JP" b="0">
+              <a:effectLst/>
+            </a:endParaRPr>
+          </a:p>
+          <a:p>
+            <a:pPr algn="ctr" rtl="0">
+              <a:buNone/>
+            </a:pPr>
+            <a:r>
+              <a:rPr lang="ja-JP" altLang="ja-JP" sz="1400" b="0" i="0" u="none" strike="noStrike">
+                <a:solidFill>
+                  <a:srgbClr val="000000"/>
+                </a:solidFill>
+                <a:effectLst/>
+                <a:latin typeface="Arial" panose="020B0604020202020204" pitchFamily="34" charset="0"/>
+              </a:rPr>
+              <a:t>日田市を初めて訪れる人</a:t>
+            </a:r>
+            <a:endParaRPr lang="ja-JP" altLang="ja-JP" b="0">
+              <a:effectLst/>
+            </a:endParaRPr>
+          </a:p>
+          <a:p>
+            <a:pPr>
+              <a:buNone/>
+            </a:pPr>
+            <a:br>
+              <a:rPr lang="ja-JP" altLang="ja-JP"/>
+            </a:br>
+            <a:endParaRPr lang="ja-JP" altLang="en-US" dirty="0"/>
+          </a:p>
+        </p:txBody>
+      </p:sp>
+      <p:sp>
+        <p:nvSpPr>
+          <p:cNvPr id="9" name="テキスト ボックス 8">
+            <a:extLst>
+              <a:ext uri="{FF2B5EF4-FFF2-40B4-BE49-F238E27FC236}">
+                <a16:creationId xmlns:a16="http://schemas.microsoft.com/office/drawing/2014/main" id="{B829B4C2-35D1-6331-9C5E-2FF710E30939}"/>
+              </a:ext>
+            </a:extLst>
+          </p:cNvPr>
+          <p:cNvSpPr txBox="1"/>
+          <p:nvPr/>
+        </p:nvSpPr>
+        <p:spPr>
+          <a:xfrm>
+            <a:off x="3048000" y="4668335"/>
+            <a:ext cx="6096000" cy="738664"/>
+          </a:xfrm>
+          <a:prstGeom prst="rect">
+            <a:avLst/>
+          </a:prstGeom>
+          <a:noFill/>
+        </p:spPr>
+        <p:txBody>
+          <a:bodyPr wrap="square">
+            <a:spAutoFit/>
+          </a:bodyPr>
+          <a:lstStyle/>
+          <a:p>
+            <a:pPr algn="ctr" rtl="0">
+              <a:buNone/>
+            </a:pPr>
+            <a:r>
+              <a:rPr lang="ja-JP" altLang="ja-JP" sz="1400" b="1" i="0" u="none" strike="noStrike" dirty="0">
+                <a:solidFill>
+                  <a:srgbClr val="000000"/>
+                </a:solidFill>
+                <a:effectLst/>
+                <a:latin typeface="Times New Roman" panose="02020603050405020304" pitchFamily="18" charset="0"/>
+              </a:rPr>
+              <a:t>ターゲット</a:t>
+            </a:r>
+            <a:r>
+              <a:rPr lang="ja-JP" altLang="ja-JP" sz="1400" b="1" i="0" u="none" strike="noStrike" dirty="0">
+                <a:solidFill>
+                  <a:srgbClr val="000000"/>
+                </a:solidFill>
+                <a:effectLst/>
+                <a:latin typeface="Arial" panose="020B0604020202020204" pitchFamily="34" charset="0"/>
+              </a:rPr>
+              <a:t> </a:t>
+            </a:r>
+            <a:endParaRPr lang="ja-JP" altLang="ja-JP" b="0" dirty="0">
+              <a:effectLst/>
+            </a:endParaRPr>
+          </a:p>
+          <a:p>
+            <a:pPr>
+              <a:buNone/>
+            </a:pPr>
+            <a:br>
+              <a:rPr lang="ja-JP" altLang="ja-JP" dirty="0"/>
+            </a:br>
+            <a:endParaRPr lang="ja-JP" altLang="en-US" dirty="0"/>
           </a:p>
         </p:txBody>
       </p:sp>
@@ -15633,99 +16842,368 @@
       </p:grpSpPr>
       <p:sp>
         <p:nvSpPr>
-          <p:cNvPr id="108" name="Google Shape;108;g15565c702ff_2_0"/>
-          <p:cNvSpPr txBox="1">
-            <a:spLocks noGrp="1"/>
-          </p:cNvSpPr>
-          <p:nvPr>
-            <p:ph type="title"/>
-          </p:nvPr>
+          <p:cNvPr id="7" name="テキスト ボックス 6">
+            <a:extLst>
+              <a:ext uri="{FF2B5EF4-FFF2-40B4-BE49-F238E27FC236}">
+                <a16:creationId xmlns:a16="http://schemas.microsoft.com/office/drawing/2014/main" id="{28308880-E94F-E883-3D66-9B20BDF72C12}"/>
+              </a:ext>
+            </a:extLst>
+          </p:cNvPr>
+          <p:cNvSpPr txBox="1"/>
+          <p:nvPr/>
         </p:nvSpPr>
         <p:spPr>
           <a:xfrm>
-            <a:off x="838200" y="365125"/>
-            <a:ext cx="10515600" cy="1325700"/>
+            <a:off x="550333" y="558856"/>
+            <a:ext cx="6096000" cy="769441"/>
           </a:xfrm>
           <a:prstGeom prst="rect">
             <a:avLst/>
           </a:prstGeom>
           <a:noFill/>
-          <a:ln>
-            <a:noFill/>
-          </a:ln>
         </p:spPr>
         <p:txBody>
-          <a:bodyPr spcFirstLastPara="1" wrap="square" lIns="91425" tIns="45700" rIns="91425" bIns="45700" anchor="ctr" anchorCtr="0">
-            <a:normAutofit/>
+          <a:bodyPr wrap="square">
+            <a:spAutoFit/>
           </a:bodyPr>
           <a:lstStyle/>
           <a:p>
-            <a:pPr marL="0" lvl="0" indent="0" algn="l" rtl="0">
-              <a:lnSpc>
-                <a:spcPct val="90000"/>
-              </a:lnSpc>
-              <a:spcBef>
-                <a:spcPts val="0"/>
-              </a:spcBef>
-              <a:spcAft>
-                <a:spcPts val="0"/>
-              </a:spcAft>
-              <a:buClr>
-                <a:schemeClr val="dk1"/>
-              </a:buClr>
-              <a:buSzPts val="4400"/>
-              <a:buFont typeface="Arial"/>
-              <a:buNone/>
-            </a:pPr>
             <a:r>
-              <a:rPr lang="ja-JP" dirty="0"/>
-              <a:t>作品・研究の概要</a:t>
+              <a:rPr lang="ja-JP" altLang="ja-JP" sz="4400" b="0" i="0" u="none" strike="noStrike" dirty="0">
+                <a:solidFill>
+                  <a:srgbClr val="000000"/>
+                </a:solidFill>
+                <a:effectLst/>
+                <a:latin typeface="Arial" panose="020B0604020202020204" pitchFamily="34" charset="0"/>
+              </a:rPr>
+              <a:t>　　</a:t>
             </a:r>
-            <a:endParaRPr dirty="0"/>
+            <a:r>
+              <a:rPr lang="ja-JP" altLang="ja-JP" sz="4400" b="1" i="0" u="none" strike="noStrike" dirty="0">
+                <a:solidFill>
+                  <a:srgbClr val="000000"/>
+                </a:solidFill>
+                <a:effectLst/>
+                <a:latin typeface="Arial" panose="020B0604020202020204" pitchFamily="34" charset="0"/>
+              </a:rPr>
+              <a:t>内容</a:t>
+            </a:r>
+            <a:endParaRPr lang="ja-JP" altLang="en-US" sz="4400" dirty="0"/>
           </a:p>
         </p:txBody>
       </p:sp>
       <p:sp>
         <p:nvSpPr>
-          <p:cNvPr id="109" name="Google Shape;109;g15565c702ff_2_0"/>
-          <p:cNvSpPr txBox="1">
-            <a:spLocks noGrp="1"/>
-          </p:cNvSpPr>
-          <p:nvPr>
-            <p:ph type="body" idx="1"/>
-          </p:nvPr>
+          <p:cNvPr id="9" name="テキスト ボックス 8">
+            <a:extLst>
+              <a:ext uri="{FF2B5EF4-FFF2-40B4-BE49-F238E27FC236}">
+                <a16:creationId xmlns:a16="http://schemas.microsoft.com/office/drawing/2014/main" id="{4B22BB15-079F-58D8-BC37-C1EDC4F26E72}"/>
+              </a:ext>
+            </a:extLst>
+          </p:cNvPr>
+          <p:cNvSpPr txBox="1"/>
+          <p:nvPr/>
         </p:nvSpPr>
         <p:spPr>
           <a:xfrm>
-            <a:off x="838200" y="1825625"/>
-            <a:ext cx="10515600" cy="4351200"/>
+            <a:off x="0" y="2082605"/>
+            <a:ext cx="6096000" cy="4216539"/>
           </a:xfrm>
           <a:prstGeom prst="rect">
             <a:avLst/>
           </a:prstGeom>
           <a:noFill/>
-          <a:ln>
-            <a:noFill/>
-          </a:ln>
         </p:spPr>
         <p:txBody>
-          <a:bodyPr spcFirstLastPara="1" wrap="square" lIns="91425" tIns="45700" rIns="91425" bIns="45700" anchor="t" anchorCtr="0">
-            <a:normAutofit/>
+          <a:bodyPr wrap="square">
+            <a:spAutoFit/>
           </a:bodyPr>
           <a:lstStyle/>
           <a:p>
-            <a:pPr marL="228600" lvl="0" indent="-50800" algn="ctr">
-              <a:spcBef>
-                <a:spcPts val="0"/>
-              </a:spcBef>
-              <a:buSzPts val="2800"/>
+            <a:pPr algn="ctr" rtl="0">
               <a:buNone/>
             </a:pPr>
             <a:r>
+              <a:rPr lang="ja-JP" altLang="ja-JP" sz="2000" b="0" i="0" u="none" strike="noStrike" dirty="0">
+                <a:solidFill>
+                  <a:srgbClr val="000000"/>
+                </a:solidFill>
+                <a:effectLst/>
+                <a:latin typeface="Arial" panose="020B0604020202020204" pitchFamily="34" charset="0"/>
+              </a:rPr>
+              <a:t>ページ１日田市について </a:t>
+            </a:r>
+            <a:endParaRPr lang="ja-JP" altLang="ja-JP" sz="2000" b="0" dirty="0">
+              <a:effectLst/>
+            </a:endParaRPr>
+          </a:p>
+          <a:p>
+            <a:pPr>
+              <a:buNone/>
+            </a:pPr>
+            <a:br>
+              <a:rPr lang="ja-JP" altLang="ja-JP" sz="2000" b="0" dirty="0">
+                <a:effectLst/>
+              </a:rPr>
+            </a:br>
+            <a:endParaRPr lang="ja-JP" altLang="ja-JP" sz="2000" b="0" dirty="0">
+              <a:effectLst/>
+            </a:endParaRPr>
+          </a:p>
+          <a:p>
+            <a:pPr algn="ctr" rtl="0">
+              <a:buNone/>
+            </a:pPr>
+            <a:r>
+              <a:rPr lang="ja-JP" altLang="ja-JP" sz="2000" b="0" i="0" u="none" strike="noStrike" dirty="0">
+                <a:solidFill>
+                  <a:srgbClr val="000000"/>
+                </a:solidFill>
+                <a:effectLst/>
+                <a:latin typeface="Arial" panose="020B0604020202020204" pitchFamily="34" charset="0"/>
+              </a:rPr>
+              <a:t>ページ２おすすめ観光スポット</a:t>
+            </a:r>
+            <a:endParaRPr lang="ja-JP" altLang="ja-JP" sz="2000" b="0" dirty="0">
+              <a:effectLst/>
+            </a:endParaRPr>
+          </a:p>
+          <a:p>
+            <a:pPr>
+              <a:buNone/>
+            </a:pPr>
+            <a:br>
+              <a:rPr lang="ja-JP" altLang="ja-JP" sz="2000" b="0" dirty="0">
+                <a:effectLst/>
+              </a:rPr>
+            </a:br>
+            <a:endParaRPr lang="ja-JP" altLang="ja-JP" sz="2000" b="0" dirty="0">
+              <a:effectLst/>
+            </a:endParaRPr>
+          </a:p>
+          <a:p>
+            <a:pPr algn="ctr" rtl="0">
+              <a:buNone/>
+            </a:pPr>
+            <a:r>
+              <a:rPr lang="ja-JP" altLang="ja-JP" sz="2000" b="0" i="0" u="none" strike="noStrike" dirty="0">
+                <a:solidFill>
+                  <a:srgbClr val="000000"/>
+                </a:solidFill>
+                <a:effectLst/>
+                <a:latin typeface="Arial" panose="020B0604020202020204" pitchFamily="34" charset="0"/>
+              </a:rPr>
+              <a:t>ページ３ おいしいグルメ・カフェの紹介</a:t>
+            </a:r>
+            <a:endParaRPr lang="ja-JP" altLang="ja-JP" sz="2000" b="0" dirty="0">
+              <a:effectLst/>
+            </a:endParaRPr>
+          </a:p>
+          <a:p>
+            <a:pPr algn="ctr" rtl="0">
+              <a:buNone/>
+            </a:pPr>
+            <a:r>
+              <a:rPr lang="ja-JP" altLang="ja-JP" sz="2000" b="0" i="0" u="none" strike="noStrike" dirty="0">
+                <a:solidFill>
+                  <a:srgbClr val="000000"/>
+                </a:solidFill>
+                <a:effectLst/>
+                <a:latin typeface="Arial" panose="020B0604020202020204" pitchFamily="34" charset="0"/>
+              </a:rPr>
+              <a:t> </a:t>
+            </a:r>
+            <a:endParaRPr lang="ja-JP" altLang="ja-JP" sz="2000" b="0" dirty="0">
+              <a:effectLst/>
+            </a:endParaRPr>
+          </a:p>
+          <a:p>
+            <a:pPr algn="ctr" rtl="0">
+              <a:buNone/>
+            </a:pPr>
+            <a:r>
+              <a:rPr lang="ja-JP" altLang="ja-JP" sz="2000" b="0" i="0" u="none" strike="noStrike" dirty="0">
+                <a:solidFill>
+                  <a:srgbClr val="000000"/>
+                </a:solidFill>
+                <a:effectLst/>
+                <a:latin typeface="Arial" panose="020B0604020202020204" pitchFamily="34" charset="0"/>
+              </a:rPr>
+              <a:t>ページ４　千年あかりについて　</a:t>
+            </a:r>
+            <a:endParaRPr lang="ja-JP" altLang="ja-JP" sz="2000" b="0" dirty="0">
+              <a:effectLst/>
+            </a:endParaRPr>
+          </a:p>
+          <a:p>
+            <a:pPr>
+              <a:buNone/>
+            </a:pPr>
+            <a:br>
+              <a:rPr lang="ja-JP" altLang="ja-JP" sz="2000" b="0" dirty="0">
+                <a:effectLst/>
+              </a:rPr>
+            </a:br>
+            <a:endParaRPr lang="ja-JP" altLang="ja-JP" sz="2000" b="0" dirty="0">
+              <a:effectLst/>
+            </a:endParaRPr>
+          </a:p>
+          <a:p>
+            <a:pPr algn="ctr" rtl="0">
+              <a:buNone/>
+            </a:pPr>
+            <a:r>
+              <a:rPr lang="ja-JP" altLang="ja-JP" sz="2000" b="0" i="0" u="none" strike="noStrike" dirty="0">
+                <a:solidFill>
+                  <a:srgbClr val="000000"/>
+                </a:solidFill>
+                <a:effectLst/>
+                <a:latin typeface="Arial" panose="020B0604020202020204" pitchFamily="34" charset="0"/>
+              </a:rPr>
+              <a:t>ページ５ おすすめのお土産</a:t>
+            </a:r>
+            <a:endParaRPr lang="ja-JP" altLang="ja-JP" sz="2000" b="0" dirty="0">
+              <a:effectLst/>
+            </a:endParaRPr>
+          </a:p>
+          <a:p>
+            <a:pPr>
+              <a:buNone/>
+            </a:pPr>
+            <a:br>
               <a:rPr lang="ja-JP" altLang="ja-JP" dirty="0"/>
-              <a:t>日田市の魅力を紹介する観光パンフレットを制作するものである。歴史ある町並みや豊かな自然、食文化、伝統工芸などを掲載し、初めて日田市を訪れる人にも魅力が伝わるよう、見やすく親しみやすい紙面構成を目指す</a:t>
+            </a:br>
+            <a:endParaRPr lang="ja-JP" altLang="en-US" dirty="0"/>
+          </a:p>
+        </p:txBody>
+      </p:sp>
+      <p:sp>
+        <p:nvSpPr>
+          <p:cNvPr id="11" name="テキスト ボックス 10">
+            <a:extLst>
+              <a:ext uri="{FF2B5EF4-FFF2-40B4-BE49-F238E27FC236}">
+                <a16:creationId xmlns:a16="http://schemas.microsoft.com/office/drawing/2014/main" id="{91B83614-87A4-086B-F5AF-444E0A5C7ACA}"/>
+              </a:ext>
+            </a:extLst>
+          </p:cNvPr>
+          <p:cNvSpPr txBox="1"/>
+          <p:nvPr/>
+        </p:nvSpPr>
+        <p:spPr>
+          <a:xfrm>
+            <a:off x="6871063" y="558856"/>
+            <a:ext cx="6637866" cy="769441"/>
+          </a:xfrm>
+          <a:prstGeom prst="rect">
+            <a:avLst/>
+          </a:prstGeom>
+          <a:noFill/>
+        </p:spPr>
+        <p:txBody>
+          <a:bodyPr wrap="square">
+            <a:spAutoFit/>
+          </a:bodyPr>
+          <a:lstStyle/>
+          <a:p>
+            <a:r>
+              <a:rPr lang="ja-JP" altLang="ja-JP" sz="4400" b="1" i="0" u="none" strike="noStrike" dirty="0">
+                <a:solidFill>
+                  <a:srgbClr val="000000"/>
+                </a:solidFill>
+                <a:effectLst/>
+                <a:latin typeface="Arial" panose="020B0604020202020204" pitchFamily="34" charset="0"/>
+              </a:rPr>
+              <a:t>作品・研究の概要</a:t>
             </a:r>
-            <a:endParaRPr dirty="0"/>
+            <a:endParaRPr lang="ja-JP" altLang="en-US" sz="4400" b="1" dirty="0"/>
+          </a:p>
+        </p:txBody>
+      </p:sp>
+      <p:sp>
+        <p:nvSpPr>
+          <p:cNvPr id="13" name="テキスト ボックス 12">
+            <a:extLst>
+              <a:ext uri="{FF2B5EF4-FFF2-40B4-BE49-F238E27FC236}">
+                <a16:creationId xmlns:a16="http://schemas.microsoft.com/office/drawing/2014/main" id="{91A05F8D-4785-0D7A-AE6E-FBAE35FC4351}"/>
+              </a:ext>
+            </a:extLst>
+          </p:cNvPr>
+          <p:cNvSpPr txBox="1"/>
+          <p:nvPr/>
+        </p:nvSpPr>
+        <p:spPr>
+          <a:xfrm>
+            <a:off x="7619999" y="2544824"/>
+            <a:ext cx="3635827" cy="3754874"/>
+          </a:xfrm>
+          <a:prstGeom prst="rect">
+            <a:avLst/>
+          </a:prstGeom>
+          <a:noFill/>
+        </p:spPr>
+        <p:txBody>
+          <a:bodyPr wrap="square">
+            <a:spAutoFit/>
+          </a:bodyPr>
+          <a:lstStyle/>
+          <a:p>
+            <a:pPr rtl="0">
+              <a:spcBef>
+                <a:spcPts val="1200"/>
+              </a:spcBef>
+              <a:spcAft>
+                <a:spcPts val="1200"/>
+              </a:spcAft>
+              <a:buNone/>
+            </a:pPr>
+            <a:r>
+              <a:rPr lang="ja-JP" altLang="ja-JP" sz="2000" b="0" i="0" u="none" strike="noStrike" dirty="0">
+                <a:solidFill>
+                  <a:srgbClr val="000000"/>
+                </a:solidFill>
+                <a:effectLst/>
+                <a:latin typeface="Arial" panose="020B0604020202020204" pitchFamily="34" charset="0"/>
+              </a:rPr>
+              <a:t>日田市の魅力を多くの人に知ってもらうことを目的とした観光Webサイトです。</a:t>
+            </a:r>
+            <a:endParaRPr lang="ja-JP" altLang="ja-JP" sz="2000" b="0" dirty="0">
+              <a:effectLst/>
+            </a:endParaRPr>
+          </a:p>
+          <a:p>
+            <a:pPr rtl="0">
+              <a:spcBef>
+                <a:spcPts val="1200"/>
+              </a:spcBef>
+              <a:spcAft>
+                <a:spcPts val="1200"/>
+              </a:spcAft>
+              <a:buNone/>
+            </a:pPr>
+            <a:r>
+              <a:rPr lang="ja-JP" altLang="ja-JP" sz="2000" b="0" i="0" u="none" strike="noStrike" dirty="0">
+                <a:solidFill>
+                  <a:srgbClr val="000000"/>
+                </a:solidFill>
+                <a:effectLst/>
+                <a:latin typeface="Arial" panose="020B0604020202020204" pitchFamily="34" charset="0"/>
+              </a:rPr>
+              <a:t>日田市の観光スポットやグルメ、季節ごとのイベント、お土産などの情報を分かりやすく紹介し、初めて訪れる人でも日田市の魅力を感じられるサイトを目指しています</a:t>
+            </a:r>
+            <a:endParaRPr lang="ja-JP" altLang="ja-JP" sz="2000" b="0" dirty="0">
+              <a:effectLst/>
+            </a:endParaRPr>
+          </a:p>
+          <a:p>
+            <a:pPr>
+              <a:buNone/>
+            </a:pPr>
+            <a:br>
+              <a:rPr lang="ja-JP" altLang="ja-JP" b="0" dirty="0">
+                <a:effectLst/>
+              </a:rPr>
+            </a:br>
+            <a:endParaRPr lang="ja-JP" altLang="en-US" dirty="0"/>
           </a:p>
         </p:txBody>
       </p:sp>
@@ -15738,6 +17216,806 @@
 </file>
 
 <file path=ppt/slides/slide6.xml><?xml version="1.0" encoding="utf-8"?>
+<p:sld xmlns:a="http://schemas.openxmlformats.org/drawingml/2006/main" xmlns:r="http://schemas.openxmlformats.org/officeDocument/2006/relationships" xmlns:p="http://schemas.openxmlformats.org/presentationml/2006/main">
+  <p:cSld>
+    <p:spTree>
+      <p:nvGrpSpPr>
+        <p:cNvPr id="1" name=""/>
+        <p:cNvGrpSpPr/>
+        <p:nvPr/>
+      </p:nvGrpSpPr>
+      <p:grpSpPr>
+        <a:xfrm>
+          <a:off x="0" y="0"/>
+          <a:ext cx="0" cy="0"/>
+          <a:chOff x="0" y="0"/>
+          <a:chExt cx="0" cy="0"/>
+        </a:xfrm>
+      </p:grpSpPr>
+      <p:sp>
+        <p:nvSpPr>
+          <p:cNvPr id="3" name="正方形/長方形 2">
+            <a:extLst>
+              <a:ext uri="{FF2B5EF4-FFF2-40B4-BE49-F238E27FC236}">
+                <a16:creationId xmlns:a16="http://schemas.microsoft.com/office/drawing/2014/main" id="{37613A17-85B4-AB80-06F8-0B68D4853B71}"/>
+              </a:ext>
+            </a:extLst>
+          </p:cNvPr>
+          <p:cNvSpPr/>
+          <p:nvPr/>
+        </p:nvSpPr>
+        <p:spPr>
+          <a:xfrm>
+            <a:off x="405036" y="282298"/>
+            <a:ext cx="9536763" cy="6468306"/>
+          </a:xfrm>
+          <a:prstGeom prst="rect">
+            <a:avLst/>
+          </a:prstGeom>
+          <a:noFill/>
+        </p:spPr>
+        <p:style>
+          <a:lnRef idx="2">
+            <a:schemeClr val="accent1">
+              <a:shade val="15000"/>
+            </a:schemeClr>
+          </a:lnRef>
+          <a:fillRef idx="1">
+            <a:schemeClr val="accent1"/>
+          </a:fillRef>
+          <a:effectRef idx="0">
+            <a:schemeClr val="accent1"/>
+          </a:effectRef>
+          <a:fontRef idx="minor">
+            <a:schemeClr val="lt1"/>
+          </a:fontRef>
+        </p:style>
+        <p:txBody>
+          <a:bodyPr rtlCol="0" anchor="ctr"/>
+          <a:lstStyle/>
+          <a:p>
+            <a:pPr algn="ctr"/>
+            <a:endParaRPr kumimoji="1" lang="ja-JP" altLang="en-US"/>
+          </a:p>
+        </p:txBody>
+      </p:sp>
+      <p:sp>
+        <p:nvSpPr>
+          <p:cNvPr id="6" name="正方形/長方形 5">
+            <a:extLst>
+              <a:ext uri="{FF2B5EF4-FFF2-40B4-BE49-F238E27FC236}">
+                <a16:creationId xmlns:a16="http://schemas.microsoft.com/office/drawing/2014/main" id="{D4B27BE7-8DCB-6ADF-BE19-A134D852F4ED}"/>
+              </a:ext>
+            </a:extLst>
+          </p:cNvPr>
+          <p:cNvSpPr/>
+          <p:nvPr/>
+        </p:nvSpPr>
+        <p:spPr>
+          <a:xfrm>
+            <a:off x="466405" y="380489"/>
+            <a:ext cx="9364929" cy="816209"/>
+          </a:xfrm>
+          <a:prstGeom prst="rect">
+            <a:avLst/>
+          </a:prstGeom>
+          <a:noFill/>
+        </p:spPr>
+        <p:style>
+          <a:lnRef idx="2">
+            <a:schemeClr val="accent1">
+              <a:shade val="15000"/>
+            </a:schemeClr>
+          </a:lnRef>
+          <a:fillRef idx="1">
+            <a:schemeClr val="accent1"/>
+          </a:fillRef>
+          <a:effectRef idx="0">
+            <a:schemeClr val="accent1"/>
+          </a:effectRef>
+          <a:fontRef idx="minor">
+            <a:schemeClr val="lt1"/>
+          </a:fontRef>
+        </p:style>
+        <p:txBody>
+          <a:bodyPr rtlCol="0" anchor="ctr"/>
+          <a:lstStyle/>
+          <a:p>
+            <a:pPr algn="ctr"/>
+            <a:endParaRPr kumimoji="1" lang="ja-JP" altLang="en-US"/>
+          </a:p>
+        </p:txBody>
+      </p:sp>
+      <p:sp>
+        <p:nvSpPr>
+          <p:cNvPr id="8" name="正方形/長方形 7">
+            <a:extLst>
+              <a:ext uri="{FF2B5EF4-FFF2-40B4-BE49-F238E27FC236}">
+                <a16:creationId xmlns:a16="http://schemas.microsoft.com/office/drawing/2014/main" id="{E282C1A4-9E61-9F69-1975-B5FEA6BDD8AA}"/>
+              </a:ext>
+            </a:extLst>
+          </p:cNvPr>
+          <p:cNvSpPr/>
+          <p:nvPr/>
+        </p:nvSpPr>
+        <p:spPr>
+          <a:xfrm>
+            <a:off x="521638" y="1276478"/>
+            <a:ext cx="1356257" cy="5394346"/>
+          </a:xfrm>
+          <a:prstGeom prst="rect">
+            <a:avLst/>
+          </a:prstGeom>
+          <a:noFill/>
+        </p:spPr>
+        <p:style>
+          <a:lnRef idx="2">
+            <a:schemeClr val="accent1">
+              <a:shade val="15000"/>
+            </a:schemeClr>
+          </a:lnRef>
+          <a:fillRef idx="1">
+            <a:schemeClr val="accent1"/>
+          </a:fillRef>
+          <a:effectRef idx="0">
+            <a:schemeClr val="accent1"/>
+          </a:effectRef>
+          <a:fontRef idx="minor">
+            <a:schemeClr val="lt1"/>
+          </a:fontRef>
+        </p:style>
+        <p:txBody>
+          <a:bodyPr rtlCol="0" anchor="ctr"/>
+          <a:lstStyle/>
+          <a:p>
+            <a:pPr algn="ctr"/>
+            <a:endParaRPr kumimoji="1" lang="ja-JP" altLang="en-US"/>
+          </a:p>
+        </p:txBody>
+      </p:sp>
+      <p:sp>
+        <p:nvSpPr>
+          <p:cNvPr id="10" name="正方形/長方形 9">
+            <a:extLst>
+              <a:ext uri="{FF2B5EF4-FFF2-40B4-BE49-F238E27FC236}">
+                <a16:creationId xmlns:a16="http://schemas.microsoft.com/office/drawing/2014/main" id="{BCEDBCD5-56AB-423B-DBA7-2BC97CE6939E}"/>
+              </a:ext>
+            </a:extLst>
+          </p:cNvPr>
+          <p:cNvSpPr/>
+          <p:nvPr/>
+        </p:nvSpPr>
+        <p:spPr>
+          <a:xfrm>
+            <a:off x="2166330" y="1350121"/>
+            <a:ext cx="2988677" cy="1589460"/>
+          </a:xfrm>
+          <a:prstGeom prst="rect">
+            <a:avLst/>
+          </a:prstGeom>
+          <a:noFill/>
+        </p:spPr>
+        <p:style>
+          <a:lnRef idx="2">
+            <a:schemeClr val="accent1">
+              <a:shade val="15000"/>
+            </a:schemeClr>
+          </a:lnRef>
+          <a:fillRef idx="1">
+            <a:schemeClr val="accent1"/>
+          </a:fillRef>
+          <a:effectRef idx="0">
+            <a:schemeClr val="accent1"/>
+          </a:effectRef>
+          <a:fontRef idx="minor">
+            <a:schemeClr val="lt1"/>
+          </a:fontRef>
+        </p:style>
+        <p:txBody>
+          <a:bodyPr rtlCol="0" anchor="ctr"/>
+          <a:lstStyle/>
+          <a:p>
+            <a:pPr algn="ctr"/>
+            <a:endParaRPr kumimoji="1" lang="ja-JP" altLang="en-US"/>
+          </a:p>
+        </p:txBody>
+      </p:sp>
+      <p:sp>
+        <p:nvSpPr>
+          <p:cNvPr id="12" name="正方形/長方形 11">
+            <a:extLst>
+              <a:ext uri="{FF2B5EF4-FFF2-40B4-BE49-F238E27FC236}">
+                <a16:creationId xmlns:a16="http://schemas.microsoft.com/office/drawing/2014/main" id="{72673790-B20C-B788-490B-E37F39B36F4C}"/>
+              </a:ext>
+            </a:extLst>
+          </p:cNvPr>
+          <p:cNvSpPr/>
+          <p:nvPr/>
+        </p:nvSpPr>
+        <p:spPr>
+          <a:xfrm>
+            <a:off x="2166330" y="1350121"/>
+            <a:ext cx="7499308" cy="2338164"/>
+          </a:xfrm>
+          <a:prstGeom prst="rect">
+            <a:avLst/>
+          </a:prstGeom>
+          <a:noFill/>
+        </p:spPr>
+        <p:style>
+          <a:lnRef idx="2">
+            <a:schemeClr val="accent1">
+              <a:shade val="15000"/>
+            </a:schemeClr>
+          </a:lnRef>
+          <a:fillRef idx="1">
+            <a:schemeClr val="accent1"/>
+          </a:fillRef>
+          <a:effectRef idx="0">
+            <a:schemeClr val="accent1"/>
+          </a:effectRef>
+          <a:fontRef idx="minor">
+            <a:schemeClr val="lt1"/>
+          </a:fontRef>
+        </p:style>
+        <p:txBody>
+          <a:bodyPr rtlCol="0" anchor="ctr"/>
+          <a:lstStyle/>
+          <a:p>
+            <a:pPr algn="ctr"/>
+            <a:endParaRPr kumimoji="1" lang="ja-JP" altLang="en-US"/>
+          </a:p>
+        </p:txBody>
+      </p:sp>
+      <p:sp>
+        <p:nvSpPr>
+          <p:cNvPr id="16" name="正方形/長方形 15">
+            <a:extLst>
+              <a:ext uri="{FF2B5EF4-FFF2-40B4-BE49-F238E27FC236}">
+                <a16:creationId xmlns:a16="http://schemas.microsoft.com/office/drawing/2014/main" id="{C99583DA-A415-1896-D865-66BEC854E9FD}"/>
+              </a:ext>
+            </a:extLst>
+          </p:cNvPr>
+          <p:cNvSpPr/>
+          <p:nvPr/>
+        </p:nvSpPr>
+        <p:spPr>
+          <a:xfrm>
+            <a:off x="5351388" y="3811023"/>
+            <a:ext cx="4314250" cy="1589460"/>
+          </a:xfrm>
+          <a:prstGeom prst="rect">
+            <a:avLst/>
+          </a:prstGeom>
+          <a:noFill/>
+        </p:spPr>
+        <p:style>
+          <a:lnRef idx="2">
+            <a:schemeClr val="accent1">
+              <a:shade val="15000"/>
+            </a:schemeClr>
+          </a:lnRef>
+          <a:fillRef idx="1">
+            <a:schemeClr val="accent1"/>
+          </a:fillRef>
+          <a:effectRef idx="0">
+            <a:schemeClr val="accent1"/>
+          </a:effectRef>
+          <a:fontRef idx="minor">
+            <a:schemeClr val="lt1"/>
+          </a:fontRef>
+        </p:style>
+        <p:txBody>
+          <a:bodyPr rtlCol="0" anchor="ctr"/>
+          <a:lstStyle/>
+          <a:p>
+            <a:pPr algn="ctr"/>
+            <a:endParaRPr kumimoji="1" lang="ja-JP" altLang="en-US"/>
+          </a:p>
+        </p:txBody>
+      </p:sp>
+      <p:sp>
+        <p:nvSpPr>
+          <p:cNvPr id="18" name="正方形/長方形 17">
+            <a:extLst>
+              <a:ext uri="{FF2B5EF4-FFF2-40B4-BE49-F238E27FC236}">
+                <a16:creationId xmlns:a16="http://schemas.microsoft.com/office/drawing/2014/main" id="{6477C70E-6EF9-B625-01DA-7383BA5B2566}"/>
+              </a:ext>
+            </a:extLst>
+          </p:cNvPr>
+          <p:cNvSpPr/>
+          <p:nvPr/>
+        </p:nvSpPr>
+        <p:spPr>
+          <a:xfrm>
+            <a:off x="2166330" y="3811023"/>
+            <a:ext cx="7499308" cy="2764679"/>
+          </a:xfrm>
+          <a:prstGeom prst="rect">
+            <a:avLst/>
+          </a:prstGeom>
+          <a:noFill/>
+        </p:spPr>
+        <p:style>
+          <a:lnRef idx="2">
+            <a:schemeClr val="accent1">
+              <a:shade val="15000"/>
+            </a:schemeClr>
+          </a:lnRef>
+          <a:fillRef idx="1">
+            <a:schemeClr val="accent1"/>
+          </a:fillRef>
+          <a:effectRef idx="0">
+            <a:schemeClr val="accent1"/>
+          </a:effectRef>
+          <a:fontRef idx="minor">
+            <a:schemeClr val="lt1"/>
+          </a:fontRef>
+        </p:style>
+        <p:txBody>
+          <a:bodyPr rtlCol="0" anchor="ctr"/>
+          <a:lstStyle/>
+          <a:p>
+            <a:pPr algn="ctr"/>
+            <a:endParaRPr kumimoji="1" lang="ja-JP" altLang="en-US"/>
+          </a:p>
+        </p:txBody>
+      </p:sp>
+      <p:sp>
+        <p:nvSpPr>
+          <p:cNvPr id="20" name="テキスト ボックス 19">
+            <a:extLst>
+              <a:ext uri="{FF2B5EF4-FFF2-40B4-BE49-F238E27FC236}">
+                <a16:creationId xmlns:a16="http://schemas.microsoft.com/office/drawing/2014/main" id="{D09E4298-94C2-F7EF-578F-216F6BB14414}"/>
+              </a:ext>
+            </a:extLst>
+          </p:cNvPr>
+          <p:cNvSpPr txBox="1"/>
+          <p:nvPr/>
+        </p:nvSpPr>
+        <p:spPr>
+          <a:xfrm>
+            <a:off x="3205719" y="1990962"/>
+            <a:ext cx="543739" cy="307777"/>
+          </a:xfrm>
+          <a:prstGeom prst="rect">
+            <a:avLst/>
+          </a:prstGeom>
+          <a:noFill/>
+        </p:spPr>
+        <p:txBody>
+          <a:bodyPr wrap="none" rtlCol="0">
+            <a:spAutoFit/>
+          </a:bodyPr>
+          <a:lstStyle/>
+          <a:p>
+            <a:r>
+              <a:rPr kumimoji="1" lang="ja-JP" altLang="en-US"/>
+              <a:t>写真</a:t>
+            </a:r>
+            <a:endParaRPr kumimoji="1" lang="ja-JP" altLang="en-US" dirty="0"/>
+          </a:p>
+        </p:txBody>
+      </p:sp>
+      <p:sp>
+        <p:nvSpPr>
+          <p:cNvPr id="29" name="テキスト ボックス 28">
+            <a:extLst>
+              <a:ext uri="{FF2B5EF4-FFF2-40B4-BE49-F238E27FC236}">
+                <a16:creationId xmlns:a16="http://schemas.microsoft.com/office/drawing/2014/main" id="{A66B4DAB-9584-95D4-C873-C4885132495E}"/>
+              </a:ext>
+            </a:extLst>
+          </p:cNvPr>
+          <p:cNvSpPr txBox="1"/>
+          <p:nvPr/>
+        </p:nvSpPr>
+        <p:spPr>
+          <a:xfrm>
+            <a:off x="2125417" y="497741"/>
+            <a:ext cx="6096000" cy="523220"/>
+          </a:xfrm>
+          <a:prstGeom prst="rect">
+            <a:avLst/>
+          </a:prstGeom>
+          <a:noFill/>
+        </p:spPr>
+        <p:txBody>
+          <a:bodyPr wrap="square">
+            <a:spAutoFit/>
+          </a:bodyPr>
+          <a:lstStyle/>
+          <a:p>
+            <a:pPr algn="ctr"/>
+            <a:r>
+              <a:rPr lang="ja-JP" altLang="ja-JP" dirty="0"/>
+              <a:t>日田市の魅力 Discover HITA</a:t>
+            </a:r>
+            <a:endParaRPr lang="en-US" altLang="ja-JP" dirty="0"/>
+          </a:p>
+          <a:p>
+            <a:pPr algn="ctr"/>
+            <a:r>
+              <a:rPr lang="ja-JP" altLang="ja-JP" dirty="0"/>
+              <a:t> Home | 観光 | グルメ | 千年あかり | お土産</a:t>
+            </a:r>
+            <a:endParaRPr lang="ja-JP" altLang="en-US" dirty="0"/>
+          </a:p>
+        </p:txBody>
+      </p:sp>
+      <p:sp>
+        <p:nvSpPr>
+          <p:cNvPr id="31" name="テキスト ボックス 30">
+            <a:extLst>
+              <a:ext uri="{FF2B5EF4-FFF2-40B4-BE49-F238E27FC236}">
+                <a16:creationId xmlns:a16="http://schemas.microsoft.com/office/drawing/2014/main" id="{A22FDDD8-5514-770D-7A0F-15ADC05C9534}"/>
+              </a:ext>
+            </a:extLst>
+          </p:cNvPr>
+          <p:cNvSpPr txBox="1"/>
+          <p:nvPr/>
+        </p:nvSpPr>
+        <p:spPr>
+          <a:xfrm>
+            <a:off x="787400" y="1808526"/>
+            <a:ext cx="1090495" cy="307777"/>
+          </a:xfrm>
+          <a:prstGeom prst="rect">
+            <a:avLst/>
+          </a:prstGeom>
+          <a:noFill/>
+        </p:spPr>
+        <p:txBody>
+          <a:bodyPr wrap="square">
+            <a:spAutoFit/>
+          </a:bodyPr>
+          <a:lstStyle/>
+          <a:p>
+            <a:r>
+              <a:rPr lang="ja-JP" altLang="ja-JP" dirty="0"/>
+              <a:t>MENU </a:t>
+            </a:r>
+            <a:endParaRPr lang="ja-JP" altLang="en-US" dirty="0"/>
+          </a:p>
+        </p:txBody>
+      </p:sp>
+      <p:sp>
+        <p:nvSpPr>
+          <p:cNvPr id="33" name="テキスト ボックス 32">
+            <a:extLst>
+              <a:ext uri="{FF2B5EF4-FFF2-40B4-BE49-F238E27FC236}">
+                <a16:creationId xmlns:a16="http://schemas.microsoft.com/office/drawing/2014/main" id="{1DD5F397-0CCC-1997-CF69-347E6C2C75DE}"/>
+              </a:ext>
+            </a:extLst>
+          </p:cNvPr>
+          <p:cNvSpPr txBox="1"/>
+          <p:nvPr/>
+        </p:nvSpPr>
+        <p:spPr>
+          <a:xfrm>
+            <a:off x="2861847" y="4693204"/>
+            <a:ext cx="1642420" cy="307777"/>
+          </a:xfrm>
+          <a:prstGeom prst="rect">
+            <a:avLst/>
+          </a:prstGeom>
+          <a:noFill/>
+        </p:spPr>
+        <p:txBody>
+          <a:bodyPr wrap="square">
+            <a:spAutoFit/>
+          </a:bodyPr>
+          <a:lstStyle/>
+          <a:p>
+            <a:r>
+              <a:rPr lang="ja-JP" altLang="ja-JP" dirty="0"/>
+              <a:t>観光スポット </a:t>
+            </a:r>
+            <a:endParaRPr lang="ja-JP" altLang="en-US" dirty="0"/>
+          </a:p>
+        </p:txBody>
+      </p:sp>
+      <p:sp>
+        <p:nvSpPr>
+          <p:cNvPr id="35" name="テキスト ボックス 34">
+            <a:extLst>
+              <a:ext uri="{FF2B5EF4-FFF2-40B4-BE49-F238E27FC236}">
+                <a16:creationId xmlns:a16="http://schemas.microsoft.com/office/drawing/2014/main" id="{42639DFE-4692-94D4-85BC-86C8BFD5C595}"/>
+              </a:ext>
+            </a:extLst>
+          </p:cNvPr>
+          <p:cNvSpPr txBox="1"/>
+          <p:nvPr/>
+        </p:nvSpPr>
+        <p:spPr>
+          <a:xfrm>
+            <a:off x="2982823" y="5085336"/>
+            <a:ext cx="1284377" cy="307777"/>
+          </a:xfrm>
+          <a:prstGeom prst="rect">
+            <a:avLst/>
+          </a:prstGeom>
+          <a:noFill/>
+        </p:spPr>
+        <p:txBody>
+          <a:bodyPr wrap="square">
+            <a:spAutoFit/>
+          </a:bodyPr>
+          <a:lstStyle/>
+          <a:p>
+            <a:r>
+              <a:rPr lang="ja-JP" altLang="ja-JP" dirty="0"/>
+              <a:t>写真3枚</a:t>
+            </a:r>
+            <a:endParaRPr lang="ja-JP" altLang="en-US" dirty="0"/>
+          </a:p>
+        </p:txBody>
+      </p:sp>
+      <p:sp>
+        <p:nvSpPr>
+          <p:cNvPr id="37" name="テキスト ボックス 36">
+            <a:extLst>
+              <a:ext uri="{FF2B5EF4-FFF2-40B4-BE49-F238E27FC236}">
+                <a16:creationId xmlns:a16="http://schemas.microsoft.com/office/drawing/2014/main" id="{34602147-98FC-711E-3D39-DBD71B735747}"/>
+              </a:ext>
+            </a:extLst>
+          </p:cNvPr>
+          <p:cNvSpPr txBox="1"/>
+          <p:nvPr/>
+        </p:nvSpPr>
+        <p:spPr>
+          <a:xfrm>
+            <a:off x="6527800" y="3968117"/>
+            <a:ext cx="6096000" cy="307777"/>
+          </a:xfrm>
+          <a:prstGeom prst="rect">
+            <a:avLst/>
+          </a:prstGeom>
+          <a:noFill/>
+        </p:spPr>
+        <p:txBody>
+          <a:bodyPr wrap="square">
+            <a:spAutoFit/>
+          </a:bodyPr>
+          <a:lstStyle/>
+          <a:p>
+            <a:r>
+              <a:rPr lang="ja-JP" altLang="ja-JP" dirty="0"/>
+              <a:t>グルメ・イベント</a:t>
+            </a:r>
+            <a:endParaRPr lang="ja-JP" altLang="en-US" dirty="0"/>
+          </a:p>
+        </p:txBody>
+      </p:sp>
+      <p:sp>
+        <p:nvSpPr>
+          <p:cNvPr id="39" name="テキスト ボックス 38">
+            <a:extLst>
+              <a:ext uri="{FF2B5EF4-FFF2-40B4-BE49-F238E27FC236}">
+                <a16:creationId xmlns:a16="http://schemas.microsoft.com/office/drawing/2014/main" id="{63AF7143-F3CE-EC64-55A7-66FD556CC00B}"/>
+              </a:ext>
+            </a:extLst>
+          </p:cNvPr>
+          <p:cNvSpPr txBox="1"/>
+          <p:nvPr/>
+        </p:nvSpPr>
+        <p:spPr>
+          <a:xfrm>
+            <a:off x="6647769" y="4401837"/>
+            <a:ext cx="6311900" cy="307777"/>
+          </a:xfrm>
+          <a:prstGeom prst="rect">
+            <a:avLst/>
+          </a:prstGeom>
+          <a:noFill/>
+        </p:spPr>
+        <p:txBody>
+          <a:bodyPr wrap="square">
+            <a:spAutoFit/>
+          </a:bodyPr>
+          <a:lstStyle/>
+          <a:p>
+            <a:r>
+              <a:rPr lang="ja-JP" altLang="ja-JP" dirty="0"/>
+              <a:t>写真・紹介 </a:t>
+            </a:r>
+            <a:endParaRPr lang="ja-JP" altLang="en-US" dirty="0"/>
+          </a:p>
+        </p:txBody>
+      </p:sp>
+      <p:sp>
+        <p:nvSpPr>
+          <p:cNvPr id="41" name="テキスト ボックス 40">
+            <a:extLst>
+              <a:ext uri="{FF2B5EF4-FFF2-40B4-BE49-F238E27FC236}">
+                <a16:creationId xmlns:a16="http://schemas.microsoft.com/office/drawing/2014/main" id="{72E75551-FB58-262B-3F21-ADA6CDB6E55F}"/>
+              </a:ext>
+            </a:extLst>
+          </p:cNvPr>
+          <p:cNvSpPr txBox="1"/>
+          <p:nvPr/>
+        </p:nvSpPr>
+        <p:spPr>
+          <a:xfrm>
+            <a:off x="6989618" y="1579790"/>
+            <a:ext cx="6481232" cy="307777"/>
+          </a:xfrm>
+          <a:prstGeom prst="rect">
+            <a:avLst/>
+          </a:prstGeom>
+          <a:noFill/>
+        </p:spPr>
+        <p:txBody>
+          <a:bodyPr wrap="square">
+            <a:spAutoFit/>
+          </a:bodyPr>
+          <a:lstStyle/>
+          <a:p>
+            <a:r>
+              <a:rPr lang="ja-JP" altLang="ja-JP" dirty="0"/>
+              <a:t>日田市について</a:t>
+            </a:r>
+            <a:endParaRPr lang="ja-JP" altLang="en-US" dirty="0"/>
+          </a:p>
+        </p:txBody>
+      </p:sp>
+      <p:sp>
+        <p:nvSpPr>
+          <p:cNvPr id="43" name="テキスト ボックス 42">
+            <a:extLst>
+              <a:ext uri="{FF2B5EF4-FFF2-40B4-BE49-F238E27FC236}">
+                <a16:creationId xmlns:a16="http://schemas.microsoft.com/office/drawing/2014/main" id="{087EB042-65CD-8EE5-7456-8F26FF5985CB}"/>
+              </a:ext>
+            </a:extLst>
+          </p:cNvPr>
+          <p:cNvSpPr txBox="1"/>
+          <p:nvPr/>
+        </p:nvSpPr>
+        <p:spPr>
+          <a:xfrm>
+            <a:off x="7145203" y="1909415"/>
+            <a:ext cx="6736080" cy="307777"/>
+          </a:xfrm>
+          <a:prstGeom prst="rect">
+            <a:avLst/>
+          </a:prstGeom>
+          <a:noFill/>
+        </p:spPr>
+        <p:txBody>
+          <a:bodyPr wrap="square">
+            <a:spAutoFit/>
+          </a:bodyPr>
+          <a:lstStyle/>
+          <a:p>
+            <a:r>
+              <a:rPr lang="ja-JP" altLang="ja-JP" dirty="0"/>
+              <a:t>紹介文</a:t>
+            </a:r>
+            <a:endParaRPr lang="ja-JP" altLang="en-US" dirty="0"/>
+          </a:p>
+        </p:txBody>
+      </p:sp>
+      <p:sp>
+        <p:nvSpPr>
+          <p:cNvPr id="45" name="テキスト ボックス 44">
+            <a:extLst>
+              <a:ext uri="{FF2B5EF4-FFF2-40B4-BE49-F238E27FC236}">
+                <a16:creationId xmlns:a16="http://schemas.microsoft.com/office/drawing/2014/main" id="{18BE5599-7170-6910-98B8-3FCDEE4671A9}"/>
+              </a:ext>
+            </a:extLst>
+          </p:cNvPr>
+          <p:cNvSpPr txBox="1"/>
+          <p:nvPr/>
+        </p:nvSpPr>
+        <p:spPr>
+          <a:xfrm>
+            <a:off x="6989618" y="2473895"/>
+            <a:ext cx="6940730" cy="307777"/>
+          </a:xfrm>
+          <a:prstGeom prst="rect">
+            <a:avLst/>
+          </a:prstGeom>
+          <a:noFill/>
+        </p:spPr>
+        <p:txBody>
+          <a:bodyPr wrap="square">
+            <a:spAutoFit/>
+          </a:bodyPr>
+          <a:lstStyle/>
+          <a:p>
+            <a:r>
+              <a:rPr lang="ja-JP" altLang="ja-JP" dirty="0"/>
+              <a:t>詳しく見る </a:t>
+            </a:r>
+            <a:endParaRPr lang="ja-JP" altLang="en-US" dirty="0"/>
+          </a:p>
+        </p:txBody>
+      </p:sp>
+      <p:sp>
+        <p:nvSpPr>
+          <p:cNvPr id="47" name="テキスト ボックス 46">
+            <a:extLst>
+              <a:ext uri="{FF2B5EF4-FFF2-40B4-BE49-F238E27FC236}">
+                <a16:creationId xmlns:a16="http://schemas.microsoft.com/office/drawing/2014/main" id="{65A71CF1-1F48-D8EC-10E1-08F6EA23FFAB}"/>
+              </a:ext>
+            </a:extLst>
+          </p:cNvPr>
+          <p:cNvSpPr txBox="1"/>
+          <p:nvPr/>
+        </p:nvSpPr>
+        <p:spPr>
+          <a:xfrm>
+            <a:off x="2698782" y="1629137"/>
+            <a:ext cx="6966856" cy="307777"/>
+          </a:xfrm>
+          <a:prstGeom prst="rect">
+            <a:avLst/>
+          </a:prstGeom>
+          <a:noFill/>
+        </p:spPr>
+        <p:txBody>
+          <a:bodyPr wrap="square">
+            <a:spAutoFit/>
+          </a:bodyPr>
+          <a:lstStyle/>
+          <a:p>
+            <a:r>
+              <a:rPr lang="ja-JP" altLang="ja-JP" dirty="0"/>
+              <a:t>日田市へようこそ </a:t>
+            </a:r>
+            <a:endParaRPr lang="ja-JP" altLang="en-US" dirty="0"/>
+          </a:p>
+        </p:txBody>
+      </p:sp>
+      <p:sp>
+        <p:nvSpPr>
+          <p:cNvPr id="49" name="テキスト ボックス 48">
+            <a:extLst>
+              <a:ext uri="{FF2B5EF4-FFF2-40B4-BE49-F238E27FC236}">
+                <a16:creationId xmlns:a16="http://schemas.microsoft.com/office/drawing/2014/main" id="{41689B81-5383-9471-C8C0-CE0E102D3E32}"/>
+              </a:ext>
+            </a:extLst>
+          </p:cNvPr>
+          <p:cNvSpPr txBox="1"/>
+          <p:nvPr/>
+        </p:nvSpPr>
+        <p:spPr>
+          <a:xfrm>
+            <a:off x="2698782" y="2416497"/>
+            <a:ext cx="6966856" cy="307777"/>
+          </a:xfrm>
+          <a:prstGeom prst="rect">
+            <a:avLst/>
+          </a:prstGeom>
+          <a:noFill/>
+        </p:spPr>
+        <p:txBody>
+          <a:bodyPr wrap="square">
+            <a:spAutoFit/>
+          </a:bodyPr>
+          <a:lstStyle/>
+          <a:p>
+            <a:r>
+              <a:rPr lang="ja-JP" altLang="ja-JP" dirty="0"/>
+              <a:t>キャッチコピー</a:t>
+            </a:r>
+            <a:endParaRPr lang="ja-JP" altLang="en-US" dirty="0"/>
+          </a:p>
+        </p:txBody>
+      </p:sp>
+    </p:spTree>
+    <p:extLst>
+      <p:ext uri="{BB962C8B-B14F-4D97-AF65-F5344CB8AC3E}">
+        <p14:creationId xmlns:p14="http://schemas.microsoft.com/office/powerpoint/2010/main" val="2680096492"/>
+      </p:ext>
+    </p:extLst>
+  </p:cSld>
+  <p:clrMapOvr>
+    <a:masterClrMapping/>
+  </p:clrMapOvr>
+</p:sld>
+</file>
+
+<file path=ppt/slides/slide7.xml><?xml version="1.0" encoding="utf-8"?>
 <p:sld xmlns:a="http://schemas.openxmlformats.org/drawingml/2006/main" xmlns:r="http://schemas.openxmlformats.org/officeDocument/2006/relationships" xmlns:p="http://schemas.openxmlformats.org/presentationml/2006/main">
   <p:cSld>
     <p:spTree>
@@ -15941,12 +18219,12 @@
 </p:sld>
 </file>
 
-<file path=ppt/slides/slide7.xml><?xml version="1.0" encoding="utf-8"?>
+<file path=ppt/slides/slide8.xml><?xml version="1.0" encoding="utf-8"?>
 <p:sld xmlns:a="http://schemas.openxmlformats.org/drawingml/2006/main" xmlns:r="http://schemas.openxmlformats.org/officeDocument/2006/relationships" xmlns:p="http://schemas.openxmlformats.org/presentationml/2006/main">
   <p:cSld>
     <p:spTree>
       <p:nvGrpSpPr>
-        <p:cNvPr id="1" name="Shape 119"/>
+        <p:cNvPr id="1" name=""/>
         <p:cNvGrpSpPr/>
         <p:nvPr/>
       </p:nvGrpSpPr>
@@ -15960,63 +18238,10 @@
       </p:grpSpPr>
       <p:sp>
         <p:nvSpPr>
-          <p:cNvPr id="120" name="Google Shape;120;g15565c702ff_2_10"/>
-          <p:cNvSpPr txBox="1">
-            <a:spLocks noGrp="1"/>
-          </p:cNvSpPr>
-          <p:nvPr>
-            <p:ph type="title"/>
-          </p:nvPr>
-        </p:nvSpPr>
-        <p:spPr>
-          <a:xfrm>
-            <a:off x="838200" y="365125"/>
-            <a:ext cx="10515600" cy="1325700"/>
-          </a:xfrm>
-          <a:prstGeom prst="rect">
-            <a:avLst/>
-          </a:prstGeom>
-          <a:noFill/>
-          <a:ln>
-            <a:noFill/>
-          </a:ln>
-        </p:spPr>
-        <p:txBody>
-          <a:bodyPr spcFirstLastPara="1" wrap="square" lIns="91425" tIns="45700" rIns="91425" bIns="45700" anchor="ctr" anchorCtr="0">
-            <a:normAutofit/>
-          </a:bodyPr>
-          <a:lstStyle/>
-          <a:p>
-            <a:pPr marL="0" lvl="0" indent="0" algn="l" rtl="0">
-              <a:lnSpc>
-                <a:spcPct val="90000"/>
-              </a:lnSpc>
-              <a:spcBef>
-                <a:spcPts val="0"/>
-              </a:spcBef>
-              <a:spcAft>
-                <a:spcPts val="0"/>
-              </a:spcAft>
-              <a:buClr>
-                <a:schemeClr val="dk1"/>
-              </a:buClr>
-              <a:buSzPts val="4400"/>
-              <a:buFont typeface="Arial"/>
-              <a:buNone/>
-            </a:pPr>
-            <a:r>
-              <a:rPr lang="ja-JP" altLang="en-US" dirty="0"/>
-              <a:t>制作・研究方法</a:t>
-            </a:r>
-          </a:p>
-        </p:txBody>
-      </p:sp>
-      <p:sp>
-        <p:nvSpPr>
-          <p:cNvPr id="3" name="テキスト ボックス 2">
+          <p:cNvPr id="5" name="テキスト ボックス 4">
             <a:extLst>
               <a:ext uri="{FF2B5EF4-FFF2-40B4-BE49-F238E27FC236}">
-                <a16:creationId xmlns:a16="http://schemas.microsoft.com/office/drawing/2014/main" id="{96CB1925-D11D-0022-5861-AEB49C88C7A4}"/>
+                <a16:creationId xmlns:a16="http://schemas.microsoft.com/office/drawing/2014/main" id="{409B5A99-12FF-7C26-C5D5-BF66020F1DBD}"/>
               </a:ext>
             </a:extLst>
           </p:cNvPr>
@@ -16025,8 +18250,8 @@
         </p:nvSpPr>
         <p:spPr>
           <a:xfrm>
-            <a:off x="3182382" y="2667001"/>
-            <a:ext cx="5827236" cy="1661993"/>
+            <a:off x="2336800" y="684312"/>
+            <a:ext cx="7924800" cy="584775"/>
           </a:xfrm>
           <a:prstGeom prst="rect">
             <a:avLst/>
@@ -16034,32 +18259,611 @@
           <a:noFill/>
         </p:spPr>
         <p:txBody>
-          <a:bodyPr wrap="none" rtlCol="0">
+          <a:bodyPr wrap="square">
+            <a:spAutoFit/>
+          </a:bodyPr>
+          <a:lstStyle/>
+          <a:p>
+            <a:r>
+              <a:rPr lang="ja-JP" altLang="ja-JP" sz="3200" b="0" i="0" u="none" strike="noStrike" dirty="0">
+                <a:solidFill>
+                  <a:srgbClr val="000000"/>
+                </a:solidFill>
+                <a:effectLst/>
+                <a:latin typeface="Arial" panose="020B0604020202020204" pitchFamily="34" charset="0"/>
+              </a:rPr>
+              <a:t>テーマ２　飼いやすいペットについて</a:t>
+            </a:r>
+            <a:endParaRPr lang="ja-JP" altLang="en-US" sz="3200" dirty="0"/>
+          </a:p>
+        </p:txBody>
+      </p:sp>
+      <p:sp>
+        <p:nvSpPr>
+          <p:cNvPr id="7" name="テキスト ボックス 6">
+            <a:extLst>
+              <a:ext uri="{FF2B5EF4-FFF2-40B4-BE49-F238E27FC236}">
+                <a16:creationId xmlns:a16="http://schemas.microsoft.com/office/drawing/2014/main" id="{81C3A827-575B-6C5A-727E-80C4D761074E}"/>
+              </a:ext>
+            </a:extLst>
+          </p:cNvPr>
+          <p:cNvSpPr txBox="1"/>
+          <p:nvPr/>
+        </p:nvSpPr>
+        <p:spPr>
+          <a:xfrm>
+            <a:off x="2963334" y="1688964"/>
+            <a:ext cx="6096000" cy="5042406"/>
+          </a:xfrm>
+          <a:prstGeom prst="rect">
+            <a:avLst/>
+          </a:prstGeom>
+          <a:noFill/>
+        </p:spPr>
+        <p:txBody>
+          <a:bodyPr wrap="square">
+            <a:spAutoFit/>
+          </a:bodyPr>
+          <a:lstStyle/>
+          <a:p>
+            <a:pPr algn="ctr" rtl="0">
+              <a:spcBef>
+                <a:spcPts val="1800"/>
+              </a:spcBef>
+              <a:spcAft>
+                <a:spcPts val="400"/>
+              </a:spcAft>
+              <a:buNone/>
+            </a:pPr>
+            <a:r>
+              <a:rPr lang="ja-JP" altLang="ja-JP" sz="1800" b="1" i="0" u="none" strike="noStrike" dirty="0">
+                <a:solidFill>
+                  <a:srgbClr val="000000"/>
+                </a:solidFill>
+                <a:effectLst/>
+                <a:latin typeface="Arial" panose="020B0604020202020204" pitchFamily="34" charset="0"/>
+              </a:rPr>
+              <a:t>背景</a:t>
+            </a:r>
+            <a:endParaRPr lang="ja-JP" altLang="ja-JP" b="0" dirty="0">
+              <a:effectLst/>
+            </a:endParaRPr>
+          </a:p>
+          <a:p>
+            <a:pPr rtl="0">
+              <a:spcBef>
+                <a:spcPts val="1200"/>
+              </a:spcBef>
+              <a:spcAft>
+                <a:spcPts val="1200"/>
+              </a:spcAft>
+              <a:buNone/>
+            </a:pPr>
+            <a:r>
+              <a:rPr lang="ja-JP" altLang="ja-JP" sz="1600" b="0" i="0" u="none" strike="noStrike" dirty="0">
+                <a:solidFill>
+                  <a:srgbClr val="000000"/>
+                </a:solidFill>
+                <a:effectLst/>
+                <a:latin typeface="Arial" panose="020B0604020202020204" pitchFamily="34" charset="0"/>
+              </a:rPr>
+              <a:t>近年、ペットを飼いたいと考える人が増えています。しかし、初心者は「どのペットが飼いやすいのか」「どのような準備やお世話が必要なのか」が分からず、不安を感じることがあります。</a:t>
+            </a:r>
+            <a:endParaRPr lang="ja-JP" altLang="ja-JP" sz="1600" b="0" dirty="0">
+              <a:effectLst/>
+            </a:endParaRPr>
+          </a:p>
+          <a:p>
+            <a:pPr algn="ctr" rtl="0">
+              <a:spcBef>
+                <a:spcPts val="1200"/>
+              </a:spcBef>
+              <a:spcAft>
+                <a:spcPts val="1200"/>
+              </a:spcAft>
+              <a:buNone/>
+            </a:pPr>
+            <a:r>
+              <a:rPr lang="ja-JP" altLang="ja-JP" sz="1800" b="1" i="0" u="none" strike="noStrike" dirty="0">
+                <a:solidFill>
+                  <a:srgbClr val="000000"/>
+                </a:solidFill>
+                <a:effectLst/>
+                <a:latin typeface="Arial" panose="020B0604020202020204" pitchFamily="34" charset="0"/>
+              </a:rPr>
+              <a:t>目的</a:t>
+            </a:r>
+            <a:endParaRPr lang="ja-JP" altLang="ja-JP" b="0" dirty="0">
+              <a:effectLst/>
+            </a:endParaRPr>
+          </a:p>
+          <a:p>
+            <a:pPr rtl="0">
+              <a:spcBef>
+                <a:spcPts val="1200"/>
+              </a:spcBef>
+              <a:spcAft>
+                <a:spcPts val="1200"/>
+              </a:spcAft>
+              <a:buNone/>
+            </a:pPr>
+            <a:r>
+              <a:rPr lang="ja-JP" altLang="ja-JP" sz="1600" b="0" i="0" u="none" strike="noStrike" dirty="0">
+                <a:solidFill>
+                  <a:srgbClr val="000000"/>
+                </a:solidFill>
+                <a:effectLst/>
+                <a:latin typeface="Arial" panose="020B0604020202020204" pitchFamily="34" charset="0"/>
+              </a:rPr>
+              <a:t>初心者でも飼いやすいペットの特徴や飼育方法、必要な費用などを分かりやすく紹介し、自分に合ったペット選びができるようサポートするWebサイトを制作します。</a:t>
+            </a:r>
+            <a:endParaRPr lang="ja-JP" altLang="ja-JP" sz="1600" b="0" dirty="0">
+              <a:effectLst/>
+            </a:endParaRPr>
+          </a:p>
+          <a:p>
+            <a:pPr algn="ctr" rtl="0">
+              <a:spcBef>
+                <a:spcPts val="1800"/>
+              </a:spcBef>
+              <a:spcAft>
+                <a:spcPts val="400"/>
+              </a:spcAft>
+              <a:buNone/>
+            </a:pPr>
+            <a:r>
+              <a:rPr lang="ja-JP" altLang="ja-JP" sz="1800" b="1" i="0" u="none" strike="noStrike" dirty="0">
+                <a:solidFill>
+                  <a:srgbClr val="000000"/>
+                </a:solidFill>
+                <a:effectLst/>
+                <a:latin typeface="Arial" panose="020B0604020202020204" pitchFamily="34" charset="0"/>
+              </a:rPr>
+              <a:t>ターゲット</a:t>
+            </a:r>
+            <a:endParaRPr lang="ja-JP" altLang="ja-JP" b="0" dirty="0">
+              <a:effectLst/>
+            </a:endParaRPr>
+          </a:p>
+          <a:p>
+            <a:pPr algn="ctr" rtl="0" fontAlgn="base">
+              <a:spcBef>
+                <a:spcPts val="1200"/>
+              </a:spcBef>
+              <a:buFont typeface="Arial" panose="020B0604020202020204" pitchFamily="34" charset="0"/>
+              <a:buChar char="•"/>
+            </a:pPr>
+            <a:r>
+              <a:rPr lang="ja-JP" altLang="ja-JP" sz="1600" b="0" i="0" u="none" strike="noStrike" dirty="0">
+                <a:solidFill>
+                  <a:srgbClr val="000000"/>
+                </a:solidFill>
+                <a:effectLst/>
+                <a:latin typeface="Arial" panose="020B0604020202020204" pitchFamily="34" charset="0"/>
+              </a:rPr>
+              <a:t>初めてペットを飼いたい人</a:t>
+            </a:r>
+          </a:p>
+          <a:p>
+            <a:pPr algn="ctr" rtl="0" fontAlgn="base">
+              <a:spcAft>
+                <a:spcPts val="1200"/>
+              </a:spcAft>
+              <a:buFont typeface="Arial" panose="020B0604020202020204" pitchFamily="34" charset="0"/>
+              <a:buChar char="•"/>
+            </a:pPr>
+            <a:r>
+              <a:rPr lang="ja-JP" altLang="ja-JP" sz="1600" b="0" i="0" u="none" strike="noStrike" dirty="0">
+                <a:solidFill>
+                  <a:srgbClr val="000000"/>
+                </a:solidFill>
+                <a:effectLst/>
+                <a:latin typeface="Arial" panose="020B0604020202020204" pitchFamily="34" charset="0"/>
+              </a:rPr>
+              <a:t>学生や一人暮らしの人</a:t>
+            </a:r>
+          </a:p>
+          <a:p>
+            <a:pPr algn="ctr" rtl="0" fontAlgn="base">
+              <a:spcBef>
+                <a:spcPts val="1200"/>
+              </a:spcBef>
+              <a:spcAft>
+                <a:spcPts val="1200"/>
+              </a:spcAft>
+              <a:buFont typeface="Arial" panose="020B0604020202020204" pitchFamily="34" charset="0"/>
+              <a:buChar char="•"/>
+            </a:pPr>
+            <a:r>
+              <a:rPr lang="ja-JP" altLang="ja-JP" sz="1600" b="0" i="0" u="none" strike="noStrike" dirty="0">
+                <a:solidFill>
+                  <a:srgbClr val="000000"/>
+                </a:solidFill>
+                <a:effectLst/>
+                <a:latin typeface="Arial" panose="020B0604020202020204" pitchFamily="34" charset="0"/>
+              </a:rPr>
+              <a:t>家族でペットを迎えたいと考えている人</a:t>
+            </a:r>
+          </a:p>
+        </p:txBody>
+      </p:sp>
+    </p:spTree>
+    <p:extLst>
+      <p:ext uri="{BB962C8B-B14F-4D97-AF65-F5344CB8AC3E}">
+        <p14:creationId xmlns:p14="http://schemas.microsoft.com/office/powerpoint/2010/main" val="967898701"/>
+      </p:ext>
+    </p:extLst>
+  </p:cSld>
+  <p:clrMapOvr>
+    <a:masterClrMapping/>
+  </p:clrMapOvr>
+</p:sld>
+</file>
+
+<file path=ppt/slides/slide9.xml><?xml version="1.0" encoding="utf-8"?>
+<p:sld xmlns:a="http://schemas.openxmlformats.org/drawingml/2006/main" xmlns:r="http://schemas.openxmlformats.org/officeDocument/2006/relationships" xmlns:p="http://schemas.openxmlformats.org/presentationml/2006/main">
+  <p:cSld>
+    <p:spTree>
+      <p:nvGrpSpPr>
+        <p:cNvPr id="1" name=""/>
+        <p:cNvGrpSpPr/>
+        <p:nvPr/>
+      </p:nvGrpSpPr>
+      <p:grpSpPr>
+        <a:xfrm>
+          <a:off x="0" y="0"/>
+          <a:ext cx="0" cy="0"/>
+          <a:chOff x="0" y="0"/>
+          <a:chExt cx="0" cy="0"/>
+        </a:xfrm>
+      </p:grpSpPr>
+      <p:sp>
+        <p:nvSpPr>
+          <p:cNvPr id="6" name="テキスト ボックス 5">
+            <a:extLst>
+              <a:ext uri="{FF2B5EF4-FFF2-40B4-BE49-F238E27FC236}">
+                <a16:creationId xmlns:a16="http://schemas.microsoft.com/office/drawing/2014/main" id="{BB82D915-2957-5602-2F54-C5B0A06CED8A}"/>
+              </a:ext>
+            </a:extLst>
+          </p:cNvPr>
+          <p:cNvSpPr txBox="1"/>
+          <p:nvPr/>
+        </p:nvSpPr>
+        <p:spPr>
+          <a:xfrm>
+            <a:off x="1098006" y="1767006"/>
+            <a:ext cx="6096000" cy="5324535"/>
+          </a:xfrm>
+          <a:prstGeom prst="rect">
+            <a:avLst/>
+          </a:prstGeom>
+          <a:noFill/>
+        </p:spPr>
+        <p:txBody>
+          <a:bodyPr wrap="square">
+            <a:spAutoFit/>
+          </a:bodyPr>
+          <a:lstStyle/>
+          <a:p>
+            <a:pPr rtl="0">
+              <a:buNone/>
+            </a:pPr>
+            <a:r>
+              <a:rPr lang="ja-JP" altLang="ja-JP" sz="2400" b="0" i="0" u="none" strike="noStrike" dirty="0">
+                <a:solidFill>
+                  <a:srgbClr val="000000"/>
+                </a:solidFill>
+                <a:effectLst/>
+                <a:latin typeface="Arial" panose="020B0604020202020204" pitchFamily="34" charset="0"/>
+              </a:rPr>
+              <a:t>ページ１ トップページ  </a:t>
+            </a:r>
+            <a:endParaRPr lang="ja-JP" altLang="ja-JP" sz="2400" b="0" dirty="0">
+              <a:effectLst/>
+            </a:endParaRPr>
+          </a:p>
+          <a:p>
+            <a:pPr>
+              <a:buNone/>
+            </a:pPr>
+            <a:br>
+              <a:rPr lang="ja-JP" altLang="ja-JP" sz="2400" b="0" dirty="0">
+                <a:effectLst/>
+              </a:rPr>
+            </a:br>
+            <a:endParaRPr lang="ja-JP" altLang="ja-JP" sz="2400" b="0" dirty="0">
+              <a:effectLst/>
+            </a:endParaRPr>
+          </a:p>
+          <a:p>
+            <a:pPr rtl="0">
+              <a:buNone/>
+            </a:pPr>
+            <a:r>
+              <a:rPr lang="ja-JP" altLang="ja-JP" sz="2400" b="0" i="0" u="none" strike="noStrike" dirty="0">
+                <a:solidFill>
+                  <a:srgbClr val="000000"/>
+                </a:solidFill>
+                <a:effectLst/>
+                <a:latin typeface="Arial" panose="020B0604020202020204" pitchFamily="34" charset="0"/>
+              </a:rPr>
+              <a:t>ページ２ ペット紹介 </a:t>
+            </a:r>
+            <a:endParaRPr lang="ja-JP" altLang="ja-JP" sz="2400" b="0" dirty="0">
+              <a:effectLst/>
+            </a:endParaRPr>
+          </a:p>
+          <a:p>
+            <a:pPr>
+              <a:buNone/>
+            </a:pPr>
+            <a:br>
+              <a:rPr lang="ja-JP" altLang="ja-JP" sz="2400" b="0" dirty="0">
+                <a:effectLst/>
+              </a:rPr>
+            </a:br>
+            <a:endParaRPr lang="ja-JP" altLang="ja-JP" sz="2400" b="0" dirty="0">
+              <a:effectLst/>
+            </a:endParaRPr>
+          </a:p>
+          <a:p>
+            <a:pPr rtl="0">
+              <a:buNone/>
+            </a:pPr>
+            <a:r>
+              <a:rPr lang="ja-JP" altLang="ja-JP" sz="2400" b="0" i="0" u="none" strike="noStrike" dirty="0">
+                <a:solidFill>
+                  <a:srgbClr val="000000"/>
+                </a:solidFill>
+                <a:effectLst/>
+                <a:latin typeface="Arial" panose="020B0604020202020204" pitchFamily="34" charset="0"/>
+              </a:rPr>
+              <a:t>ページ３ 飼育方法 ① </a:t>
+            </a:r>
+            <a:endParaRPr lang="ja-JP" altLang="ja-JP" sz="2400" b="0" dirty="0">
+              <a:effectLst/>
+            </a:endParaRPr>
+          </a:p>
+          <a:p>
+            <a:pPr>
+              <a:buNone/>
+            </a:pPr>
+            <a:br>
+              <a:rPr lang="ja-JP" altLang="ja-JP" sz="2400" b="0" dirty="0">
+                <a:effectLst/>
+              </a:rPr>
+            </a:br>
+            <a:endParaRPr lang="ja-JP" altLang="ja-JP" sz="2400" b="0" dirty="0">
+              <a:effectLst/>
+            </a:endParaRPr>
+          </a:p>
+          <a:p>
+            <a:pPr rtl="0">
+              <a:buNone/>
+            </a:pPr>
+            <a:r>
+              <a:rPr lang="ja-JP" altLang="ja-JP" sz="2400" b="0" i="0" u="none" strike="noStrike" dirty="0">
+                <a:solidFill>
+                  <a:srgbClr val="000000"/>
+                </a:solidFill>
+                <a:effectLst/>
+                <a:latin typeface="Arial" panose="020B0604020202020204" pitchFamily="34" charset="0"/>
+              </a:rPr>
+              <a:t>ページ４ 飼育方法 ② </a:t>
+            </a:r>
+            <a:endParaRPr lang="ja-JP" altLang="ja-JP" sz="2400" b="0" dirty="0">
+              <a:effectLst/>
+            </a:endParaRPr>
+          </a:p>
+          <a:p>
+            <a:pPr>
+              <a:buNone/>
+            </a:pPr>
+            <a:br>
+              <a:rPr lang="ja-JP" altLang="ja-JP" sz="2400" b="0" dirty="0">
+                <a:effectLst/>
+              </a:rPr>
+            </a:br>
+            <a:endParaRPr lang="ja-JP" altLang="ja-JP" sz="2400" b="0" dirty="0">
+              <a:effectLst/>
+            </a:endParaRPr>
+          </a:p>
+          <a:p>
+            <a:pPr rtl="0">
+              <a:buNone/>
+            </a:pPr>
+            <a:r>
+              <a:rPr lang="ja-JP" altLang="ja-JP" sz="2400" b="0" i="0" u="none" strike="noStrike" dirty="0">
+                <a:solidFill>
+                  <a:srgbClr val="000000"/>
+                </a:solidFill>
+                <a:effectLst/>
+                <a:latin typeface="Arial" panose="020B0604020202020204" pitchFamily="34" charset="0"/>
+              </a:rPr>
+              <a:t>ページ５ 飼育に必要な費用 </a:t>
+            </a:r>
+            <a:endParaRPr lang="ja-JP" altLang="ja-JP" sz="2400" b="0" dirty="0">
+              <a:effectLst/>
+            </a:endParaRPr>
+          </a:p>
+          <a:p>
+            <a:pPr>
+              <a:buNone/>
+            </a:pPr>
+            <a:br>
+              <a:rPr lang="ja-JP" altLang="ja-JP" dirty="0"/>
+            </a:br>
+            <a:endParaRPr lang="ja-JP" altLang="en-US" dirty="0"/>
+          </a:p>
+        </p:txBody>
+      </p:sp>
+      <p:sp>
+        <p:nvSpPr>
+          <p:cNvPr id="8" name="テキスト ボックス 7">
+            <a:extLst>
+              <a:ext uri="{FF2B5EF4-FFF2-40B4-BE49-F238E27FC236}">
+                <a16:creationId xmlns:a16="http://schemas.microsoft.com/office/drawing/2014/main" id="{4E253DB3-34B1-3F90-B5D5-D247803785B1}"/>
+              </a:ext>
+            </a:extLst>
+          </p:cNvPr>
+          <p:cNvSpPr txBox="1"/>
+          <p:nvPr/>
+        </p:nvSpPr>
+        <p:spPr>
+          <a:xfrm>
+            <a:off x="7364548" y="594198"/>
+            <a:ext cx="6096000" cy="1323439"/>
+          </a:xfrm>
+          <a:prstGeom prst="rect">
+            <a:avLst/>
+          </a:prstGeom>
+          <a:noFill/>
+        </p:spPr>
+        <p:txBody>
+          <a:bodyPr wrap="square">
+            <a:spAutoFit/>
+          </a:bodyPr>
+          <a:lstStyle/>
+          <a:p>
+            <a:pPr rtl="0">
+              <a:buNone/>
+            </a:pPr>
+            <a:r>
+              <a:rPr lang="ja-JP" altLang="ja-JP" sz="3200" b="0" i="0" u="none" strike="noStrike" dirty="0">
+                <a:solidFill>
+                  <a:srgbClr val="000000"/>
+                </a:solidFill>
+                <a:effectLst/>
+                <a:latin typeface="Arial" panose="020B0604020202020204" pitchFamily="34" charset="0"/>
+              </a:rPr>
+              <a:t>作品・研究の概要</a:t>
+            </a:r>
+            <a:endParaRPr lang="ja-JP" altLang="ja-JP" sz="3200" b="0" dirty="0">
+              <a:effectLst/>
+            </a:endParaRPr>
+          </a:p>
+          <a:p>
+            <a:pPr>
+              <a:buNone/>
+            </a:pPr>
+            <a:br>
+              <a:rPr lang="ja-JP" altLang="ja-JP" sz="2400" dirty="0"/>
+            </a:br>
+            <a:endParaRPr lang="ja-JP" altLang="en-US" sz="2400" dirty="0"/>
+          </a:p>
+        </p:txBody>
+      </p:sp>
+      <p:sp>
+        <p:nvSpPr>
+          <p:cNvPr id="10" name="テキスト ボックス 9">
+            <a:extLst>
+              <a:ext uri="{FF2B5EF4-FFF2-40B4-BE49-F238E27FC236}">
+                <a16:creationId xmlns:a16="http://schemas.microsoft.com/office/drawing/2014/main" id="{BC1E29EA-EA35-16AA-B191-C0E1C5914917}"/>
+              </a:ext>
+            </a:extLst>
+          </p:cNvPr>
+          <p:cNvSpPr txBox="1"/>
+          <p:nvPr/>
+        </p:nvSpPr>
+        <p:spPr>
+          <a:xfrm>
+            <a:off x="7289800" y="2633340"/>
+            <a:ext cx="3544387" cy="1908215"/>
+          </a:xfrm>
+          <a:prstGeom prst="rect">
+            <a:avLst/>
+          </a:prstGeom>
+          <a:noFill/>
+        </p:spPr>
+        <p:txBody>
+          <a:bodyPr wrap="square">
+            <a:spAutoFit/>
+          </a:bodyPr>
+          <a:lstStyle/>
+          <a:p>
+            <a:pPr rtl="0">
+              <a:spcBef>
+                <a:spcPts val="1200"/>
+              </a:spcBef>
+              <a:spcAft>
+                <a:spcPts val="1200"/>
+              </a:spcAft>
+              <a:buNone/>
+            </a:pPr>
+            <a:r>
+              <a:rPr lang="ja-JP" altLang="ja-JP" sz="2000" b="0" i="0" u="none" strike="noStrike" dirty="0">
+                <a:solidFill>
+                  <a:srgbClr val="000000"/>
+                </a:solidFill>
+                <a:effectLst/>
+                <a:latin typeface="Arial" panose="020B0604020202020204" pitchFamily="34" charset="0"/>
+              </a:rPr>
+              <a:t>ペットに関するWebサイトを調査し、掲載されている情報の内容やページ構成、デザインなどを研究しました。</a:t>
+            </a:r>
+            <a:endParaRPr lang="ja-JP" altLang="ja-JP" sz="2000" b="0" dirty="0">
+              <a:effectLst/>
+            </a:endParaRPr>
+          </a:p>
+          <a:p>
+            <a:pPr>
+              <a:buNone/>
+            </a:pPr>
+            <a:br>
+              <a:rPr lang="ja-JP" altLang="ja-JP" dirty="0"/>
+            </a:br>
+            <a:endParaRPr lang="ja-JP" altLang="en-US" dirty="0"/>
+          </a:p>
+        </p:txBody>
+      </p:sp>
+      <p:sp>
+        <p:nvSpPr>
+          <p:cNvPr id="12" name="テキスト ボックス 11">
+            <a:extLst>
+              <a:ext uri="{FF2B5EF4-FFF2-40B4-BE49-F238E27FC236}">
+                <a16:creationId xmlns:a16="http://schemas.microsoft.com/office/drawing/2014/main" id="{2159FA22-C1CE-9ACC-A530-F3206D7D8047}"/>
+              </a:ext>
+            </a:extLst>
+          </p:cNvPr>
+          <p:cNvSpPr txBox="1"/>
+          <p:nvPr/>
+        </p:nvSpPr>
+        <p:spPr>
+          <a:xfrm>
+            <a:off x="-966652" y="671142"/>
+            <a:ext cx="6757850" cy="584775"/>
+          </a:xfrm>
+          <a:prstGeom prst="rect">
+            <a:avLst/>
+          </a:prstGeom>
+          <a:noFill/>
+        </p:spPr>
+        <p:txBody>
+          <a:bodyPr wrap="square">
             <a:spAutoFit/>
           </a:bodyPr>
           <a:lstStyle/>
           <a:p>
             <a:pPr algn="ctr"/>
             <a:r>
-              <a:rPr kumimoji="1" lang="ja-JP" altLang="en-US" sz="4400" dirty="0"/>
-              <a:t>撮影機材　　　スマホ</a:t>
+              <a:rPr lang="ja-JP" altLang="ja-JP" sz="3200" b="1" i="0" u="none" strike="noStrike" dirty="0">
+                <a:solidFill>
+                  <a:srgbClr val="000000"/>
+                </a:solidFill>
+                <a:effectLst/>
+                <a:latin typeface="Arial" panose="020B0604020202020204" pitchFamily="34" charset="0"/>
+              </a:rPr>
+              <a:t>内容</a:t>
             </a:r>
-            <a:endParaRPr kumimoji="1" lang="en-US" altLang="ja-JP" sz="4400" dirty="0"/>
-          </a:p>
-          <a:p>
-            <a:pPr algn="ctr"/>
-            <a:r>
-              <a:rPr kumimoji="1" lang="ja-JP" altLang="en-US" sz="4400" dirty="0"/>
-              <a:t>編集　イラストレータ</a:t>
-            </a:r>
-            <a:endParaRPr kumimoji="1" lang="en-US" altLang="ja-JP" sz="4400" dirty="0"/>
-          </a:p>
-          <a:p>
-            <a:endParaRPr kumimoji="1" lang="ja-JP" altLang="en-US" dirty="0"/>
+            <a:endParaRPr lang="ja-JP" altLang="en-US" sz="3200" dirty="0"/>
           </a:p>
         </p:txBody>
       </p:sp>
     </p:spTree>
+    <p:extLst>
+      <p:ext uri="{BB962C8B-B14F-4D97-AF65-F5344CB8AC3E}">
+        <p14:creationId xmlns:p14="http://schemas.microsoft.com/office/powerpoint/2010/main" val="1761350442"/>
+      </p:ext>
+    </p:extLst>
   </p:cSld>
   <p:clrMapOvr>
     <a:masterClrMapping/>

--- a/卒業制作 テーマ・中間発表.pptx
+++ b/卒業制作 テーマ・中間発表.pptx
@@ -5,7 +5,7 @@
     <p:sldMasterId id="2147483648" r:id="rId1"/>
   </p:sldMasterIdLst>
   <p:notesMasterIdLst>
-    <p:notesMasterId r:id="rId14"/>
+    <p:notesMasterId r:id="rId15"/>
   </p:notesMasterIdLst>
   <p:sldIdLst>
     <p:sldId id="256" r:id="rId2"/>
@@ -14,12 +14,13 @@
     <p:sldId id="259" r:id="rId5"/>
     <p:sldId id="260" r:id="rId6"/>
     <p:sldId id="263" r:id="rId7"/>
-    <p:sldId id="261" r:id="rId8"/>
-    <p:sldId id="264" r:id="rId9"/>
-    <p:sldId id="265" r:id="rId10"/>
-    <p:sldId id="268" r:id="rId11"/>
-    <p:sldId id="267" r:id="rId12"/>
-    <p:sldId id="262" r:id="rId13"/>
+    <p:sldId id="269" r:id="rId8"/>
+    <p:sldId id="261" r:id="rId9"/>
+    <p:sldId id="264" r:id="rId10"/>
+    <p:sldId id="265" r:id="rId11"/>
+    <p:sldId id="268" r:id="rId12"/>
+    <p:sldId id="267" r:id="rId13"/>
+    <p:sldId id="262" r:id="rId14"/>
   </p:sldIdLst>
   <p:sldSz cx="12192000" cy="6858000"/>
   <p:notesSz cx="6858000" cy="9144000"/>
@@ -257,7 +258,7 @@
       <p15:sldGuideLst xmlns:p15="http://schemas.microsoft.com/office/powerpoint/2012/main"/>
     </p:ext>
     <p:ext uri="GoogleSlidesCustomDataVersion2">
-      <go:slidesCustomData xmlns:go="http://customooxmlschemas.google.com/" xmlns:ahyp="http://schemas.microsoft.com/office/drawing/2018/hyperlinkcolor" xmlns:p15="http://schemas.microsoft.com/office/powerpoint/2012/main" xmlns:p14="http://schemas.microsoft.com/office/powerpoint/2010/main" xmlns:com="http://schemas.openxmlformats.org/drawingml/2006/compatibility" xmlns:pvml="urn:schemas-microsoft-com:office:powerpoint" xmlns:v="urn:schemas-microsoft-com:vml" xmlns:o="urn:schemas-microsoft-com:office:office" xmlns:dgm="http://schemas.openxmlformats.org/drawingml/2006/diagram" xmlns:c="http://schemas.openxmlformats.org/drawingml/2006/chart" xmlns:mv="urn:schemas-microsoft-com:mac:vml" xmlns:mc="http://schemas.openxmlformats.org/markup-compatibility/2006" xmlns="" r:id="rId15" roundtripDataSignature="AMtx7miZ4l44vHPzKZImSivDlVkC4Y8KPg=="/>
+      <go:slidesCustomData xmlns="" xmlns:mc="http://schemas.openxmlformats.org/markup-compatibility/2006" xmlns:mv="urn:schemas-microsoft-com:mac:vml" xmlns:c="http://schemas.openxmlformats.org/drawingml/2006/chart" xmlns:dgm="http://schemas.openxmlformats.org/drawingml/2006/diagram" xmlns:o="urn:schemas-microsoft-com:office:office" xmlns:v="urn:schemas-microsoft-com:vml" xmlns:pvml="urn:schemas-microsoft-com:office:powerpoint" xmlns:com="http://schemas.openxmlformats.org/drawingml/2006/compatibility" xmlns:p14="http://schemas.microsoft.com/office/powerpoint/2010/main" xmlns:p15="http://schemas.microsoft.com/office/powerpoint/2012/main" xmlns:ahyp="http://schemas.microsoft.com/office/drawing/2018/hyperlinkcolor" xmlns:go="http://customooxmlschemas.google.com/" r:id="rId16" roundtripDataSignature="AMtx7miZ4l44vHPzKZImSivDlVkC4Y8KPg=="/>
     </p:ext>
   </p:extLst>
 </p:presentation>
@@ -15148,6 +15149,377 @@
       </p:grpSpPr>
       <p:sp>
         <p:nvSpPr>
+          <p:cNvPr id="6" name="テキスト ボックス 5">
+            <a:extLst>
+              <a:ext uri="{FF2B5EF4-FFF2-40B4-BE49-F238E27FC236}">
+                <a16:creationId xmlns:a16="http://schemas.microsoft.com/office/drawing/2014/main" id="{BB82D915-2957-5602-2F54-C5B0A06CED8A}"/>
+              </a:ext>
+            </a:extLst>
+          </p:cNvPr>
+          <p:cNvSpPr txBox="1"/>
+          <p:nvPr/>
+        </p:nvSpPr>
+        <p:spPr>
+          <a:xfrm>
+            <a:off x="1098006" y="1767006"/>
+            <a:ext cx="6096000" cy="5324535"/>
+          </a:xfrm>
+          <a:prstGeom prst="rect">
+            <a:avLst/>
+          </a:prstGeom>
+          <a:noFill/>
+        </p:spPr>
+        <p:txBody>
+          <a:bodyPr wrap="square">
+            <a:spAutoFit/>
+          </a:bodyPr>
+          <a:lstStyle/>
+          <a:p>
+            <a:pPr rtl="0">
+              <a:buNone/>
+            </a:pPr>
+            <a:r>
+              <a:rPr lang="ja-JP" altLang="ja-JP" sz="2400" b="0" i="0" u="none" strike="noStrike" dirty="0">
+                <a:solidFill>
+                  <a:srgbClr val="000000"/>
+                </a:solidFill>
+                <a:effectLst/>
+                <a:latin typeface="Arial" panose="020B0604020202020204" pitchFamily="34" charset="0"/>
+              </a:rPr>
+              <a:t>ページ１ トップページ  </a:t>
+            </a:r>
+            <a:endParaRPr lang="ja-JP" altLang="ja-JP" sz="2400" b="0" dirty="0">
+              <a:effectLst/>
+            </a:endParaRPr>
+          </a:p>
+          <a:p>
+            <a:pPr>
+              <a:buNone/>
+            </a:pPr>
+            <a:br>
+              <a:rPr lang="ja-JP" altLang="ja-JP" sz="2400" b="0" dirty="0">
+                <a:effectLst/>
+              </a:rPr>
+            </a:br>
+            <a:endParaRPr lang="ja-JP" altLang="ja-JP" sz="2400" b="0" dirty="0">
+              <a:effectLst/>
+            </a:endParaRPr>
+          </a:p>
+          <a:p>
+            <a:pPr rtl="0">
+              <a:buNone/>
+            </a:pPr>
+            <a:r>
+              <a:rPr lang="ja-JP" altLang="ja-JP" sz="2400" b="0" i="0" u="none" strike="noStrike" dirty="0">
+                <a:solidFill>
+                  <a:srgbClr val="000000"/>
+                </a:solidFill>
+                <a:effectLst/>
+                <a:latin typeface="Arial" panose="020B0604020202020204" pitchFamily="34" charset="0"/>
+              </a:rPr>
+              <a:t>ページ２ ペット紹介 </a:t>
+            </a:r>
+            <a:endParaRPr lang="ja-JP" altLang="ja-JP" sz="2400" b="0" dirty="0">
+              <a:effectLst/>
+            </a:endParaRPr>
+          </a:p>
+          <a:p>
+            <a:pPr>
+              <a:buNone/>
+            </a:pPr>
+            <a:br>
+              <a:rPr lang="ja-JP" altLang="ja-JP" sz="2400" b="0" dirty="0">
+                <a:effectLst/>
+              </a:rPr>
+            </a:br>
+            <a:endParaRPr lang="ja-JP" altLang="ja-JP" sz="2400" b="0" dirty="0">
+              <a:effectLst/>
+            </a:endParaRPr>
+          </a:p>
+          <a:p>
+            <a:pPr rtl="0">
+              <a:buNone/>
+            </a:pPr>
+            <a:r>
+              <a:rPr lang="ja-JP" altLang="ja-JP" sz="2400" b="0" i="0" u="none" strike="noStrike" dirty="0">
+                <a:solidFill>
+                  <a:srgbClr val="000000"/>
+                </a:solidFill>
+                <a:effectLst/>
+                <a:latin typeface="Arial" panose="020B0604020202020204" pitchFamily="34" charset="0"/>
+              </a:rPr>
+              <a:t>ページ３ 飼育方法 ① </a:t>
+            </a:r>
+            <a:endParaRPr lang="ja-JP" altLang="ja-JP" sz="2400" b="0" dirty="0">
+              <a:effectLst/>
+            </a:endParaRPr>
+          </a:p>
+          <a:p>
+            <a:pPr>
+              <a:buNone/>
+            </a:pPr>
+            <a:br>
+              <a:rPr lang="ja-JP" altLang="ja-JP" sz="2400" b="0" dirty="0">
+                <a:effectLst/>
+              </a:rPr>
+            </a:br>
+            <a:endParaRPr lang="ja-JP" altLang="ja-JP" sz="2400" b="0" dirty="0">
+              <a:effectLst/>
+            </a:endParaRPr>
+          </a:p>
+          <a:p>
+            <a:pPr rtl="0">
+              <a:buNone/>
+            </a:pPr>
+            <a:r>
+              <a:rPr lang="ja-JP" altLang="ja-JP" sz="2400" b="0" i="0" u="none" strike="noStrike" dirty="0">
+                <a:solidFill>
+                  <a:srgbClr val="000000"/>
+                </a:solidFill>
+                <a:effectLst/>
+                <a:latin typeface="Arial" panose="020B0604020202020204" pitchFamily="34" charset="0"/>
+              </a:rPr>
+              <a:t>ページ４ 飼育方法 ② </a:t>
+            </a:r>
+            <a:endParaRPr lang="ja-JP" altLang="ja-JP" sz="2400" b="0" dirty="0">
+              <a:effectLst/>
+            </a:endParaRPr>
+          </a:p>
+          <a:p>
+            <a:pPr>
+              <a:buNone/>
+            </a:pPr>
+            <a:br>
+              <a:rPr lang="ja-JP" altLang="ja-JP" sz="2400" b="0" dirty="0">
+                <a:effectLst/>
+              </a:rPr>
+            </a:br>
+            <a:endParaRPr lang="ja-JP" altLang="ja-JP" sz="2400" b="0" dirty="0">
+              <a:effectLst/>
+            </a:endParaRPr>
+          </a:p>
+          <a:p>
+            <a:pPr rtl="0">
+              <a:buNone/>
+            </a:pPr>
+            <a:r>
+              <a:rPr lang="ja-JP" altLang="ja-JP" sz="2400" b="0" i="0" u="none" strike="noStrike" dirty="0">
+                <a:solidFill>
+                  <a:srgbClr val="000000"/>
+                </a:solidFill>
+                <a:effectLst/>
+                <a:latin typeface="Arial" panose="020B0604020202020204" pitchFamily="34" charset="0"/>
+              </a:rPr>
+              <a:t>ページ５ 飼育に必要な費用 </a:t>
+            </a:r>
+            <a:endParaRPr lang="ja-JP" altLang="ja-JP" sz="2400" b="0" dirty="0">
+              <a:effectLst/>
+            </a:endParaRPr>
+          </a:p>
+          <a:p>
+            <a:pPr>
+              <a:buNone/>
+            </a:pPr>
+            <a:br>
+              <a:rPr lang="ja-JP" altLang="ja-JP" dirty="0"/>
+            </a:br>
+            <a:endParaRPr lang="ja-JP" altLang="en-US" dirty="0"/>
+          </a:p>
+        </p:txBody>
+      </p:sp>
+      <p:sp>
+        <p:nvSpPr>
+          <p:cNvPr id="8" name="テキスト ボックス 7">
+            <a:extLst>
+              <a:ext uri="{FF2B5EF4-FFF2-40B4-BE49-F238E27FC236}">
+                <a16:creationId xmlns:a16="http://schemas.microsoft.com/office/drawing/2014/main" id="{4E253DB3-34B1-3F90-B5D5-D247803785B1}"/>
+              </a:ext>
+            </a:extLst>
+          </p:cNvPr>
+          <p:cNvSpPr txBox="1"/>
+          <p:nvPr/>
+        </p:nvSpPr>
+        <p:spPr>
+          <a:xfrm>
+            <a:off x="7364548" y="594198"/>
+            <a:ext cx="6096000" cy="1323439"/>
+          </a:xfrm>
+          <a:prstGeom prst="rect">
+            <a:avLst/>
+          </a:prstGeom>
+          <a:noFill/>
+        </p:spPr>
+        <p:txBody>
+          <a:bodyPr wrap="square">
+            <a:spAutoFit/>
+          </a:bodyPr>
+          <a:lstStyle/>
+          <a:p>
+            <a:pPr rtl="0">
+              <a:buNone/>
+            </a:pPr>
+            <a:r>
+              <a:rPr lang="ja-JP" altLang="ja-JP" sz="3200" b="0" i="0" u="none" strike="noStrike" dirty="0">
+                <a:solidFill>
+                  <a:srgbClr val="000000"/>
+                </a:solidFill>
+                <a:effectLst/>
+                <a:latin typeface="Arial" panose="020B0604020202020204" pitchFamily="34" charset="0"/>
+              </a:rPr>
+              <a:t>作品・研究の概要</a:t>
+            </a:r>
+            <a:endParaRPr lang="ja-JP" altLang="ja-JP" sz="3200" b="0" dirty="0">
+              <a:effectLst/>
+            </a:endParaRPr>
+          </a:p>
+          <a:p>
+            <a:pPr>
+              <a:buNone/>
+            </a:pPr>
+            <a:br>
+              <a:rPr lang="ja-JP" altLang="ja-JP" sz="2400" dirty="0"/>
+            </a:br>
+            <a:endParaRPr lang="ja-JP" altLang="en-US" sz="2400" dirty="0"/>
+          </a:p>
+        </p:txBody>
+      </p:sp>
+      <p:sp>
+        <p:nvSpPr>
+          <p:cNvPr id="10" name="テキスト ボックス 9">
+            <a:extLst>
+              <a:ext uri="{FF2B5EF4-FFF2-40B4-BE49-F238E27FC236}">
+                <a16:creationId xmlns:a16="http://schemas.microsoft.com/office/drawing/2014/main" id="{BC1E29EA-EA35-16AA-B191-C0E1C5914917}"/>
+              </a:ext>
+            </a:extLst>
+          </p:cNvPr>
+          <p:cNvSpPr txBox="1"/>
+          <p:nvPr/>
+        </p:nvSpPr>
+        <p:spPr>
+          <a:xfrm>
+            <a:off x="7289800" y="2633340"/>
+            <a:ext cx="3544387" cy="1908215"/>
+          </a:xfrm>
+          <a:prstGeom prst="rect">
+            <a:avLst/>
+          </a:prstGeom>
+          <a:noFill/>
+        </p:spPr>
+        <p:txBody>
+          <a:bodyPr wrap="square">
+            <a:spAutoFit/>
+          </a:bodyPr>
+          <a:lstStyle/>
+          <a:p>
+            <a:pPr rtl="0">
+              <a:spcBef>
+                <a:spcPts val="1200"/>
+              </a:spcBef>
+              <a:spcAft>
+                <a:spcPts val="1200"/>
+              </a:spcAft>
+              <a:buNone/>
+            </a:pPr>
+            <a:r>
+              <a:rPr lang="ja-JP" altLang="ja-JP" sz="2000" b="0" i="0" u="none" strike="noStrike" dirty="0">
+                <a:solidFill>
+                  <a:srgbClr val="000000"/>
+                </a:solidFill>
+                <a:effectLst/>
+                <a:latin typeface="Arial" panose="020B0604020202020204" pitchFamily="34" charset="0"/>
+              </a:rPr>
+              <a:t>ペットに関するWebサイトを調査し、掲載されている情報の内容やページ構成、デザインなどを研究しました。</a:t>
+            </a:r>
+            <a:endParaRPr lang="ja-JP" altLang="ja-JP" sz="2000" b="0" dirty="0">
+              <a:effectLst/>
+            </a:endParaRPr>
+          </a:p>
+          <a:p>
+            <a:pPr>
+              <a:buNone/>
+            </a:pPr>
+            <a:br>
+              <a:rPr lang="ja-JP" altLang="ja-JP" dirty="0"/>
+            </a:br>
+            <a:endParaRPr lang="ja-JP" altLang="en-US" dirty="0"/>
+          </a:p>
+        </p:txBody>
+      </p:sp>
+      <p:sp>
+        <p:nvSpPr>
+          <p:cNvPr id="12" name="テキスト ボックス 11">
+            <a:extLst>
+              <a:ext uri="{FF2B5EF4-FFF2-40B4-BE49-F238E27FC236}">
+                <a16:creationId xmlns:a16="http://schemas.microsoft.com/office/drawing/2014/main" id="{2159FA22-C1CE-9ACC-A530-F3206D7D8047}"/>
+              </a:ext>
+            </a:extLst>
+          </p:cNvPr>
+          <p:cNvSpPr txBox="1"/>
+          <p:nvPr/>
+        </p:nvSpPr>
+        <p:spPr>
+          <a:xfrm>
+            <a:off x="-966652" y="671142"/>
+            <a:ext cx="6757850" cy="584775"/>
+          </a:xfrm>
+          <a:prstGeom prst="rect">
+            <a:avLst/>
+          </a:prstGeom>
+          <a:noFill/>
+        </p:spPr>
+        <p:txBody>
+          <a:bodyPr wrap="square">
+            <a:spAutoFit/>
+          </a:bodyPr>
+          <a:lstStyle/>
+          <a:p>
+            <a:pPr algn="ctr"/>
+            <a:r>
+              <a:rPr lang="ja-JP" altLang="ja-JP" sz="3200" b="1" i="0" u="none" strike="noStrike" dirty="0">
+                <a:solidFill>
+                  <a:srgbClr val="000000"/>
+                </a:solidFill>
+                <a:effectLst/>
+                <a:latin typeface="Arial" panose="020B0604020202020204" pitchFamily="34" charset="0"/>
+              </a:rPr>
+              <a:t>内容</a:t>
+            </a:r>
+            <a:endParaRPr lang="ja-JP" altLang="en-US" sz="3200" dirty="0"/>
+          </a:p>
+        </p:txBody>
+      </p:sp>
+    </p:spTree>
+    <p:extLst>
+      <p:ext uri="{BB962C8B-B14F-4D97-AF65-F5344CB8AC3E}">
+        <p14:creationId xmlns:p14="http://schemas.microsoft.com/office/powerpoint/2010/main" val="1761350442"/>
+      </p:ext>
+    </p:extLst>
+  </p:cSld>
+  <p:clrMapOvr>
+    <a:masterClrMapping/>
+  </p:clrMapOvr>
+</p:sld>
+</file>
+
+<file path=ppt/slides/slide11.xml><?xml version="1.0" encoding="utf-8"?>
+<p:sld xmlns:a="http://schemas.openxmlformats.org/drawingml/2006/main" xmlns:r="http://schemas.openxmlformats.org/officeDocument/2006/relationships" xmlns:p="http://schemas.openxmlformats.org/presentationml/2006/main">
+  <p:cSld>
+    <p:spTree>
+      <p:nvGrpSpPr>
+        <p:cNvPr id="1" name=""/>
+        <p:cNvGrpSpPr/>
+        <p:nvPr/>
+      </p:nvGrpSpPr>
+      <p:grpSpPr>
+        <a:xfrm>
+          <a:off x="0" y="0"/>
+          <a:ext cx="0" cy="0"/>
+          <a:chOff x="0" y="0"/>
+          <a:chExt cx="0" cy="0"/>
+        </a:xfrm>
+      </p:grpSpPr>
+      <p:sp>
+        <p:nvSpPr>
           <p:cNvPr id="5" name="正方形/長方形 4">
             <a:extLst>
               <a:ext uri="{FF2B5EF4-FFF2-40B4-BE49-F238E27FC236}">
@@ -15763,7 +16135,7 @@
 </p:sld>
 </file>
 
-<file path=ppt/slides/slide11.xml><?xml version="1.0" encoding="utf-8"?>
+<file path=ppt/slides/slide12.xml><?xml version="1.0" encoding="utf-8"?>
 <p:sld xmlns:a="http://schemas.openxmlformats.org/drawingml/2006/main" xmlns:r="http://schemas.openxmlformats.org/officeDocument/2006/relationships" xmlns:p="http://schemas.openxmlformats.org/presentationml/2006/main">
   <p:cSld>
     <p:spTree>
@@ -15881,7 +16253,7 @@
 </p:sld>
 </file>
 
-<file path=ppt/slides/slide12.xml><?xml version="1.0" encoding="utf-8"?>
+<file path=ppt/slides/slide13.xml><?xml version="1.0" encoding="utf-8"?>
 <p:sld xmlns:a="http://schemas.openxmlformats.org/drawingml/2006/main" xmlns:r="http://schemas.openxmlformats.org/officeDocument/2006/relationships" xmlns:p="http://schemas.openxmlformats.org/presentationml/2006/main">
   <p:cSld>
     <p:spTree>
@@ -16476,7 +16848,7 @@
         </p:nvSpPr>
         <p:spPr>
           <a:xfrm>
-            <a:off x="3048000" y="5167312"/>
+            <a:off x="2962083" y="5167312"/>
             <a:ext cx="6096000" cy="1169551"/>
           </a:xfrm>
           <a:prstGeom prst="rect">
@@ -17435,101 +17807,7 @@
         <p:spPr>
           <a:xfrm>
             <a:off x="2166330" y="1350121"/>
-            <a:ext cx="7499308" cy="2338164"/>
-          </a:xfrm>
-          <a:prstGeom prst="rect">
-            <a:avLst/>
-          </a:prstGeom>
-          <a:noFill/>
-        </p:spPr>
-        <p:style>
-          <a:lnRef idx="2">
-            <a:schemeClr val="accent1">
-              <a:shade val="15000"/>
-            </a:schemeClr>
-          </a:lnRef>
-          <a:fillRef idx="1">
-            <a:schemeClr val="accent1"/>
-          </a:fillRef>
-          <a:effectRef idx="0">
-            <a:schemeClr val="accent1"/>
-          </a:effectRef>
-          <a:fontRef idx="minor">
-            <a:schemeClr val="lt1"/>
-          </a:fontRef>
-        </p:style>
-        <p:txBody>
-          <a:bodyPr rtlCol="0" anchor="ctr"/>
-          <a:lstStyle/>
-          <a:p>
-            <a:pPr algn="ctr"/>
-            <a:endParaRPr kumimoji="1" lang="ja-JP" altLang="en-US"/>
-          </a:p>
-        </p:txBody>
-      </p:sp>
-      <p:sp>
-        <p:nvSpPr>
-          <p:cNvPr id="16" name="正方形/長方形 15">
-            <a:extLst>
-              <a:ext uri="{FF2B5EF4-FFF2-40B4-BE49-F238E27FC236}">
-                <a16:creationId xmlns:a16="http://schemas.microsoft.com/office/drawing/2014/main" id="{C99583DA-A415-1896-D865-66BEC854E9FD}"/>
-              </a:ext>
-            </a:extLst>
-          </p:cNvPr>
-          <p:cNvSpPr/>
-          <p:nvPr/>
-        </p:nvSpPr>
-        <p:spPr>
-          <a:xfrm>
-            <a:off x="5351388" y="3811023"/>
-            <a:ext cx="4314250" cy="1589460"/>
-          </a:xfrm>
-          <a:prstGeom prst="rect">
-            <a:avLst/>
-          </a:prstGeom>
-          <a:noFill/>
-        </p:spPr>
-        <p:style>
-          <a:lnRef idx="2">
-            <a:schemeClr val="accent1">
-              <a:shade val="15000"/>
-            </a:schemeClr>
-          </a:lnRef>
-          <a:fillRef idx="1">
-            <a:schemeClr val="accent1"/>
-          </a:fillRef>
-          <a:effectRef idx="0">
-            <a:schemeClr val="accent1"/>
-          </a:effectRef>
-          <a:fontRef idx="minor">
-            <a:schemeClr val="lt1"/>
-          </a:fontRef>
-        </p:style>
-        <p:txBody>
-          <a:bodyPr rtlCol="0" anchor="ctr"/>
-          <a:lstStyle/>
-          <a:p>
-            <a:pPr algn="ctr"/>
-            <a:endParaRPr kumimoji="1" lang="ja-JP" altLang="en-US"/>
-          </a:p>
-        </p:txBody>
-      </p:sp>
-      <p:sp>
-        <p:nvSpPr>
-          <p:cNvPr id="18" name="正方形/長方形 17">
-            <a:extLst>
-              <a:ext uri="{FF2B5EF4-FFF2-40B4-BE49-F238E27FC236}">
-                <a16:creationId xmlns:a16="http://schemas.microsoft.com/office/drawing/2014/main" id="{6477C70E-6EF9-B625-01DA-7383BA5B2566}"/>
-              </a:ext>
-            </a:extLst>
-          </p:cNvPr>
-          <p:cNvSpPr/>
-          <p:nvPr/>
-        </p:nvSpPr>
-        <p:spPr>
-          <a:xfrm>
-            <a:off x="2166330" y="3811023"/>
-            <a:ext cx="7499308" cy="2764679"/>
+            <a:ext cx="7499308" cy="3365928"/>
           </a:xfrm>
           <a:prstGeom prst="rect">
             <a:avLst/>
@@ -17680,150 +17958,6 @@
       </p:sp>
       <p:sp>
         <p:nvSpPr>
-          <p:cNvPr id="33" name="テキスト ボックス 32">
-            <a:extLst>
-              <a:ext uri="{FF2B5EF4-FFF2-40B4-BE49-F238E27FC236}">
-                <a16:creationId xmlns:a16="http://schemas.microsoft.com/office/drawing/2014/main" id="{1DD5F397-0CCC-1997-CF69-347E6C2C75DE}"/>
-              </a:ext>
-            </a:extLst>
-          </p:cNvPr>
-          <p:cNvSpPr txBox="1"/>
-          <p:nvPr/>
-        </p:nvSpPr>
-        <p:spPr>
-          <a:xfrm>
-            <a:off x="2861847" y="4693204"/>
-            <a:ext cx="1642420" cy="307777"/>
-          </a:xfrm>
-          <a:prstGeom prst="rect">
-            <a:avLst/>
-          </a:prstGeom>
-          <a:noFill/>
-        </p:spPr>
-        <p:txBody>
-          <a:bodyPr wrap="square">
-            <a:spAutoFit/>
-          </a:bodyPr>
-          <a:lstStyle/>
-          <a:p>
-            <a:r>
-              <a:rPr lang="ja-JP" altLang="ja-JP" dirty="0"/>
-              <a:t>観光スポット </a:t>
-            </a:r>
-            <a:endParaRPr lang="ja-JP" altLang="en-US" dirty="0"/>
-          </a:p>
-        </p:txBody>
-      </p:sp>
-      <p:sp>
-        <p:nvSpPr>
-          <p:cNvPr id="35" name="テキスト ボックス 34">
-            <a:extLst>
-              <a:ext uri="{FF2B5EF4-FFF2-40B4-BE49-F238E27FC236}">
-                <a16:creationId xmlns:a16="http://schemas.microsoft.com/office/drawing/2014/main" id="{42639DFE-4692-94D4-85BC-86C8BFD5C595}"/>
-              </a:ext>
-            </a:extLst>
-          </p:cNvPr>
-          <p:cNvSpPr txBox="1"/>
-          <p:nvPr/>
-        </p:nvSpPr>
-        <p:spPr>
-          <a:xfrm>
-            <a:off x="2982823" y="5085336"/>
-            <a:ext cx="1284377" cy="307777"/>
-          </a:xfrm>
-          <a:prstGeom prst="rect">
-            <a:avLst/>
-          </a:prstGeom>
-          <a:noFill/>
-        </p:spPr>
-        <p:txBody>
-          <a:bodyPr wrap="square">
-            <a:spAutoFit/>
-          </a:bodyPr>
-          <a:lstStyle/>
-          <a:p>
-            <a:r>
-              <a:rPr lang="ja-JP" altLang="ja-JP" dirty="0"/>
-              <a:t>写真3枚</a:t>
-            </a:r>
-            <a:endParaRPr lang="ja-JP" altLang="en-US" dirty="0"/>
-          </a:p>
-        </p:txBody>
-      </p:sp>
-      <p:sp>
-        <p:nvSpPr>
-          <p:cNvPr id="37" name="テキスト ボックス 36">
-            <a:extLst>
-              <a:ext uri="{FF2B5EF4-FFF2-40B4-BE49-F238E27FC236}">
-                <a16:creationId xmlns:a16="http://schemas.microsoft.com/office/drawing/2014/main" id="{34602147-98FC-711E-3D39-DBD71B735747}"/>
-              </a:ext>
-            </a:extLst>
-          </p:cNvPr>
-          <p:cNvSpPr txBox="1"/>
-          <p:nvPr/>
-        </p:nvSpPr>
-        <p:spPr>
-          <a:xfrm>
-            <a:off x="6527800" y="3968117"/>
-            <a:ext cx="6096000" cy="307777"/>
-          </a:xfrm>
-          <a:prstGeom prst="rect">
-            <a:avLst/>
-          </a:prstGeom>
-          <a:noFill/>
-        </p:spPr>
-        <p:txBody>
-          <a:bodyPr wrap="square">
-            <a:spAutoFit/>
-          </a:bodyPr>
-          <a:lstStyle/>
-          <a:p>
-            <a:r>
-              <a:rPr lang="ja-JP" altLang="ja-JP" dirty="0"/>
-              <a:t>グルメ・イベント</a:t>
-            </a:r>
-            <a:endParaRPr lang="ja-JP" altLang="en-US" dirty="0"/>
-          </a:p>
-        </p:txBody>
-      </p:sp>
-      <p:sp>
-        <p:nvSpPr>
-          <p:cNvPr id="39" name="テキスト ボックス 38">
-            <a:extLst>
-              <a:ext uri="{FF2B5EF4-FFF2-40B4-BE49-F238E27FC236}">
-                <a16:creationId xmlns:a16="http://schemas.microsoft.com/office/drawing/2014/main" id="{63AF7143-F3CE-EC64-55A7-66FD556CC00B}"/>
-              </a:ext>
-            </a:extLst>
-          </p:cNvPr>
-          <p:cNvSpPr txBox="1"/>
-          <p:nvPr/>
-        </p:nvSpPr>
-        <p:spPr>
-          <a:xfrm>
-            <a:off x="6647769" y="4401837"/>
-            <a:ext cx="6311900" cy="307777"/>
-          </a:xfrm>
-          <a:prstGeom prst="rect">
-            <a:avLst/>
-          </a:prstGeom>
-          <a:noFill/>
-        </p:spPr>
-        <p:txBody>
-          <a:bodyPr wrap="square">
-            <a:spAutoFit/>
-          </a:bodyPr>
-          <a:lstStyle/>
-          <a:p>
-            <a:r>
-              <a:rPr lang="ja-JP" altLang="ja-JP" dirty="0"/>
-              <a:t>写真・紹介 </a:t>
-            </a:r>
-            <a:endParaRPr lang="ja-JP" altLang="en-US" dirty="0"/>
-          </a:p>
-        </p:txBody>
-      </p:sp>
-      <p:sp>
-        <p:nvSpPr>
           <p:cNvPr id="41" name="テキスト ボックス 40">
             <a:extLst>
               <a:ext uri="{FF2B5EF4-FFF2-40B4-BE49-F238E27FC236}">
@@ -18016,6 +18150,543 @@
 </file>
 
 <file path=ppt/slides/slide7.xml><?xml version="1.0" encoding="utf-8"?>
+<p:sld xmlns:a="http://schemas.openxmlformats.org/drawingml/2006/main" xmlns:r="http://schemas.openxmlformats.org/officeDocument/2006/relationships" xmlns:p="http://schemas.openxmlformats.org/presentationml/2006/main">
+  <p:cSld>
+    <p:spTree>
+      <p:nvGrpSpPr>
+        <p:cNvPr id="1" name=""/>
+        <p:cNvGrpSpPr/>
+        <p:nvPr/>
+      </p:nvGrpSpPr>
+      <p:grpSpPr>
+        <a:xfrm>
+          <a:off x="0" y="0"/>
+          <a:ext cx="0" cy="0"/>
+          <a:chOff x="0" y="0"/>
+          <a:chExt cx="0" cy="0"/>
+        </a:xfrm>
+      </p:grpSpPr>
+      <p:sp>
+        <p:nvSpPr>
+          <p:cNvPr id="5" name="正方形/長方形 4">
+            <a:extLst>
+              <a:ext uri="{FF2B5EF4-FFF2-40B4-BE49-F238E27FC236}">
+                <a16:creationId xmlns:a16="http://schemas.microsoft.com/office/drawing/2014/main" id="{7ABF3217-F388-AE10-1D17-5246ECD49D08}"/>
+              </a:ext>
+            </a:extLst>
+          </p:cNvPr>
+          <p:cNvSpPr/>
+          <p:nvPr/>
+        </p:nvSpPr>
+        <p:spPr>
+          <a:xfrm>
+            <a:off x="405036" y="282298"/>
+            <a:ext cx="9536763" cy="6468306"/>
+          </a:xfrm>
+          <a:prstGeom prst="rect">
+            <a:avLst/>
+          </a:prstGeom>
+          <a:noFill/>
+        </p:spPr>
+        <p:style>
+          <a:lnRef idx="2">
+            <a:schemeClr val="accent1">
+              <a:shade val="15000"/>
+            </a:schemeClr>
+          </a:lnRef>
+          <a:fillRef idx="1">
+            <a:schemeClr val="accent1"/>
+          </a:fillRef>
+          <a:effectRef idx="0">
+            <a:schemeClr val="accent1"/>
+          </a:effectRef>
+          <a:fontRef idx="minor">
+            <a:schemeClr val="lt1"/>
+          </a:fontRef>
+        </p:style>
+        <p:txBody>
+          <a:bodyPr rtlCol="0" anchor="ctr"/>
+          <a:lstStyle/>
+          <a:p>
+            <a:pPr algn="ctr"/>
+            <a:endParaRPr kumimoji="1" lang="ja-JP" altLang="en-US"/>
+          </a:p>
+        </p:txBody>
+      </p:sp>
+      <p:sp>
+        <p:nvSpPr>
+          <p:cNvPr id="7" name="正方形/長方形 6">
+            <a:extLst>
+              <a:ext uri="{FF2B5EF4-FFF2-40B4-BE49-F238E27FC236}">
+                <a16:creationId xmlns:a16="http://schemas.microsoft.com/office/drawing/2014/main" id="{1C058873-A5BA-28F8-098E-981523CA508A}"/>
+              </a:ext>
+            </a:extLst>
+          </p:cNvPr>
+          <p:cNvSpPr/>
+          <p:nvPr/>
+        </p:nvSpPr>
+        <p:spPr>
+          <a:xfrm>
+            <a:off x="466405" y="380489"/>
+            <a:ext cx="9364929" cy="816209"/>
+          </a:xfrm>
+          <a:prstGeom prst="rect">
+            <a:avLst/>
+          </a:prstGeom>
+          <a:noFill/>
+        </p:spPr>
+        <p:style>
+          <a:lnRef idx="2">
+            <a:schemeClr val="accent1">
+              <a:shade val="15000"/>
+            </a:schemeClr>
+          </a:lnRef>
+          <a:fillRef idx="1">
+            <a:schemeClr val="accent1"/>
+          </a:fillRef>
+          <a:effectRef idx="0">
+            <a:schemeClr val="accent1"/>
+          </a:effectRef>
+          <a:fontRef idx="minor">
+            <a:schemeClr val="lt1"/>
+          </a:fontRef>
+        </p:style>
+        <p:txBody>
+          <a:bodyPr rtlCol="0" anchor="ctr"/>
+          <a:lstStyle/>
+          <a:p>
+            <a:pPr algn="ctr"/>
+            <a:endParaRPr kumimoji="1" lang="ja-JP" altLang="en-US"/>
+          </a:p>
+        </p:txBody>
+      </p:sp>
+      <p:sp>
+        <p:nvSpPr>
+          <p:cNvPr id="9" name="正方形/長方形 8">
+            <a:extLst>
+              <a:ext uri="{FF2B5EF4-FFF2-40B4-BE49-F238E27FC236}">
+                <a16:creationId xmlns:a16="http://schemas.microsoft.com/office/drawing/2014/main" id="{FEF1C771-09BA-5BBA-554C-0D048426DB12}"/>
+              </a:ext>
+            </a:extLst>
+          </p:cNvPr>
+          <p:cNvSpPr/>
+          <p:nvPr/>
+        </p:nvSpPr>
+        <p:spPr>
+          <a:xfrm>
+            <a:off x="521638" y="1276478"/>
+            <a:ext cx="1356257" cy="5394346"/>
+          </a:xfrm>
+          <a:prstGeom prst="rect">
+            <a:avLst/>
+          </a:prstGeom>
+          <a:noFill/>
+        </p:spPr>
+        <p:style>
+          <a:lnRef idx="2">
+            <a:schemeClr val="accent1">
+              <a:shade val="15000"/>
+            </a:schemeClr>
+          </a:lnRef>
+          <a:fillRef idx="1">
+            <a:schemeClr val="accent1"/>
+          </a:fillRef>
+          <a:effectRef idx="0">
+            <a:schemeClr val="accent1"/>
+          </a:effectRef>
+          <a:fontRef idx="minor">
+            <a:schemeClr val="lt1"/>
+          </a:fontRef>
+        </p:style>
+        <p:txBody>
+          <a:bodyPr rtlCol="0" anchor="ctr"/>
+          <a:lstStyle/>
+          <a:p>
+            <a:pPr algn="ctr"/>
+            <a:endParaRPr kumimoji="1" lang="ja-JP" altLang="en-US"/>
+          </a:p>
+        </p:txBody>
+      </p:sp>
+      <p:sp>
+        <p:nvSpPr>
+          <p:cNvPr id="15" name="正方形/長方形 14">
+            <a:extLst>
+              <a:ext uri="{FF2B5EF4-FFF2-40B4-BE49-F238E27FC236}">
+                <a16:creationId xmlns:a16="http://schemas.microsoft.com/office/drawing/2014/main" id="{7333EDE5-B9B5-7BE1-C840-B3194186F31F}"/>
+              </a:ext>
+            </a:extLst>
+          </p:cNvPr>
+          <p:cNvSpPr/>
+          <p:nvPr/>
+        </p:nvSpPr>
+        <p:spPr>
+          <a:xfrm>
+            <a:off x="5211732" y="1321573"/>
+            <a:ext cx="4314250" cy="1589460"/>
+          </a:xfrm>
+          <a:prstGeom prst="rect">
+            <a:avLst/>
+          </a:prstGeom>
+          <a:noFill/>
+        </p:spPr>
+        <p:style>
+          <a:lnRef idx="2">
+            <a:schemeClr val="accent1">
+              <a:shade val="15000"/>
+            </a:schemeClr>
+          </a:lnRef>
+          <a:fillRef idx="1">
+            <a:schemeClr val="accent1"/>
+          </a:fillRef>
+          <a:effectRef idx="0">
+            <a:schemeClr val="accent1"/>
+          </a:effectRef>
+          <a:fontRef idx="minor">
+            <a:schemeClr val="lt1"/>
+          </a:fontRef>
+        </p:style>
+        <p:txBody>
+          <a:bodyPr rtlCol="0" anchor="ctr"/>
+          <a:lstStyle/>
+          <a:p>
+            <a:pPr algn="ctr"/>
+            <a:endParaRPr kumimoji="1" lang="ja-JP" altLang="en-US"/>
+          </a:p>
+        </p:txBody>
+      </p:sp>
+      <p:sp>
+        <p:nvSpPr>
+          <p:cNvPr id="17" name="正方形/長方形 16">
+            <a:extLst>
+              <a:ext uri="{FF2B5EF4-FFF2-40B4-BE49-F238E27FC236}">
+                <a16:creationId xmlns:a16="http://schemas.microsoft.com/office/drawing/2014/main" id="{F37136E0-F2D6-D77C-7F26-1452BEC12B20}"/>
+              </a:ext>
+            </a:extLst>
+          </p:cNvPr>
+          <p:cNvSpPr/>
+          <p:nvPr/>
+        </p:nvSpPr>
+        <p:spPr>
+          <a:xfrm>
+            <a:off x="2026674" y="1321573"/>
+            <a:ext cx="7499308" cy="4600548"/>
+          </a:xfrm>
+          <a:prstGeom prst="rect">
+            <a:avLst/>
+          </a:prstGeom>
+          <a:noFill/>
+        </p:spPr>
+        <p:style>
+          <a:lnRef idx="2">
+            <a:schemeClr val="accent1">
+              <a:shade val="15000"/>
+            </a:schemeClr>
+          </a:lnRef>
+          <a:fillRef idx="1">
+            <a:schemeClr val="accent1"/>
+          </a:fillRef>
+          <a:effectRef idx="0">
+            <a:schemeClr val="accent1"/>
+          </a:effectRef>
+          <a:fontRef idx="minor">
+            <a:schemeClr val="lt1"/>
+          </a:fontRef>
+        </p:style>
+        <p:txBody>
+          <a:bodyPr rtlCol="0" anchor="ctr"/>
+          <a:lstStyle/>
+          <a:p>
+            <a:pPr algn="ctr"/>
+            <a:endParaRPr kumimoji="1" lang="ja-JP" altLang="en-US"/>
+          </a:p>
+        </p:txBody>
+      </p:sp>
+      <p:sp>
+        <p:nvSpPr>
+          <p:cNvPr id="21" name="テキスト ボックス 20">
+            <a:extLst>
+              <a:ext uri="{FF2B5EF4-FFF2-40B4-BE49-F238E27FC236}">
+                <a16:creationId xmlns:a16="http://schemas.microsoft.com/office/drawing/2014/main" id="{42A0425B-4769-ACBA-04D9-5B1CD33C7A1A}"/>
+              </a:ext>
+            </a:extLst>
+          </p:cNvPr>
+          <p:cNvSpPr txBox="1"/>
+          <p:nvPr/>
+        </p:nvSpPr>
+        <p:spPr>
+          <a:xfrm>
+            <a:off x="2125417" y="497741"/>
+            <a:ext cx="6096000" cy="523220"/>
+          </a:xfrm>
+          <a:prstGeom prst="rect">
+            <a:avLst/>
+          </a:prstGeom>
+          <a:noFill/>
+        </p:spPr>
+        <p:txBody>
+          <a:bodyPr wrap="square">
+            <a:spAutoFit/>
+          </a:bodyPr>
+          <a:lstStyle/>
+          <a:p>
+            <a:pPr algn="ctr"/>
+            <a:r>
+              <a:rPr lang="ja-JP" altLang="ja-JP" dirty="0"/>
+              <a:t>日田市の魅力 Discover HITA</a:t>
+            </a:r>
+            <a:endParaRPr lang="en-US" altLang="ja-JP" dirty="0"/>
+          </a:p>
+          <a:p>
+            <a:pPr algn="ctr"/>
+            <a:r>
+              <a:rPr lang="ja-JP" altLang="ja-JP" dirty="0"/>
+              <a:t> Home | 観光 | グルメ | 千年あかり | お土産</a:t>
+            </a:r>
+            <a:endParaRPr lang="ja-JP" altLang="en-US" dirty="0"/>
+          </a:p>
+        </p:txBody>
+      </p:sp>
+      <p:sp>
+        <p:nvSpPr>
+          <p:cNvPr id="23" name="テキスト ボックス 22">
+            <a:extLst>
+              <a:ext uri="{FF2B5EF4-FFF2-40B4-BE49-F238E27FC236}">
+                <a16:creationId xmlns:a16="http://schemas.microsoft.com/office/drawing/2014/main" id="{E5CAD4F5-8506-E54F-47B6-C68F88AED14A}"/>
+              </a:ext>
+            </a:extLst>
+          </p:cNvPr>
+          <p:cNvSpPr txBox="1"/>
+          <p:nvPr/>
+        </p:nvSpPr>
+        <p:spPr>
+          <a:xfrm>
+            <a:off x="787400" y="1808526"/>
+            <a:ext cx="1090495" cy="307777"/>
+          </a:xfrm>
+          <a:prstGeom prst="rect">
+            <a:avLst/>
+          </a:prstGeom>
+          <a:noFill/>
+        </p:spPr>
+        <p:txBody>
+          <a:bodyPr wrap="square">
+            <a:spAutoFit/>
+          </a:bodyPr>
+          <a:lstStyle/>
+          <a:p>
+            <a:r>
+              <a:rPr lang="ja-JP" altLang="ja-JP" dirty="0"/>
+              <a:t>MENU </a:t>
+            </a:r>
+            <a:endParaRPr lang="ja-JP" altLang="en-US" dirty="0"/>
+          </a:p>
+        </p:txBody>
+      </p:sp>
+      <p:sp>
+        <p:nvSpPr>
+          <p:cNvPr id="25" name="テキスト ボックス 24">
+            <a:extLst>
+              <a:ext uri="{FF2B5EF4-FFF2-40B4-BE49-F238E27FC236}">
+                <a16:creationId xmlns:a16="http://schemas.microsoft.com/office/drawing/2014/main" id="{D46ABFF7-0D5B-91B8-5F23-86D82AE38129}"/>
+              </a:ext>
+            </a:extLst>
+          </p:cNvPr>
+          <p:cNvSpPr txBox="1"/>
+          <p:nvPr/>
+        </p:nvSpPr>
+        <p:spPr>
+          <a:xfrm>
+            <a:off x="2722191" y="2203754"/>
+            <a:ext cx="1642420" cy="307777"/>
+          </a:xfrm>
+          <a:prstGeom prst="rect">
+            <a:avLst/>
+          </a:prstGeom>
+          <a:noFill/>
+        </p:spPr>
+        <p:txBody>
+          <a:bodyPr wrap="square">
+            <a:spAutoFit/>
+          </a:bodyPr>
+          <a:lstStyle/>
+          <a:p>
+            <a:r>
+              <a:rPr lang="ja-JP" altLang="ja-JP" dirty="0"/>
+              <a:t>観光スポット </a:t>
+            </a:r>
+            <a:endParaRPr lang="ja-JP" altLang="en-US" dirty="0"/>
+          </a:p>
+        </p:txBody>
+      </p:sp>
+      <p:sp>
+        <p:nvSpPr>
+          <p:cNvPr id="27" name="テキスト ボックス 26">
+            <a:extLst>
+              <a:ext uri="{FF2B5EF4-FFF2-40B4-BE49-F238E27FC236}">
+                <a16:creationId xmlns:a16="http://schemas.microsoft.com/office/drawing/2014/main" id="{21D2E3D7-6E5D-3164-8E76-D3D7F81F59E2}"/>
+              </a:ext>
+            </a:extLst>
+          </p:cNvPr>
+          <p:cNvSpPr txBox="1"/>
+          <p:nvPr/>
+        </p:nvSpPr>
+        <p:spPr>
+          <a:xfrm>
+            <a:off x="2843167" y="2595886"/>
+            <a:ext cx="1284377" cy="307777"/>
+          </a:xfrm>
+          <a:prstGeom prst="rect">
+            <a:avLst/>
+          </a:prstGeom>
+          <a:noFill/>
+        </p:spPr>
+        <p:txBody>
+          <a:bodyPr wrap="square">
+            <a:spAutoFit/>
+          </a:bodyPr>
+          <a:lstStyle/>
+          <a:p>
+            <a:r>
+              <a:rPr lang="ja-JP" altLang="ja-JP" dirty="0"/>
+              <a:t>写真3枚</a:t>
+            </a:r>
+            <a:endParaRPr lang="ja-JP" altLang="en-US" dirty="0"/>
+          </a:p>
+        </p:txBody>
+      </p:sp>
+      <p:sp>
+        <p:nvSpPr>
+          <p:cNvPr id="29" name="テキスト ボックス 28">
+            <a:extLst>
+              <a:ext uri="{FF2B5EF4-FFF2-40B4-BE49-F238E27FC236}">
+                <a16:creationId xmlns:a16="http://schemas.microsoft.com/office/drawing/2014/main" id="{E217189B-2C41-ABB6-B4B6-93126F151030}"/>
+              </a:ext>
+            </a:extLst>
+          </p:cNvPr>
+          <p:cNvSpPr txBox="1"/>
+          <p:nvPr/>
+        </p:nvSpPr>
+        <p:spPr>
+          <a:xfrm>
+            <a:off x="6388144" y="1478667"/>
+            <a:ext cx="1608253" cy="307777"/>
+          </a:xfrm>
+          <a:prstGeom prst="rect">
+            <a:avLst/>
+          </a:prstGeom>
+          <a:noFill/>
+        </p:spPr>
+        <p:txBody>
+          <a:bodyPr wrap="square">
+            <a:spAutoFit/>
+          </a:bodyPr>
+          <a:lstStyle/>
+          <a:p>
+            <a:r>
+              <a:rPr lang="ja-JP" altLang="ja-JP" dirty="0"/>
+              <a:t>グルメ・イベント</a:t>
+            </a:r>
+            <a:endParaRPr lang="ja-JP" altLang="en-US" dirty="0"/>
+          </a:p>
+        </p:txBody>
+      </p:sp>
+      <p:sp>
+        <p:nvSpPr>
+          <p:cNvPr id="31" name="テキスト ボックス 30">
+            <a:extLst>
+              <a:ext uri="{FF2B5EF4-FFF2-40B4-BE49-F238E27FC236}">
+                <a16:creationId xmlns:a16="http://schemas.microsoft.com/office/drawing/2014/main" id="{E88ADB1A-1C2C-8049-14C0-3D2C889D51A8}"/>
+              </a:ext>
+            </a:extLst>
+          </p:cNvPr>
+          <p:cNvSpPr txBox="1"/>
+          <p:nvPr/>
+        </p:nvSpPr>
+        <p:spPr>
+          <a:xfrm>
+            <a:off x="6567990" y="1884936"/>
+            <a:ext cx="1232026" cy="307777"/>
+          </a:xfrm>
+          <a:prstGeom prst="rect">
+            <a:avLst/>
+          </a:prstGeom>
+          <a:noFill/>
+        </p:spPr>
+        <p:txBody>
+          <a:bodyPr wrap="square">
+            <a:spAutoFit/>
+          </a:bodyPr>
+          <a:lstStyle/>
+          <a:p>
+            <a:r>
+              <a:rPr lang="ja-JP" altLang="ja-JP" dirty="0"/>
+              <a:t>写真・紹介</a:t>
+            </a:r>
+            <a:endParaRPr lang="ja-JP" altLang="en-US" dirty="0"/>
+          </a:p>
+        </p:txBody>
+      </p:sp>
+      <p:sp>
+        <p:nvSpPr>
+          <p:cNvPr id="43" name="正方形/長方形 42">
+            <a:extLst>
+              <a:ext uri="{FF2B5EF4-FFF2-40B4-BE49-F238E27FC236}">
+                <a16:creationId xmlns:a16="http://schemas.microsoft.com/office/drawing/2014/main" id="{0C82E32E-D2AD-66DC-6B77-5F46CA837B5E}"/>
+              </a:ext>
+            </a:extLst>
+          </p:cNvPr>
+          <p:cNvSpPr/>
+          <p:nvPr/>
+        </p:nvSpPr>
+        <p:spPr>
+          <a:xfrm>
+            <a:off x="2073894" y="3226030"/>
+            <a:ext cx="4314250" cy="1589460"/>
+          </a:xfrm>
+          <a:prstGeom prst="rect">
+            <a:avLst/>
+          </a:prstGeom>
+          <a:noFill/>
+        </p:spPr>
+        <p:style>
+          <a:lnRef idx="2">
+            <a:schemeClr val="accent1">
+              <a:shade val="15000"/>
+            </a:schemeClr>
+          </a:lnRef>
+          <a:fillRef idx="1">
+            <a:schemeClr val="accent1"/>
+          </a:fillRef>
+          <a:effectRef idx="0">
+            <a:schemeClr val="accent1"/>
+          </a:effectRef>
+          <a:fontRef idx="minor">
+            <a:schemeClr val="lt1"/>
+          </a:fontRef>
+        </p:style>
+        <p:txBody>
+          <a:bodyPr rtlCol="0" anchor="ctr"/>
+          <a:lstStyle/>
+          <a:p>
+            <a:pPr algn="ctr"/>
+            <a:endParaRPr kumimoji="1" lang="ja-JP" altLang="en-US"/>
+          </a:p>
+        </p:txBody>
+      </p:sp>
+    </p:spTree>
+    <p:extLst>
+      <p:ext uri="{BB962C8B-B14F-4D97-AF65-F5344CB8AC3E}">
+        <p14:creationId xmlns:p14="http://schemas.microsoft.com/office/powerpoint/2010/main" val="2004594424"/>
+      </p:ext>
+    </p:extLst>
+  </p:cSld>
+  <p:clrMapOvr>
+    <a:masterClrMapping/>
+  </p:clrMapOvr>
+</p:sld>
+</file>
+
+<file path=ppt/slides/slide8.xml><?xml version="1.0" encoding="utf-8"?>
 <p:sld xmlns:a="http://schemas.openxmlformats.org/drawingml/2006/main" xmlns:r="http://schemas.openxmlformats.org/officeDocument/2006/relationships" xmlns:p="http://schemas.openxmlformats.org/presentationml/2006/main">
   <p:cSld>
     <p:spTree>
@@ -18219,7 +18890,7 @@
 </p:sld>
 </file>
 
-<file path=ppt/slides/slide8.xml><?xml version="1.0" encoding="utf-8"?>
+<file path=ppt/slides/slide9.xml><?xml version="1.0" encoding="utf-8"?>
 <p:sld xmlns:a="http://schemas.openxmlformats.org/drawingml/2006/main" xmlns:r="http://schemas.openxmlformats.org/officeDocument/2006/relationships" xmlns:p="http://schemas.openxmlformats.org/presentationml/2006/main">
   <p:cSld>
     <p:spTree>
@@ -18491,377 +19162,6 @@
     <p:extLst>
       <p:ext uri="{BB962C8B-B14F-4D97-AF65-F5344CB8AC3E}">
         <p14:creationId xmlns:p14="http://schemas.microsoft.com/office/powerpoint/2010/main" val="967898701"/>
-      </p:ext>
-    </p:extLst>
-  </p:cSld>
-  <p:clrMapOvr>
-    <a:masterClrMapping/>
-  </p:clrMapOvr>
-</p:sld>
-</file>
-
-<file path=ppt/slides/slide9.xml><?xml version="1.0" encoding="utf-8"?>
-<p:sld xmlns:a="http://schemas.openxmlformats.org/drawingml/2006/main" xmlns:r="http://schemas.openxmlformats.org/officeDocument/2006/relationships" xmlns:p="http://schemas.openxmlformats.org/presentationml/2006/main">
-  <p:cSld>
-    <p:spTree>
-      <p:nvGrpSpPr>
-        <p:cNvPr id="1" name=""/>
-        <p:cNvGrpSpPr/>
-        <p:nvPr/>
-      </p:nvGrpSpPr>
-      <p:grpSpPr>
-        <a:xfrm>
-          <a:off x="0" y="0"/>
-          <a:ext cx="0" cy="0"/>
-          <a:chOff x="0" y="0"/>
-          <a:chExt cx="0" cy="0"/>
-        </a:xfrm>
-      </p:grpSpPr>
-      <p:sp>
-        <p:nvSpPr>
-          <p:cNvPr id="6" name="テキスト ボックス 5">
-            <a:extLst>
-              <a:ext uri="{FF2B5EF4-FFF2-40B4-BE49-F238E27FC236}">
-                <a16:creationId xmlns:a16="http://schemas.microsoft.com/office/drawing/2014/main" id="{BB82D915-2957-5602-2F54-C5B0A06CED8A}"/>
-              </a:ext>
-            </a:extLst>
-          </p:cNvPr>
-          <p:cNvSpPr txBox="1"/>
-          <p:nvPr/>
-        </p:nvSpPr>
-        <p:spPr>
-          <a:xfrm>
-            <a:off x="1098006" y="1767006"/>
-            <a:ext cx="6096000" cy="5324535"/>
-          </a:xfrm>
-          <a:prstGeom prst="rect">
-            <a:avLst/>
-          </a:prstGeom>
-          <a:noFill/>
-        </p:spPr>
-        <p:txBody>
-          <a:bodyPr wrap="square">
-            <a:spAutoFit/>
-          </a:bodyPr>
-          <a:lstStyle/>
-          <a:p>
-            <a:pPr rtl="0">
-              <a:buNone/>
-            </a:pPr>
-            <a:r>
-              <a:rPr lang="ja-JP" altLang="ja-JP" sz="2400" b="0" i="0" u="none" strike="noStrike" dirty="0">
-                <a:solidFill>
-                  <a:srgbClr val="000000"/>
-                </a:solidFill>
-                <a:effectLst/>
-                <a:latin typeface="Arial" panose="020B0604020202020204" pitchFamily="34" charset="0"/>
-              </a:rPr>
-              <a:t>ページ１ トップページ  </a:t>
-            </a:r>
-            <a:endParaRPr lang="ja-JP" altLang="ja-JP" sz="2400" b="0" dirty="0">
-              <a:effectLst/>
-            </a:endParaRPr>
-          </a:p>
-          <a:p>
-            <a:pPr>
-              <a:buNone/>
-            </a:pPr>
-            <a:br>
-              <a:rPr lang="ja-JP" altLang="ja-JP" sz="2400" b="0" dirty="0">
-                <a:effectLst/>
-              </a:rPr>
-            </a:br>
-            <a:endParaRPr lang="ja-JP" altLang="ja-JP" sz="2400" b="0" dirty="0">
-              <a:effectLst/>
-            </a:endParaRPr>
-          </a:p>
-          <a:p>
-            <a:pPr rtl="0">
-              <a:buNone/>
-            </a:pPr>
-            <a:r>
-              <a:rPr lang="ja-JP" altLang="ja-JP" sz="2400" b="0" i="0" u="none" strike="noStrike" dirty="0">
-                <a:solidFill>
-                  <a:srgbClr val="000000"/>
-                </a:solidFill>
-                <a:effectLst/>
-                <a:latin typeface="Arial" panose="020B0604020202020204" pitchFamily="34" charset="0"/>
-              </a:rPr>
-              <a:t>ページ２ ペット紹介 </a:t>
-            </a:r>
-            <a:endParaRPr lang="ja-JP" altLang="ja-JP" sz="2400" b="0" dirty="0">
-              <a:effectLst/>
-            </a:endParaRPr>
-          </a:p>
-          <a:p>
-            <a:pPr>
-              <a:buNone/>
-            </a:pPr>
-            <a:br>
-              <a:rPr lang="ja-JP" altLang="ja-JP" sz="2400" b="0" dirty="0">
-                <a:effectLst/>
-              </a:rPr>
-            </a:br>
-            <a:endParaRPr lang="ja-JP" altLang="ja-JP" sz="2400" b="0" dirty="0">
-              <a:effectLst/>
-            </a:endParaRPr>
-          </a:p>
-          <a:p>
-            <a:pPr rtl="0">
-              <a:buNone/>
-            </a:pPr>
-            <a:r>
-              <a:rPr lang="ja-JP" altLang="ja-JP" sz="2400" b="0" i="0" u="none" strike="noStrike" dirty="0">
-                <a:solidFill>
-                  <a:srgbClr val="000000"/>
-                </a:solidFill>
-                <a:effectLst/>
-                <a:latin typeface="Arial" panose="020B0604020202020204" pitchFamily="34" charset="0"/>
-              </a:rPr>
-              <a:t>ページ３ 飼育方法 ① </a:t>
-            </a:r>
-            <a:endParaRPr lang="ja-JP" altLang="ja-JP" sz="2400" b="0" dirty="0">
-              <a:effectLst/>
-            </a:endParaRPr>
-          </a:p>
-          <a:p>
-            <a:pPr>
-              <a:buNone/>
-            </a:pPr>
-            <a:br>
-              <a:rPr lang="ja-JP" altLang="ja-JP" sz="2400" b="0" dirty="0">
-                <a:effectLst/>
-              </a:rPr>
-            </a:br>
-            <a:endParaRPr lang="ja-JP" altLang="ja-JP" sz="2400" b="0" dirty="0">
-              <a:effectLst/>
-            </a:endParaRPr>
-          </a:p>
-          <a:p>
-            <a:pPr rtl="0">
-              <a:buNone/>
-            </a:pPr>
-            <a:r>
-              <a:rPr lang="ja-JP" altLang="ja-JP" sz="2400" b="0" i="0" u="none" strike="noStrike" dirty="0">
-                <a:solidFill>
-                  <a:srgbClr val="000000"/>
-                </a:solidFill>
-                <a:effectLst/>
-                <a:latin typeface="Arial" panose="020B0604020202020204" pitchFamily="34" charset="0"/>
-              </a:rPr>
-              <a:t>ページ４ 飼育方法 ② </a:t>
-            </a:r>
-            <a:endParaRPr lang="ja-JP" altLang="ja-JP" sz="2400" b="0" dirty="0">
-              <a:effectLst/>
-            </a:endParaRPr>
-          </a:p>
-          <a:p>
-            <a:pPr>
-              <a:buNone/>
-            </a:pPr>
-            <a:br>
-              <a:rPr lang="ja-JP" altLang="ja-JP" sz="2400" b="0" dirty="0">
-                <a:effectLst/>
-              </a:rPr>
-            </a:br>
-            <a:endParaRPr lang="ja-JP" altLang="ja-JP" sz="2400" b="0" dirty="0">
-              <a:effectLst/>
-            </a:endParaRPr>
-          </a:p>
-          <a:p>
-            <a:pPr rtl="0">
-              <a:buNone/>
-            </a:pPr>
-            <a:r>
-              <a:rPr lang="ja-JP" altLang="ja-JP" sz="2400" b="0" i="0" u="none" strike="noStrike" dirty="0">
-                <a:solidFill>
-                  <a:srgbClr val="000000"/>
-                </a:solidFill>
-                <a:effectLst/>
-                <a:latin typeface="Arial" panose="020B0604020202020204" pitchFamily="34" charset="0"/>
-              </a:rPr>
-              <a:t>ページ５ 飼育に必要な費用 </a:t>
-            </a:r>
-            <a:endParaRPr lang="ja-JP" altLang="ja-JP" sz="2400" b="0" dirty="0">
-              <a:effectLst/>
-            </a:endParaRPr>
-          </a:p>
-          <a:p>
-            <a:pPr>
-              <a:buNone/>
-            </a:pPr>
-            <a:br>
-              <a:rPr lang="ja-JP" altLang="ja-JP" dirty="0"/>
-            </a:br>
-            <a:endParaRPr lang="ja-JP" altLang="en-US" dirty="0"/>
-          </a:p>
-        </p:txBody>
-      </p:sp>
-      <p:sp>
-        <p:nvSpPr>
-          <p:cNvPr id="8" name="テキスト ボックス 7">
-            <a:extLst>
-              <a:ext uri="{FF2B5EF4-FFF2-40B4-BE49-F238E27FC236}">
-                <a16:creationId xmlns:a16="http://schemas.microsoft.com/office/drawing/2014/main" id="{4E253DB3-34B1-3F90-B5D5-D247803785B1}"/>
-              </a:ext>
-            </a:extLst>
-          </p:cNvPr>
-          <p:cNvSpPr txBox="1"/>
-          <p:nvPr/>
-        </p:nvSpPr>
-        <p:spPr>
-          <a:xfrm>
-            <a:off x="7364548" y="594198"/>
-            <a:ext cx="6096000" cy="1323439"/>
-          </a:xfrm>
-          <a:prstGeom prst="rect">
-            <a:avLst/>
-          </a:prstGeom>
-          <a:noFill/>
-        </p:spPr>
-        <p:txBody>
-          <a:bodyPr wrap="square">
-            <a:spAutoFit/>
-          </a:bodyPr>
-          <a:lstStyle/>
-          <a:p>
-            <a:pPr rtl="0">
-              <a:buNone/>
-            </a:pPr>
-            <a:r>
-              <a:rPr lang="ja-JP" altLang="ja-JP" sz="3200" b="0" i="0" u="none" strike="noStrike" dirty="0">
-                <a:solidFill>
-                  <a:srgbClr val="000000"/>
-                </a:solidFill>
-                <a:effectLst/>
-                <a:latin typeface="Arial" panose="020B0604020202020204" pitchFamily="34" charset="0"/>
-              </a:rPr>
-              <a:t>作品・研究の概要</a:t>
-            </a:r>
-            <a:endParaRPr lang="ja-JP" altLang="ja-JP" sz="3200" b="0" dirty="0">
-              <a:effectLst/>
-            </a:endParaRPr>
-          </a:p>
-          <a:p>
-            <a:pPr>
-              <a:buNone/>
-            </a:pPr>
-            <a:br>
-              <a:rPr lang="ja-JP" altLang="ja-JP" sz="2400" dirty="0"/>
-            </a:br>
-            <a:endParaRPr lang="ja-JP" altLang="en-US" sz="2400" dirty="0"/>
-          </a:p>
-        </p:txBody>
-      </p:sp>
-      <p:sp>
-        <p:nvSpPr>
-          <p:cNvPr id="10" name="テキスト ボックス 9">
-            <a:extLst>
-              <a:ext uri="{FF2B5EF4-FFF2-40B4-BE49-F238E27FC236}">
-                <a16:creationId xmlns:a16="http://schemas.microsoft.com/office/drawing/2014/main" id="{BC1E29EA-EA35-16AA-B191-C0E1C5914917}"/>
-              </a:ext>
-            </a:extLst>
-          </p:cNvPr>
-          <p:cNvSpPr txBox="1"/>
-          <p:nvPr/>
-        </p:nvSpPr>
-        <p:spPr>
-          <a:xfrm>
-            <a:off x="7289800" y="2633340"/>
-            <a:ext cx="3544387" cy="1908215"/>
-          </a:xfrm>
-          <a:prstGeom prst="rect">
-            <a:avLst/>
-          </a:prstGeom>
-          <a:noFill/>
-        </p:spPr>
-        <p:txBody>
-          <a:bodyPr wrap="square">
-            <a:spAutoFit/>
-          </a:bodyPr>
-          <a:lstStyle/>
-          <a:p>
-            <a:pPr rtl="0">
-              <a:spcBef>
-                <a:spcPts val="1200"/>
-              </a:spcBef>
-              <a:spcAft>
-                <a:spcPts val="1200"/>
-              </a:spcAft>
-              <a:buNone/>
-            </a:pPr>
-            <a:r>
-              <a:rPr lang="ja-JP" altLang="ja-JP" sz="2000" b="0" i="0" u="none" strike="noStrike" dirty="0">
-                <a:solidFill>
-                  <a:srgbClr val="000000"/>
-                </a:solidFill>
-                <a:effectLst/>
-                <a:latin typeface="Arial" panose="020B0604020202020204" pitchFamily="34" charset="0"/>
-              </a:rPr>
-              <a:t>ペットに関するWebサイトを調査し、掲載されている情報の内容やページ構成、デザインなどを研究しました。</a:t>
-            </a:r>
-            <a:endParaRPr lang="ja-JP" altLang="ja-JP" sz="2000" b="0" dirty="0">
-              <a:effectLst/>
-            </a:endParaRPr>
-          </a:p>
-          <a:p>
-            <a:pPr>
-              <a:buNone/>
-            </a:pPr>
-            <a:br>
-              <a:rPr lang="ja-JP" altLang="ja-JP" dirty="0"/>
-            </a:br>
-            <a:endParaRPr lang="ja-JP" altLang="en-US" dirty="0"/>
-          </a:p>
-        </p:txBody>
-      </p:sp>
-      <p:sp>
-        <p:nvSpPr>
-          <p:cNvPr id="12" name="テキスト ボックス 11">
-            <a:extLst>
-              <a:ext uri="{FF2B5EF4-FFF2-40B4-BE49-F238E27FC236}">
-                <a16:creationId xmlns:a16="http://schemas.microsoft.com/office/drawing/2014/main" id="{2159FA22-C1CE-9ACC-A530-F3206D7D8047}"/>
-              </a:ext>
-            </a:extLst>
-          </p:cNvPr>
-          <p:cNvSpPr txBox="1"/>
-          <p:nvPr/>
-        </p:nvSpPr>
-        <p:spPr>
-          <a:xfrm>
-            <a:off x="-966652" y="671142"/>
-            <a:ext cx="6757850" cy="584775"/>
-          </a:xfrm>
-          <a:prstGeom prst="rect">
-            <a:avLst/>
-          </a:prstGeom>
-          <a:noFill/>
-        </p:spPr>
-        <p:txBody>
-          <a:bodyPr wrap="square">
-            <a:spAutoFit/>
-          </a:bodyPr>
-          <a:lstStyle/>
-          <a:p>
-            <a:pPr algn="ctr"/>
-            <a:r>
-              <a:rPr lang="ja-JP" altLang="ja-JP" sz="3200" b="1" i="0" u="none" strike="noStrike" dirty="0">
-                <a:solidFill>
-                  <a:srgbClr val="000000"/>
-                </a:solidFill>
-                <a:effectLst/>
-                <a:latin typeface="Arial" panose="020B0604020202020204" pitchFamily="34" charset="0"/>
-              </a:rPr>
-              <a:t>内容</a:t>
-            </a:r>
-            <a:endParaRPr lang="ja-JP" altLang="en-US" sz="3200" dirty="0"/>
-          </a:p>
-        </p:txBody>
-      </p:sp>
-    </p:spTree>
-    <p:extLst>
-      <p:ext uri="{BB962C8B-B14F-4D97-AF65-F5344CB8AC3E}">
-        <p14:creationId xmlns:p14="http://schemas.microsoft.com/office/powerpoint/2010/main" val="1761350442"/>
       </p:ext>
     </p:extLst>
   </p:cSld>

--- a/卒業制作 テーマ・中間発表.pptx
+++ b/卒業制作 テーマ・中間発表.pptx
@@ -5,22 +5,21 @@
     <p:sldMasterId id="2147483648" r:id="rId1"/>
   </p:sldMasterIdLst>
   <p:notesMasterIdLst>
-    <p:notesMasterId r:id="rId15"/>
+    <p:notesMasterId r:id="rId14"/>
   </p:notesMasterIdLst>
   <p:sldIdLst>
     <p:sldId id="256" r:id="rId2"/>
     <p:sldId id="258" r:id="rId3"/>
     <p:sldId id="257" r:id="rId4"/>
-    <p:sldId id="259" r:id="rId5"/>
-    <p:sldId id="260" r:id="rId6"/>
-    <p:sldId id="263" r:id="rId7"/>
-    <p:sldId id="269" r:id="rId8"/>
-    <p:sldId id="261" r:id="rId9"/>
-    <p:sldId id="264" r:id="rId10"/>
-    <p:sldId id="265" r:id="rId11"/>
-    <p:sldId id="268" r:id="rId12"/>
-    <p:sldId id="267" r:id="rId13"/>
-    <p:sldId id="262" r:id="rId14"/>
+    <p:sldId id="260" r:id="rId5"/>
+    <p:sldId id="263" r:id="rId6"/>
+    <p:sldId id="269" r:id="rId7"/>
+    <p:sldId id="261" r:id="rId8"/>
+    <p:sldId id="264" r:id="rId9"/>
+    <p:sldId id="265" r:id="rId10"/>
+    <p:sldId id="268" r:id="rId11"/>
+    <p:sldId id="267" r:id="rId12"/>
+    <p:sldId id="262" r:id="rId13"/>
   </p:sldIdLst>
   <p:sldSz cx="12192000" cy="6858000"/>
   <p:notesSz cx="6858000" cy="9144000"/>
@@ -258,7 +257,7 @@
       <p15:sldGuideLst xmlns:p15="http://schemas.microsoft.com/office/powerpoint/2012/main"/>
     </p:ext>
     <p:ext uri="GoogleSlidesCustomDataVersion2">
-      <go:slidesCustomData xmlns="" xmlns:mc="http://schemas.openxmlformats.org/markup-compatibility/2006" xmlns:mv="urn:schemas-microsoft-com:mac:vml" xmlns:c="http://schemas.openxmlformats.org/drawingml/2006/chart" xmlns:dgm="http://schemas.openxmlformats.org/drawingml/2006/diagram" xmlns:o="urn:schemas-microsoft-com:office:office" xmlns:v="urn:schemas-microsoft-com:vml" xmlns:pvml="urn:schemas-microsoft-com:office:powerpoint" xmlns:com="http://schemas.openxmlformats.org/drawingml/2006/compatibility" xmlns:p14="http://schemas.microsoft.com/office/powerpoint/2010/main" xmlns:p15="http://schemas.microsoft.com/office/powerpoint/2012/main" xmlns:ahyp="http://schemas.microsoft.com/office/drawing/2018/hyperlinkcolor" xmlns:go="http://customooxmlschemas.google.com/" r:id="rId16" roundtripDataSignature="AMtx7miZ4l44vHPzKZImSivDlVkC4Y8KPg=="/>
+      <go:slidesCustomData xmlns:go="http://customooxmlschemas.google.com/" xmlns:ahyp="http://schemas.microsoft.com/office/drawing/2018/hyperlinkcolor" xmlns:p15="http://schemas.microsoft.com/office/powerpoint/2012/main" xmlns:p14="http://schemas.microsoft.com/office/powerpoint/2010/main" xmlns:com="http://schemas.openxmlformats.org/drawingml/2006/compatibility" xmlns:pvml="urn:schemas-microsoft-com:office:powerpoint" xmlns:v="urn:schemas-microsoft-com:vml" xmlns:o="urn:schemas-microsoft-com:office:office" xmlns:dgm="http://schemas.openxmlformats.org/drawingml/2006/diagram" xmlns:c="http://schemas.openxmlformats.org/drawingml/2006/chart" xmlns:mv="urn:schemas-microsoft-com:mac:vml" xmlns:mc="http://schemas.openxmlformats.org/markup-compatibility/2006" xmlns="" r:id="rId16" roundtripDataSignature="AMtx7miZ4l44vHPzKZImSivDlVkC4Y8KPg=="/>
     </p:ext>
   </p:extLst>
 </p:presentation>
@@ -1211,128 +1210,6 @@
   <p:cSld>
     <p:spTree>
       <p:nvGrpSpPr>
-        <p:cNvPr id="1" name="Shape 98"/>
-        <p:cNvGrpSpPr/>
-        <p:nvPr/>
-      </p:nvGrpSpPr>
-      <p:grpSpPr>
-        <a:xfrm>
-          <a:off x="0" y="0"/>
-          <a:ext cx="0" cy="0"/>
-          <a:chOff x="0" y="0"/>
-          <a:chExt cx="0" cy="0"/>
-        </a:xfrm>
-      </p:grpSpPr>
-      <p:sp>
-        <p:nvSpPr>
-          <p:cNvPr id="99" name="Google Shape;99;p3:notes"/>
-          <p:cNvSpPr txBox="1">
-            <a:spLocks noGrp="1"/>
-          </p:cNvSpPr>
-          <p:nvPr>
-            <p:ph type="body" idx="1"/>
-          </p:nvPr>
-        </p:nvSpPr>
-        <p:spPr>
-          <a:xfrm>
-            <a:off x="685800" y="4343400"/>
-            <a:ext cx="5486400" cy="4114800"/>
-          </a:xfrm>
-          <a:prstGeom prst="rect">
-            <a:avLst/>
-          </a:prstGeom>
-          <a:noFill/>
-          <a:ln>
-            <a:noFill/>
-          </a:ln>
-        </p:spPr>
-        <p:txBody>
-          <a:bodyPr spcFirstLastPara="1" wrap="square" lIns="91425" tIns="91425" rIns="91425" bIns="91425" anchor="t" anchorCtr="0">
-            <a:noAutofit/>
-          </a:bodyPr>
-          <a:lstStyle/>
-          <a:p>
-            <a:pPr marL="0" lvl="0" indent="0" algn="l" rtl="0">
-              <a:lnSpc>
-                <a:spcPct val="100000"/>
-              </a:lnSpc>
-              <a:spcBef>
-                <a:spcPts val="0"/>
-              </a:spcBef>
-              <a:spcAft>
-                <a:spcPts val="0"/>
-              </a:spcAft>
-              <a:buSzPts val="1100"/>
-              <a:buNone/>
-            </a:pPr>
-            <a:endParaRPr/>
-          </a:p>
-        </p:txBody>
-      </p:sp>
-      <p:sp>
-        <p:nvSpPr>
-          <p:cNvPr id="100" name="Google Shape;100;p3:notes"/>
-          <p:cNvSpPr>
-            <a:spLocks noGrp="1" noRot="1" noChangeAspect="1"/>
-          </p:cNvSpPr>
-          <p:nvPr>
-            <p:ph type="sldImg" idx="2"/>
-          </p:nvPr>
-        </p:nvSpPr>
-        <p:spPr>
-          <a:xfrm>
-            <a:off x="381000" y="685800"/>
-            <a:ext cx="6096000" cy="3429000"/>
-          </a:xfrm>
-          <a:custGeom>
-            <a:avLst/>
-            <a:gdLst/>
-            <a:ahLst/>
-            <a:cxnLst/>
-            <a:rect l="l" t="t" r="r" b="b"/>
-            <a:pathLst>
-              <a:path w="120000" h="120000" extrusionOk="0">
-                <a:moveTo>
-                  <a:pt x="0" y="0"/>
-                </a:moveTo>
-                <a:lnTo>
-                  <a:pt x="120000" y="0"/>
-                </a:lnTo>
-                <a:lnTo>
-                  <a:pt x="120000" y="120000"/>
-                </a:lnTo>
-                <a:lnTo>
-                  <a:pt x="0" y="120000"/>
-                </a:lnTo>
-                <a:close/>
-              </a:path>
-            </a:pathLst>
-          </a:custGeom>
-          <a:noFill/>
-          <a:ln w="9525" cap="flat" cmpd="sng">
-            <a:solidFill>
-              <a:srgbClr val="000000"/>
-            </a:solidFill>
-            <a:prstDash val="solid"/>
-            <a:round/>
-            <a:headEnd type="none" w="sm" len="sm"/>
-            <a:tailEnd type="none" w="sm" len="sm"/>
-          </a:ln>
-        </p:spPr>
-      </p:sp>
-    </p:spTree>
-  </p:cSld>
-  <p:clrMapOvr>
-    <a:masterClrMapping/>
-  </p:clrMapOvr>
-</p:notes>
-</file>
-
-<file path=ppt/notesSlides/notesSlide5.xml><?xml version="1.0" encoding="utf-8"?>
-<p:notes xmlns:a="http://schemas.openxmlformats.org/drawingml/2006/main" xmlns:r="http://schemas.openxmlformats.org/officeDocument/2006/relationships" xmlns:p="http://schemas.openxmlformats.org/presentationml/2006/main" showMasterSp="0" showMasterPhAnim="0">
-  <p:cSld>
-    <p:spTree>
-      <p:nvGrpSpPr>
         <p:cNvPr id="1" name="Shape 104"/>
         <p:cNvGrpSpPr/>
         <p:nvPr/>
@@ -1450,7 +1327,7 @@
 </p:notes>
 </file>
 
-<file path=ppt/notesSlides/notesSlide6.xml><?xml version="1.0" encoding="utf-8"?>
+<file path=ppt/notesSlides/notesSlide5.xml><?xml version="1.0" encoding="utf-8"?>
 <p:notes xmlns:a="http://schemas.openxmlformats.org/drawingml/2006/main" xmlns:r="http://schemas.openxmlformats.org/officeDocument/2006/relationships" xmlns:p="http://schemas.openxmlformats.org/presentationml/2006/main" showMasterSp="0" showMasterPhAnim="0">
   <p:cSld>
     <p:spTree>
@@ -1572,7 +1449,7 @@
 </p:notes>
 </file>
 
-<file path=ppt/notesSlides/notesSlide7.xml><?xml version="1.0" encoding="utf-8"?>
+<file path=ppt/notesSlides/notesSlide6.xml><?xml version="1.0" encoding="utf-8"?>
 <p:notes xmlns:a="http://schemas.openxmlformats.org/drawingml/2006/main" xmlns:r="http://schemas.openxmlformats.org/officeDocument/2006/relationships" xmlns:p="http://schemas.openxmlformats.org/presentationml/2006/main" showMasterSp="0" showMasterPhAnim="0">
   <p:cSld>
     <p:spTree>
@@ -15149,377 +15026,6 @@
       </p:grpSpPr>
       <p:sp>
         <p:nvSpPr>
-          <p:cNvPr id="6" name="テキスト ボックス 5">
-            <a:extLst>
-              <a:ext uri="{FF2B5EF4-FFF2-40B4-BE49-F238E27FC236}">
-                <a16:creationId xmlns:a16="http://schemas.microsoft.com/office/drawing/2014/main" id="{BB82D915-2957-5602-2F54-C5B0A06CED8A}"/>
-              </a:ext>
-            </a:extLst>
-          </p:cNvPr>
-          <p:cNvSpPr txBox="1"/>
-          <p:nvPr/>
-        </p:nvSpPr>
-        <p:spPr>
-          <a:xfrm>
-            <a:off x="1098006" y="1767006"/>
-            <a:ext cx="6096000" cy="5324535"/>
-          </a:xfrm>
-          <a:prstGeom prst="rect">
-            <a:avLst/>
-          </a:prstGeom>
-          <a:noFill/>
-        </p:spPr>
-        <p:txBody>
-          <a:bodyPr wrap="square">
-            <a:spAutoFit/>
-          </a:bodyPr>
-          <a:lstStyle/>
-          <a:p>
-            <a:pPr rtl="0">
-              <a:buNone/>
-            </a:pPr>
-            <a:r>
-              <a:rPr lang="ja-JP" altLang="ja-JP" sz="2400" b="0" i="0" u="none" strike="noStrike" dirty="0">
-                <a:solidFill>
-                  <a:srgbClr val="000000"/>
-                </a:solidFill>
-                <a:effectLst/>
-                <a:latin typeface="Arial" panose="020B0604020202020204" pitchFamily="34" charset="0"/>
-              </a:rPr>
-              <a:t>ページ１ トップページ  </a:t>
-            </a:r>
-            <a:endParaRPr lang="ja-JP" altLang="ja-JP" sz="2400" b="0" dirty="0">
-              <a:effectLst/>
-            </a:endParaRPr>
-          </a:p>
-          <a:p>
-            <a:pPr>
-              <a:buNone/>
-            </a:pPr>
-            <a:br>
-              <a:rPr lang="ja-JP" altLang="ja-JP" sz="2400" b="0" dirty="0">
-                <a:effectLst/>
-              </a:rPr>
-            </a:br>
-            <a:endParaRPr lang="ja-JP" altLang="ja-JP" sz="2400" b="0" dirty="0">
-              <a:effectLst/>
-            </a:endParaRPr>
-          </a:p>
-          <a:p>
-            <a:pPr rtl="0">
-              <a:buNone/>
-            </a:pPr>
-            <a:r>
-              <a:rPr lang="ja-JP" altLang="ja-JP" sz="2400" b="0" i="0" u="none" strike="noStrike" dirty="0">
-                <a:solidFill>
-                  <a:srgbClr val="000000"/>
-                </a:solidFill>
-                <a:effectLst/>
-                <a:latin typeface="Arial" panose="020B0604020202020204" pitchFamily="34" charset="0"/>
-              </a:rPr>
-              <a:t>ページ２ ペット紹介 </a:t>
-            </a:r>
-            <a:endParaRPr lang="ja-JP" altLang="ja-JP" sz="2400" b="0" dirty="0">
-              <a:effectLst/>
-            </a:endParaRPr>
-          </a:p>
-          <a:p>
-            <a:pPr>
-              <a:buNone/>
-            </a:pPr>
-            <a:br>
-              <a:rPr lang="ja-JP" altLang="ja-JP" sz="2400" b="0" dirty="0">
-                <a:effectLst/>
-              </a:rPr>
-            </a:br>
-            <a:endParaRPr lang="ja-JP" altLang="ja-JP" sz="2400" b="0" dirty="0">
-              <a:effectLst/>
-            </a:endParaRPr>
-          </a:p>
-          <a:p>
-            <a:pPr rtl="0">
-              <a:buNone/>
-            </a:pPr>
-            <a:r>
-              <a:rPr lang="ja-JP" altLang="ja-JP" sz="2400" b="0" i="0" u="none" strike="noStrike" dirty="0">
-                <a:solidFill>
-                  <a:srgbClr val="000000"/>
-                </a:solidFill>
-                <a:effectLst/>
-                <a:latin typeface="Arial" panose="020B0604020202020204" pitchFamily="34" charset="0"/>
-              </a:rPr>
-              <a:t>ページ３ 飼育方法 ① </a:t>
-            </a:r>
-            <a:endParaRPr lang="ja-JP" altLang="ja-JP" sz="2400" b="0" dirty="0">
-              <a:effectLst/>
-            </a:endParaRPr>
-          </a:p>
-          <a:p>
-            <a:pPr>
-              <a:buNone/>
-            </a:pPr>
-            <a:br>
-              <a:rPr lang="ja-JP" altLang="ja-JP" sz="2400" b="0" dirty="0">
-                <a:effectLst/>
-              </a:rPr>
-            </a:br>
-            <a:endParaRPr lang="ja-JP" altLang="ja-JP" sz="2400" b="0" dirty="0">
-              <a:effectLst/>
-            </a:endParaRPr>
-          </a:p>
-          <a:p>
-            <a:pPr rtl="0">
-              <a:buNone/>
-            </a:pPr>
-            <a:r>
-              <a:rPr lang="ja-JP" altLang="ja-JP" sz="2400" b="0" i="0" u="none" strike="noStrike" dirty="0">
-                <a:solidFill>
-                  <a:srgbClr val="000000"/>
-                </a:solidFill>
-                <a:effectLst/>
-                <a:latin typeface="Arial" panose="020B0604020202020204" pitchFamily="34" charset="0"/>
-              </a:rPr>
-              <a:t>ページ４ 飼育方法 ② </a:t>
-            </a:r>
-            <a:endParaRPr lang="ja-JP" altLang="ja-JP" sz="2400" b="0" dirty="0">
-              <a:effectLst/>
-            </a:endParaRPr>
-          </a:p>
-          <a:p>
-            <a:pPr>
-              <a:buNone/>
-            </a:pPr>
-            <a:br>
-              <a:rPr lang="ja-JP" altLang="ja-JP" sz="2400" b="0" dirty="0">
-                <a:effectLst/>
-              </a:rPr>
-            </a:br>
-            <a:endParaRPr lang="ja-JP" altLang="ja-JP" sz="2400" b="0" dirty="0">
-              <a:effectLst/>
-            </a:endParaRPr>
-          </a:p>
-          <a:p>
-            <a:pPr rtl="0">
-              <a:buNone/>
-            </a:pPr>
-            <a:r>
-              <a:rPr lang="ja-JP" altLang="ja-JP" sz="2400" b="0" i="0" u="none" strike="noStrike" dirty="0">
-                <a:solidFill>
-                  <a:srgbClr val="000000"/>
-                </a:solidFill>
-                <a:effectLst/>
-                <a:latin typeface="Arial" panose="020B0604020202020204" pitchFamily="34" charset="0"/>
-              </a:rPr>
-              <a:t>ページ５ 飼育に必要な費用 </a:t>
-            </a:r>
-            <a:endParaRPr lang="ja-JP" altLang="ja-JP" sz="2400" b="0" dirty="0">
-              <a:effectLst/>
-            </a:endParaRPr>
-          </a:p>
-          <a:p>
-            <a:pPr>
-              <a:buNone/>
-            </a:pPr>
-            <a:br>
-              <a:rPr lang="ja-JP" altLang="ja-JP" dirty="0"/>
-            </a:br>
-            <a:endParaRPr lang="ja-JP" altLang="en-US" dirty="0"/>
-          </a:p>
-        </p:txBody>
-      </p:sp>
-      <p:sp>
-        <p:nvSpPr>
-          <p:cNvPr id="8" name="テキスト ボックス 7">
-            <a:extLst>
-              <a:ext uri="{FF2B5EF4-FFF2-40B4-BE49-F238E27FC236}">
-                <a16:creationId xmlns:a16="http://schemas.microsoft.com/office/drawing/2014/main" id="{4E253DB3-34B1-3F90-B5D5-D247803785B1}"/>
-              </a:ext>
-            </a:extLst>
-          </p:cNvPr>
-          <p:cNvSpPr txBox="1"/>
-          <p:nvPr/>
-        </p:nvSpPr>
-        <p:spPr>
-          <a:xfrm>
-            <a:off x="7364548" y="594198"/>
-            <a:ext cx="6096000" cy="1323439"/>
-          </a:xfrm>
-          <a:prstGeom prst="rect">
-            <a:avLst/>
-          </a:prstGeom>
-          <a:noFill/>
-        </p:spPr>
-        <p:txBody>
-          <a:bodyPr wrap="square">
-            <a:spAutoFit/>
-          </a:bodyPr>
-          <a:lstStyle/>
-          <a:p>
-            <a:pPr rtl="0">
-              <a:buNone/>
-            </a:pPr>
-            <a:r>
-              <a:rPr lang="ja-JP" altLang="ja-JP" sz="3200" b="0" i="0" u="none" strike="noStrike" dirty="0">
-                <a:solidFill>
-                  <a:srgbClr val="000000"/>
-                </a:solidFill>
-                <a:effectLst/>
-                <a:latin typeface="Arial" panose="020B0604020202020204" pitchFamily="34" charset="0"/>
-              </a:rPr>
-              <a:t>作品・研究の概要</a:t>
-            </a:r>
-            <a:endParaRPr lang="ja-JP" altLang="ja-JP" sz="3200" b="0" dirty="0">
-              <a:effectLst/>
-            </a:endParaRPr>
-          </a:p>
-          <a:p>
-            <a:pPr>
-              <a:buNone/>
-            </a:pPr>
-            <a:br>
-              <a:rPr lang="ja-JP" altLang="ja-JP" sz="2400" dirty="0"/>
-            </a:br>
-            <a:endParaRPr lang="ja-JP" altLang="en-US" sz="2400" dirty="0"/>
-          </a:p>
-        </p:txBody>
-      </p:sp>
-      <p:sp>
-        <p:nvSpPr>
-          <p:cNvPr id="10" name="テキスト ボックス 9">
-            <a:extLst>
-              <a:ext uri="{FF2B5EF4-FFF2-40B4-BE49-F238E27FC236}">
-                <a16:creationId xmlns:a16="http://schemas.microsoft.com/office/drawing/2014/main" id="{BC1E29EA-EA35-16AA-B191-C0E1C5914917}"/>
-              </a:ext>
-            </a:extLst>
-          </p:cNvPr>
-          <p:cNvSpPr txBox="1"/>
-          <p:nvPr/>
-        </p:nvSpPr>
-        <p:spPr>
-          <a:xfrm>
-            <a:off x="7289800" y="2633340"/>
-            <a:ext cx="3544387" cy="1908215"/>
-          </a:xfrm>
-          <a:prstGeom prst="rect">
-            <a:avLst/>
-          </a:prstGeom>
-          <a:noFill/>
-        </p:spPr>
-        <p:txBody>
-          <a:bodyPr wrap="square">
-            <a:spAutoFit/>
-          </a:bodyPr>
-          <a:lstStyle/>
-          <a:p>
-            <a:pPr rtl="0">
-              <a:spcBef>
-                <a:spcPts val="1200"/>
-              </a:spcBef>
-              <a:spcAft>
-                <a:spcPts val="1200"/>
-              </a:spcAft>
-              <a:buNone/>
-            </a:pPr>
-            <a:r>
-              <a:rPr lang="ja-JP" altLang="ja-JP" sz="2000" b="0" i="0" u="none" strike="noStrike" dirty="0">
-                <a:solidFill>
-                  <a:srgbClr val="000000"/>
-                </a:solidFill>
-                <a:effectLst/>
-                <a:latin typeface="Arial" panose="020B0604020202020204" pitchFamily="34" charset="0"/>
-              </a:rPr>
-              <a:t>ペットに関するWebサイトを調査し、掲載されている情報の内容やページ構成、デザインなどを研究しました。</a:t>
-            </a:r>
-            <a:endParaRPr lang="ja-JP" altLang="ja-JP" sz="2000" b="0" dirty="0">
-              <a:effectLst/>
-            </a:endParaRPr>
-          </a:p>
-          <a:p>
-            <a:pPr>
-              <a:buNone/>
-            </a:pPr>
-            <a:br>
-              <a:rPr lang="ja-JP" altLang="ja-JP" dirty="0"/>
-            </a:br>
-            <a:endParaRPr lang="ja-JP" altLang="en-US" dirty="0"/>
-          </a:p>
-        </p:txBody>
-      </p:sp>
-      <p:sp>
-        <p:nvSpPr>
-          <p:cNvPr id="12" name="テキスト ボックス 11">
-            <a:extLst>
-              <a:ext uri="{FF2B5EF4-FFF2-40B4-BE49-F238E27FC236}">
-                <a16:creationId xmlns:a16="http://schemas.microsoft.com/office/drawing/2014/main" id="{2159FA22-C1CE-9ACC-A530-F3206D7D8047}"/>
-              </a:ext>
-            </a:extLst>
-          </p:cNvPr>
-          <p:cNvSpPr txBox="1"/>
-          <p:nvPr/>
-        </p:nvSpPr>
-        <p:spPr>
-          <a:xfrm>
-            <a:off x="-966652" y="671142"/>
-            <a:ext cx="6757850" cy="584775"/>
-          </a:xfrm>
-          <a:prstGeom prst="rect">
-            <a:avLst/>
-          </a:prstGeom>
-          <a:noFill/>
-        </p:spPr>
-        <p:txBody>
-          <a:bodyPr wrap="square">
-            <a:spAutoFit/>
-          </a:bodyPr>
-          <a:lstStyle/>
-          <a:p>
-            <a:pPr algn="ctr"/>
-            <a:r>
-              <a:rPr lang="ja-JP" altLang="ja-JP" sz="3200" b="1" i="0" u="none" strike="noStrike" dirty="0">
-                <a:solidFill>
-                  <a:srgbClr val="000000"/>
-                </a:solidFill>
-                <a:effectLst/>
-                <a:latin typeface="Arial" panose="020B0604020202020204" pitchFamily="34" charset="0"/>
-              </a:rPr>
-              <a:t>内容</a:t>
-            </a:r>
-            <a:endParaRPr lang="ja-JP" altLang="en-US" sz="3200" dirty="0"/>
-          </a:p>
-        </p:txBody>
-      </p:sp>
-    </p:spTree>
-    <p:extLst>
-      <p:ext uri="{BB962C8B-B14F-4D97-AF65-F5344CB8AC3E}">
-        <p14:creationId xmlns:p14="http://schemas.microsoft.com/office/powerpoint/2010/main" val="1761350442"/>
-      </p:ext>
-    </p:extLst>
-  </p:cSld>
-  <p:clrMapOvr>
-    <a:masterClrMapping/>
-  </p:clrMapOvr>
-</p:sld>
-</file>
-
-<file path=ppt/slides/slide11.xml><?xml version="1.0" encoding="utf-8"?>
-<p:sld xmlns:a="http://schemas.openxmlformats.org/drawingml/2006/main" xmlns:r="http://schemas.openxmlformats.org/officeDocument/2006/relationships" xmlns:p="http://schemas.openxmlformats.org/presentationml/2006/main">
-  <p:cSld>
-    <p:spTree>
-      <p:nvGrpSpPr>
-        <p:cNvPr id="1" name=""/>
-        <p:cNvGrpSpPr/>
-        <p:nvPr/>
-      </p:nvGrpSpPr>
-      <p:grpSpPr>
-        <a:xfrm>
-          <a:off x="0" y="0"/>
-          <a:ext cx="0" cy="0"/>
-          <a:chOff x="0" y="0"/>
-          <a:chExt cx="0" cy="0"/>
-        </a:xfrm>
-      </p:grpSpPr>
-      <p:sp>
-        <p:nvSpPr>
           <p:cNvPr id="5" name="正方形/長方形 4">
             <a:extLst>
               <a:ext uri="{FF2B5EF4-FFF2-40B4-BE49-F238E27FC236}">
@@ -16135,7 +15641,7 @@
 </p:sld>
 </file>
 
-<file path=ppt/slides/slide12.xml><?xml version="1.0" encoding="utf-8"?>
+<file path=ppt/slides/slide11.xml><?xml version="1.0" encoding="utf-8"?>
 <p:sld xmlns:a="http://schemas.openxmlformats.org/drawingml/2006/main" xmlns:r="http://schemas.openxmlformats.org/officeDocument/2006/relationships" xmlns:p="http://schemas.openxmlformats.org/presentationml/2006/main">
   <p:cSld>
     <p:spTree>
@@ -16253,7 +15759,7 @@
 </p:sld>
 </file>
 
-<file path=ppt/slides/slide13.xml><?xml version="1.0" encoding="utf-8"?>
+<file path=ppt/slides/slide12.xml><?xml version="1.0" encoding="utf-8"?>
 <p:sld xmlns:a="http://schemas.openxmlformats.org/drawingml/2006/main" xmlns:r="http://schemas.openxmlformats.org/officeDocument/2006/relationships" xmlns:p="http://schemas.openxmlformats.org/presentationml/2006/main">
   <p:cSld>
     <p:spTree>
@@ -16866,7 +16372,7 @@
               <a:buNone/>
             </a:pPr>
             <a:r>
-              <a:rPr lang="ja-JP" altLang="ja-JP" sz="1400" b="0" i="0" u="none" strike="noStrike">
+              <a:rPr lang="ja-JP" altLang="ja-JP" sz="1400" b="0" i="0" u="none" strike="noStrike" dirty="0">
                 <a:solidFill>
                   <a:srgbClr val="000000"/>
                 </a:solidFill>
@@ -16875,52 +16381,35 @@
               </a:rPr>
               <a:t>20～40代の国内観光客</a:t>
             </a:r>
-            <a:endParaRPr lang="ja-JP" altLang="ja-JP" b="0">
+            <a:endParaRPr lang="ja-JP" altLang="ja-JP" b="0" dirty="0">
               <a:effectLst/>
             </a:endParaRPr>
           </a:p>
           <a:p>
-            <a:pPr algn="ctr" rtl="0">
-              <a:buNone/>
-            </a:pPr>
+            <a:pPr algn="ctr"/>
             <a:r>
-              <a:rPr lang="ja-JP" altLang="ja-JP" sz="1400" b="0" i="0" u="none" strike="noStrike">
-                <a:solidFill>
-                  <a:srgbClr val="000000"/>
-                </a:solidFill>
-                <a:effectLst/>
-                <a:latin typeface="Arial" panose="020B0604020202020204" pitchFamily="34" charset="0"/>
-              </a:rPr>
-              <a:t>九州旅行を計画している人</a:t>
+              <a:rPr lang="ja-JP" altLang="ja-JP" dirty="0"/>
+              <a:t>日田市を初めて訪れる人</a:t>
             </a:r>
-            <a:endParaRPr lang="ja-JP" altLang="ja-JP" b="0">
-              <a:effectLst/>
-            </a:endParaRPr>
+            <a:r>
+              <a:rPr lang="en-US" altLang="ja-JP" dirty="0"/>
+              <a:t> </a:t>
+            </a:r>
+            <a:endParaRPr lang="ja-JP" altLang="ja-JP" dirty="0"/>
           </a:p>
           <a:p>
-            <a:pPr algn="ctr" rtl="0">
-              <a:buNone/>
-            </a:pPr>
+            <a:pPr algn="ctr"/>
             <a:r>
-              <a:rPr lang="ja-JP" altLang="ja-JP" sz="1400" b="0" i="0" u="none" strike="noStrike">
-                <a:solidFill>
-                  <a:srgbClr val="000000"/>
-                </a:solidFill>
-                <a:effectLst/>
-                <a:latin typeface="Arial" panose="020B0604020202020204" pitchFamily="34" charset="0"/>
-              </a:rPr>
-              <a:t>日田市を初めて訪れる人</a:t>
+              <a:rPr lang="ja-JP" altLang="ja-JP" dirty="0"/>
+              <a:t>進撃の巨人が好きな人</a:t>
             </a:r>
-            <a:endParaRPr lang="ja-JP" altLang="ja-JP" b="0">
-              <a:effectLst/>
-            </a:endParaRPr>
           </a:p>
           <a:p>
             <a:pPr>
               <a:buNone/>
             </a:pPr>
             <a:br>
-              <a:rPr lang="ja-JP" altLang="ja-JP"/>
+              <a:rPr lang="ja-JP" altLang="ja-JP" dirty="0"/>
             </a:br>
             <a:endParaRPr lang="ja-JP" altLang="en-US" dirty="0"/>
           </a:p>
@@ -17001,201 +16490,6 @@
 </file>
 
 <file path=ppt/slides/slide4.xml><?xml version="1.0" encoding="utf-8"?>
-<p:sld xmlns:a="http://schemas.openxmlformats.org/drawingml/2006/main" xmlns:r="http://schemas.openxmlformats.org/officeDocument/2006/relationships" xmlns:p="http://schemas.openxmlformats.org/presentationml/2006/main">
-  <p:cSld>
-    <p:spTree>
-      <p:nvGrpSpPr>
-        <p:cNvPr id="1" name="Shape 101"/>
-        <p:cNvGrpSpPr/>
-        <p:nvPr/>
-      </p:nvGrpSpPr>
-      <p:grpSpPr>
-        <a:xfrm>
-          <a:off x="0" y="0"/>
-          <a:ext cx="0" cy="0"/>
-          <a:chOff x="0" y="0"/>
-          <a:chExt cx="0" cy="0"/>
-        </a:xfrm>
-      </p:grpSpPr>
-      <p:sp>
-        <p:nvSpPr>
-          <p:cNvPr id="102" name="Google Shape;102;p3"/>
-          <p:cNvSpPr txBox="1">
-            <a:spLocks noGrp="1"/>
-          </p:cNvSpPr>
-          <p:nvPr>
-            <p:ph type="title"/>
-          </p:nvPr>
-        </p:nvSpPr>
-        <p:spPr>
-          <a:xfrm>
-            <a:off x="838200" y="365125"/>
-            <a:ext cx="10515600" cy="1325563"/>
-          </a:xfrm>
-          <a:prstGeom prst="rect">
-            <a:avLst/>
-          </a:prstGeom>
-          <a:noFill/>
-          <a:ln>
-            <a:noFill/>
-          </a:ln>
-        </p:spPr>
-        <p:txBody>
-          <a:bodyPr spcFirstLastPara="1" wrap="square" lIns="91425" tIns="45700" rIns="91425" bIns="45700" anchor="ctr" anchorCtr="0">
-            <a:normAutofit/>
-          </a:bodyPr>
-          <a:lstStyle/>
-          <a:p>
-            <a:pPr marL="0" lvl="0" indent="0" algn="l" rtl="0">
-              <a:lnSpc>
-                <a:spcPct val="90000"/>
-              </a:lnSpc>
-              <a:spcBef>
-                <a:spcPts val="0"/>
-              </a:spcBef>
-              <a:spcAft>
-                <a:spcPts val="0"/>
-              </a:spcAft>
-              <a:buClr>
-                <a:schemeClr val="dk1"/>
-              </a:buClr>
-              <a:buSzPts val="4400"/>
-              <a:buFont typeface="Arial"/>
-              <a:buNone/>
-            </a:pPr>
-            <a:r>
-              <a:rPr lang="ja-JP" dirty="0"/>
-              <a:t>目的・背景</a:t>
-            </a:r>
-            <a:endParaRPr dirty="0"/>
-          </a:p>
-        </p:txBody>
-      </p:sp>
-      <p:sp>
-        <p:nvSpPr>
-          <p:cNvPr id="103" name="Google Shape;103;p3"/>
-          <p:cNvSpPr txBox="1">
-            <a:spLocks noGrp="1"/>
-          </p:cNvSpPr>
-          <p:nvPr>
-            <p:ph type="body" idx="1"/>
-          </p:nvPr>
-        </p:nvSpPr>
-        <p:spPr>
-          <a:xfrm>
-            <a:off x="838200" y="1825625"/>
-            <a:ext cx="10515600" cy="4351338"/>
-          </a:xfrm>
-          <a:prstGeom prst="rect">
-            <a:avLst/>
-          </a:prstGeom>
-          <a:noFill/>
-          <a:ln>
-            <a:noFill/>
-          </a:ln>
-        </p:spPr>
-        <p:txBody>
-          <a:bodyPr spcFirstLastPara="1" wrap="square" lIns="91425" tIns="45700" rIns="91425" bIns="45700" anchor="t" anchorCtr="0">
-            <a:normAutofit/>
-          </a:bodyPr>
-          <a:lstStyle/>
-          <a:p>
-            <a:pPr marL="228600" indent="-50800">
-              <a:spcBef>
-                <a:spcPts val="0"/>
-              </a:spcBef>
-              <a:buSzPts val="2800"/>
-              <a:buNone/>
-            </a:pPr>
-            <a:r>
-              <a:rPr lang="ja-JP" altLang="ja-JP" dirty="0"/>
-              <a:t>日田市の歴史や文化、グルメなど多くの人に知ってもらい観光や地域への関心を高める</a:t>
-            </a:r>
-            <a:endParaRPr lang="en-US" altLang="ja-JP" dirty="0"/>
-          </a:p>
-          <a:p>
-            <a:pPr marL="228600" indent="-50800">
-              <a:spcBef>
-                <a:spcPts val="0"/>
-              </a:spcBef>
-              <a:buSzPts val="2800"/>
-              <a:buNone/>
-            </a:pPr>
-            <a:endParaRPr lang="en-US" altLang="ja-JP" dirty="0"/>
-          </a:p>
-          <a:p>
-            <a:pPr marL="228600" indent="-50800">
-              <a:spcBef>
-                <a:spcPts val="0"/>
-              </a:spcBef>
-              <a:buSzPts val="2800"/>
-              <a:buNone/>
-            </a:pPr>
-            <a:endParaRPr lang="en-US" altLang="ja-JP" dirty="0"/>
-          </a:p>
-          <a:p>
-            <a:pPr marL="228600" indent="-50800">
-              <a:spcBef>
-                <a:spcPts val="0"/>
-              </a:spcBef>
-              <a:buSzPts val="2800"/>
-              <a:buNone/>
-            </a:pPr>
-            <a:endParaRPr lang="en-US" altLang="ja-JP" dirty="0"/>
-          </a:p>
-          <a:p>
-            <a:pPr marL="228600" indent="-50800">
-              <a:spcBef>
-                <a:spcPts val="0"/>
-              </a:spcBef>
-              <a:buSzPts val="2800"/>
-              <a:buNone/>
-            </a:pPr>
-            <a:endParaRPr lang="en-US" altLang="ja-JP" dirty="0"/>
-          </a:p>
-          <a:p>
-            <a:pPr marL="228600" indent="-50800">
-              <a:spcBef>
-                <a:spcPts val="0"/>
-              </a:spcBef>
-              <a:buSzPts val="2800"/>
-              <a:buNone/>
-            </a:pPr>
-            <a:r>
-              <a:rPr lang="ja-JP" altLang="ja-JP" dirty="0"/>
-              <a:t>歴史文化だけでなく、食や産業観光、アニメ・漫画をきっかけとした観光など、新たな魅力の発信にも取り組んでいる</a:t>
-            </a:r>
-          </a:p>
-          <a:p>
-            <a:pPr marL="228600" lvl="0" indent="-50800" algn="l" rtl="0">
-              <a:lnSpc>
-                <a:spcPct val="90000"/>
-              </a:lnSpc>
-              <a:spcBef>
-                <a:spcPts val="0"/>
-              </a:spcBef>
-              <a:spcAft>
-                <a:spcPts val="0"/>
-              </a:spcAft>
-              <a:buClr>
-                <a:schemeClr val="dk1"/>
-              </a:buClr>
-              <a:buSzPts val="2800"/>
-              <a:buNone/>
-            </a:pPr>
-            <a:endParaRPr dirty="0"/>
-          </a:p>
-        </p:txBody>
-      </p:sp>
-    </p:spTree>
-  </p:cSld>
-  <p:clrMapOvr>
-    <a:masterClrMapping/>
-  </p:clrMapOvr>
-</p:sld>
-</file>
-
-<file path=ppt/slides/slide5.xml><?xml version="1.0" encoding="utf-8"?>
 <p:sld xmlns:a="http://schemas.openxmlformats.org/drawingml/2006/main" xmlns:r="http://schemas.openxmlformats.org/officeDocument/2006/relationships" xmlns:p="http://schemas.openxmlformats.org/presentationml/2006/main">
   <p:cSld>
     <p:spTree>
@@ -17279,7 +16573,7 @@
         <p:spPr>
           <a:xfrm>
             <a:off x="0" y="2082605"/>
-            <a:ext cx="6096000" cy="4216539"/>
+            <a:ext cx="6096000" cy="4985980"/>
           </a:xfrm>
           <a:prstGeom prst="rect">
             <a:avLst/>
@@ -17305,14 +16599,20 @@
               </a:rPr>
               <a:t>ページ１日田市について </a:t>
             </a:r>
-            <a:endParaRPr lang="ja-JP" altLang="ja-JP" sz="2000" b="0" dirty="0">
+            <a:endParaRPr lang="en-US" altLang="ja-JP" sz="2000" b="0" i="0" u="none" strike="noStrike" dirty="0">
+              <a:solidFill>
+                <a:srgbClr val="000000"/>
+              </a:solidFill>
               <a:effectLst/>
+              <a:latin typeface="Arial" panose="020B0604020202020204" pitchFamily="34" charset="0"/>
             </a:endParaRPr>
           </a:p>
           <a:p>
-            <a:pPr>
-              <a:buNone/>
-            </a:pPr>
+            <a:pPr algn="ctr"/>
+            <a:r>
+              <a:rPr lang="ja-JP" altLang="ja-JP" dirty="0"/>
+              <a:t>日田市の概要、歴史、自然、アクセス、サイトの紹介</a:t>
+            </a:r>
             <a:br>
               <a:rPr lang="ja-JP" altLang="ja-JP" sz="2000" b="0" dirty="0">
                 <a:effectLst/>
@@ -17341,14 +16641,20 @@
             </a:endParaRPr>
           </a:p>
           <a:p>
+            <a:r>
+              <a:rPr lang="ja-JP" altLang="ja-JP" dirty="0"/>
+              <a:t>豆田町、日田駅、進撃の巨人ミュージアムなどの見どころを写真付きで紹介</a:t>
+            </a:r>
+            <a:r>
+              <a:rPr lang="en-US" altLang="ja-JP" dirty="0"/>
+              <a:t> </a:t>
+            </a:r>
+            <a:endParaRPr lang="ja-JP" altLang="ja-JP" dirty="0"/>
+          </a:p>
+          <a:p>
             <a:pPr>
               <a:buNone/>
             </a:pPr>
-            <a:br>
-              <a:rPr lang="ja-JP" altLang="ja-JP" sz="2000" b="0" dirty="0">
-                <a:effectLst/>
-              </a:rPr>
-            </a:br>
             <a:endParaRPr lang="ja-JP" altLang="ja-JP" sz="2000" b="0" dirty="0">
               <a:effectLst/>
             </a:endParaRPr>
@@ -17372,9 +16678,7 @@
             </a:endParaRPr>
           </a:p>
           <a:p>
-            <a:pPr algn="ctr" rtl="0">
-              <a:buNone/>
-            </a:pPr>
+            <a:pPr algn="ctr"/>
             <a:r>
               <a:rPr lang="ja-JP" altLang="ja-JP" sz="2000" b="0" i="0" u="none" strike="noStrike" dirty="0">
                 <a:solidFill>
@@ -17385,6 +16689,20 @@
               </a:rPr>
               <a:t> </a:t>
             </a:r>
+            <a:r>
+              <a:rPr lang="ja-JP" altLang="ja-JP" dirty="0"/>
+              <a:t>おいしいグルメ・カフェの紹介　日田焼きそば、人気カフェなどを紹介</a:t>
+            </a:r>
+            <a:r>
+              <a:rPr lang="en-US" altLang="ja-JP" dirty="0"/>
+              <a:t>  </a:t>
+            </a:r>
+            <a:endParaRPr lang="ja-JP" altLang="ja-JP" dirty="0"/>
+          </a:p>
+          <a:p>
+            <a:pPr algn="ctr" rtl="0">
+              <a:buNone/>
+            </a:pPr>
             <a:endParaRPr lang="ja-JP" altLang="ja-JP" sz="2000" b="0" dirty="0">
               <a:effectLst/>
             </a:endParaRPr>
@@ -17408,14 +16726,20 @@
             </a:endParaRPr>
           </a:p>
           <a:p>
+            <a:r>
+              <a:rPr lang="ja-JP" altLang="ja-JP" dirty="0"/>
+              <a:t>イベントの概要、開催時期、見どころ、会場へのアクセスや過去の様子を紹介</a:t>
+            </a:r>
+            <a:r>
+              <a:rPr lang="en-US" altLang="ja-JP" dirty="0"/>
+              <a:t> </a:t>
+            </a:r>
+            <a:endParaRPr lang="ja-JP" altLang="ja-JP" dirty="0"/>
+          </a:p>
+          <a:p>
             <a:pPr>
               <a:buNone/>
             </a:pPr>
-            <a:br>
-              <a:rPr lang="ja-JP" altLang="ja-JP" sz="2000" b="0" dirty="0">
-                <a:effectLst/>
-              </a:rPr>
-            </a:br>
             <a:endParaRPr lang="ja-JP" altLang="ja-JP" sz="2000" b="0" dirty="0">
               <a:effectLst/>
             </a:endParaRPr>
@@ -17433,6 +16757,20 @@
                 <a:latin typeface="Arial" panose="020B0604020202020204" pitchFamily="34" charset="0"/>
               </a:rPr>
               <a:t>ページ５ おすすめのお土産</a:t>
+            </a:r>
+            <a:endParaRPr lang="en-US" altLang="ja-JP" sz="2000" b="0" i="0" u="none" strike="noStrike" dirty="0">
+              <a:solidFill>
+                <a:srgbClr val="000000"/>
+              </a:solidFill>
+              <a:effectLst/>
+              <a:latin typeface="Arial" panose="020B0604020202020204" pitchFamily="34" charset="0"/>
+            </a:endParaRPr>
+          </a:p>
+          <a:p>
+            <a:pPr algn="ctr"/>
+            <a:r>
+              <a:rPr lang="ja-JP" altLang="ja-JP" dirty="0"/>
+              <a:t>日田杉を使った工芸品、お菓子、特産品などを紹介</a:t>
             </a:r>
             <a:endParaRPr lang="ja-JP" altLang="ja-JP" sz="2000" b="0" dirty="0">
               <a:effectLst/>
@@ -17587,7 +16925,7 @@
 </p:sld>
 </file>
 
-<file path=ppt/slides/slide6.xml><?xml version="1.0" encoding="utf-8"?>
+<file path=ppt/slides/slide5.xml><?xml version="1.0" encoding="utf-8"?>
 <p:sld xmlns:a="http://schemas.openxmlformats.org/drawingml/2006/main" xmlns:r="http://schemas.openxmlformats.org/officeDocument/2006/relationships" xmlns:p="http://schemas.openxmlformats.org/presentationml/2006/main">
   <p:cSld>
     <p:spTree>
@@ -18149,7 +17487,7 @@
 </p:sld>
 </file>
 
-<file path=ppt/slides/slide7.xml><?xml version="1.0" encoding="utf-8"?>
+<file path=ppt/slides/slide6.xml><?xml version="1.0" encoding="utf-8"?>
 <p:sld xmlns:a="http://schemas.openxmlformats.org/drawingml/2006/main" xmlns:r="http://schemas.openxmlformats.org/officeDocument/2006/relationships" xmlns:p="http://schemas.openxmlformats.org/presentationml/2006/main">
   <p:cSld>
     <p:spTree>
@@ -18686,7 +18024,7 @@
 </p:sld>
 </file>
 
-<file path=ppt/slides/slide8.xml><?xml version="1.0" encoding="utf-8"?>
+<file path=ppt/slides/slide7.xml><?xml version="1.0" encoding="utf-8"?>
 <p:sld xmlns:a="http://schemas.openxmlformats.org/drawingml/2006/main" xmlns:r="http://schemas.openxmlformats.org/officeDocument/2006/relationships" xmlns:p="http://schemas.openxmlformats.org/presentationml/2006/main">
   <p:cSld>
     <p:spTree>
@@ -18890,7 +18228,7 @@
 </p:sld>
 </file>
 
-<file path=ppt/slides/slide9.xml><?xml version="1.0" encoding="utf-8"?>
+<file path=ppt/slides/slide8.xml><?xml version="1.0" encoding="utf-8"?>
 <p:sld xmlns:a="http://schemas.openxmlformats.org/drawingml/2006/main" xmlns:r="http://schemas.openxmlformats.org/officeDocument/2006/relationships" xmlns:p="http://schemas.openxmlformats.org/presentationml/2006/main">
   <p:cSld>
     <p:spTree>
@@ -19162,6 +18500,377 @@
     <p:extLst>
       <p:ext uri="{BB962C8B-B14F-4D97-AF65-F5344CB8AC3E}">
         <p14:creationId xmlns:p14="http://schemas.microsoft.com/office/powerpoint/2010/main" val="967898701"/>
+      </p:ext>
+    </p:extLst>
+  </p:cSld>
+  <p:clrMapOvr>
+    <a:masterClrMapping/>
+  </p:clrMapOvr>
+</p:sld>
+</file>
+
+<file path=ppt/slides/slide9.xml><?xml version="1.0" encoding="utf-8"?>
+<p:sld xmlns:a="http://schemas.openxmlformats.org/drawingml/2006/main" xmlns:r="http://schemas.openxmlformats.org/officeDocument/2006/relationships" xmlns:p="http://schemas.openxmlformats.org/presentationml/2006/main">
+  <p:cSld>
+    <p:spTree>
+      <p:nvGrpSpPr>
+        <p:cNvPr id="1" name=""/>
+        <p:cNvGrpSpPr/>
+        <p:nvPr/>
+      </p:nvGrpSpPr>
+      <p:grpSpPr>
+        <a:xfrm>
+          <a:off x="0" y="0"/>
+          <a:ext cx="0" cy="0"/>
+          <a:chOff x="0" y="0"/>
+          <a:chExt cx="0" cy="0"/>
+        </a:xfrm>
+      </p:grpSpPr>
+      <p:sp>
+        <p:nvSpPr>
+          <p:cNvPr id="6" name="テキスト ボックス 5">
+            <a:extLst>
+              <a:ext uri="{FF2B5EF4-FFF2-40B4-BE49-F238E27FC236}">
+                <a16:creationId xmlns:a16="http://schemas.microsoft.com/office/drawing/2014/main" id="{BB82D915-2957-5602-2F54-C5B0A06CED8A}"/>
+              </a:ext>
+            </a:extLst>
+          </p:cNvPr>
+          <p:cNvSpPr txBox="1"/>
+          <p:nvPr/>
+        </p:nvSpPr>
+        <p:spPr>
+          <a:xfrm>
+            <a:off x="1098006" y="1767006"/>
+            <a:ext cx="6096000" cy="5324535"/>
+          </a:xfrm>
+          <a:prstGeom prst="rect">
+            <a:avLst/>
+          </a:prstGeom>
+          <a:noFill/>
+        </p:spPr>
+        <p:txBody>
+          <a:bodyPr wrap="square">
+            <a:spAutoFit/>
+          </a:bodyPr>
+          <a:lstStyle/>
+          <a:p>
+            <a:pPr rtl="0">
+              <a:buNone/>
+            </a:pPr>
+            <a:r>
+              <a:rPr lang="ja-JP" altLang="ja-JP" sz="2400" b="0" i="0" u="none" strike="noStrike" dirty="0">
+                <a:solidFill>
+                  <a:srgbClr val="000000"/>
+                </a:solidFill>
+                <a:effectLst/>
+                <a:latin typeface="Arial" panose="020B0604020202020204" pitchFamily="34" charset="0"/>
+              </a:rPr>
+              <a:t>ページ１ トップページ  </a:t>
+            </a:r>
+            <a:endParaRPr lang="ja-JP" altLang="ja-JP" sz="2400" b="0" dirty="0">
+              <a:effectLst/>
+            </a:endParaRPr>
+          </a:p>
+          <a:p>
+            <a:pPr>
+              <a:buNone/>
+            </a:pPr>
+            <a:br>
+              <a:rPr lang="ja-JP" altLang="ja-JP" sz="2400" b="0" dirty="0">
+                <a:effectLst/>
+              </a:rPr>
+            </a:br>
+            <a:endParaRPr lang="ja-JP" altLang="ja-JP" sz="2400" b="0" dirty="0">
+              <a:effectLst/>
+            </a:endParaRPr>
+          </a:p>
+          <a:p>
+            <a:pPr rtl="0">
+              <a:buNone/>
+            </a:pPr>
+            <a:r>
+              <a:rPr lang="ja-JP" altLang="ja-JP" sz="2400" b="0" i="0" u="none" strike="noStrike" dirty="0">
+                <a:solidFill>
+                  <a:srgbClr val="000000"/>
+                </a:solidFill>
+                <a:effectLst/>
+                <a:latin typeface="Arial" panose="020B0604020202020204" pitchFamily="34" charset="0"/>
+              </a:rPr>
+              <a:t>ページ２ ペット紹介 </a:t>
+            </a:r>
+            <a:endParaRPr lang="ja-JP" altLang="ja-JP" sz="2400" b="0" dirty="0">
+              <a:effectLst/>
+            </a:endParaRPr>
+          </a:p>
+          <a:p>
+            <a:pPr>
+              <a:buNone/>
+            </a:pPr>
+            <a:br>
+              <a:rPr lang="ja-JP" altLang="ja-JP" sz="2400" b="0" dirty="0">
+                <a:effectLst/>
+              </a:rPr>
+            </a:br>
+            <a:endParaRPr lang="ja-JP" altLang="ja-JP" sz="2400" b="0" dirty="0">
+              <a:effectLst/>
+            </a:endParaRPr>
+          </a:p>
+          <a:p>
+            <a:pPr rtl="0">
+              <a:buNone/>
+            </a:pPr>
+            <a:r>
+              <a:rPr lang="ja-JP" altLang="ja-JP" sz="2400" b="0" i="0" u="none" strike="noStrike" dirty="0">
+                <a:solidFill>
+                  <a:srgbClr val="000000"/>
+                </a:solidFill>
+                <a:effectLst/>
+                <a:latin typeface="Arial" panose="020B0604020202020204" pitchFamily="34" charset="0"/>
+              </a:rPr>
+              <a:t>ページ３ 飼育方法 ① </a:t>
+            </a:r>
+            <a:endParaRPr lang="ja-JP" altLang="ja-JP" sz="2400" b="0" dirty="0">
+              <a:effectLst/>
+            </a:endParaRPr>
+          </a:p>
+          <a:p>
+            <a:pPr>
+              <a:buNone/>
+            </a:pPr>
+            <a:br>
+              <a:rPr lang="ja-JP" altLang="ja-JP" sz="2400" b="0" dirty="0">
+                <a:effectLst/>
+              </a:rPr>
+            </a:br>
+            <a:endParaRPr lang="ja-JP" altLang="ja-JP" sz="2400" b="0" dirty="0">
+              <a:effectLst/>
+            </a:endParaRPr>
+          </a:p>
+          <a:p>
+            <a:pPr rtl="0">
+              <a:buNone/>
+            </a:pPr>
+            <a:r>
+              <a:rPr lang="ja-JP" altLang="ja-JP" sz="2400" b="0" i="0" u="none" strike="noStrike" dirty="0">
+                <a:solidFill>
+                  <a:srgbClr val="000000"/>
+                </a:solidFill>
+                <a:effectLst/>
+                <a:latin typeface="Arial" panose="020B0604020202020204" pitchFamily="34" charset="0"/>
+              </a:rPr>
+              <a:t>ページ４ 飼育方法 ② </a:t>
+            </a:r>
+            <a:endParaRPr lang="ja-JP" altLang="ja-JP" sz="2400" b="0" dirty="0">
+              <a:effectLst/>
+            </a:endParaRPr>
+          </a:p>
+          <a:p>
+            <a:pPr>
+              <a:buNone/>
+            </a:pPr>
+            <a:br>
+              <a:rPr lang="ja-JP" altLang="ja-JP" sz="2400" b="0" dirty="0">
+                <a:effectLst/>
+              </a:rPr>
+            </a:br>
+            <a:endParaRPr lang="ja-JP" altLang="ja-JP" sz="2400" b="0" dirty="0">
+              <a:effectLst/>
+            </a:endParaRPr>
+          </a:p>
+          <a:p>
+            <a:pPr rtl="0">
+              <a:buNone/>
+            </a:pPr>
+            <a:r>
+              <a:rPr lang="ja-JP" altLang="ja-JP" sz="2400" b="0" i="0" u="none" strike="noStrike" dirty="0">
+                <a:solidFill>
+                  <a:srgbClr val="000000"/>
+                </a:solidFill>
+                <a:effectLst/>
+                <a:latin typeface="Arial" panose="020B0604020202020204" pitchFamily="34" charset="0"/>
+              </a:rPr>
+              <a:t>ページ５ 飼育に必要な費用 </a:t>
+            </a:r>
+            <a:endParaRPr lang="ja-JP" altLang="ja-JP" sz="2400" b="0" dirty="0">
+              <a:effectLst/>
+            </a:endParaRPr>
+          </a:p>
+          <a:p>
+            <a:pPr>
+              <a:buNone/>
+            </a:pPr>
+            <a:br>
+              <a:rPr lang="ja-JP" altLang="ja-JP" dirty="0"/>
+            </a:br>
+            <a:endParaRPr lang="ja-JP" altLang="en-US" dirty="0"/>
+          </a:p>
+        </p:txBody>
+      </p:sp>
+      <p:sp>
+        <p:nvSpPr>
+          <p:cNvPr id="8" name="テキスト ボックス 7">
+            <a:extLst>
+              <a:ext uri="{FF2B5EF4-FFF2-40B4-BE49-F238E27FC236}">
+                <a16:creationId xmlns:a16="http://schemas.microsoft.com/office/drawing/2014/main" id="{4E253DB3-34B1-3F90-B5D5-D247803785B1}"/>
+              </a:ext>
+            </a:extLst>
+          </p:cNvPr>
+          <p:cNvSpPr txBox="1"/>
+          <p:nvPr/>
+        </p:nvSpPr>
+        <p:spPr>
+          <a:xfrm>
+            <a:off x="7364548" y="594198"/>
+            <a:ext cx="6096000" cy="1323439"/>
+          </a:xfrm>
+          <a:prstGeom prst="rect">
+            <a:avLst/>
+          </a:prstGeom>
+          <a:noFill/>
+        </p:spPr>
+        <p:txBody>
+          <a:bodyPr wrap="square">
+            <a:spAutoFit/>
+          </a:bodyPr>
+          <a:lstStyle/>
+          <a:p>
+            <a:pPr rtl="0">
+              <a:buNone/>
+            </a:pPr>
+            <a:r>
+              <a:rPr lang="ja-JP" altLang="ja-JP" sz="3200" b="0" i="0" u="none" strike="noStrike" dirty="0">
+                <a:solidFill>
+                  <a:srgbClr val="000000"/>
+                </a:solidFill>
+                <a:effectLst/>
+                <a:latin typeface="Arial" panose="020B0604020202020204" pitchFamily="34" charset="0"/>
+              </a:rPr>
+              <a:t>作品・研究の概要</a:t>
+            </a:r>
+            <a:endParaRPr lang="ja-JP" altLang="ja-JP" sz="3200" b="0" dirty="0">
+              <a:effectLst/>
+            </a:endParaRPr>
+          </a:p>
+          <a:p>
+            <a:pPr>
+              <a:buNone/>
+            </a:pPr>
+            <a:br>
+              <a:rPr lang="ja-JP" altLang="ja-JP" sz="2400" dirty="0"/>
+            </a:br>
+            <a:endParaRPr lang="ja-JP" altLang="en-US" sz="2400" dirty="0"/>
+          </a:p>
+        </p:txBody>
+      </p:sp>
+      <p:sp>
+        <p:nvSpPr>
+          <p:cNvPr id="10" name="テキスト ボックス 9">
+            <a:extLst>
+              <a:ext uri="{FF2B5EF4-FFF2-40B4-BE49-F238E27FC236}">
+                <a16:creationId xmlns:a16="http://schemas.microsoft.com/office/drawing/2014/main" id="{BC1E29EA-EA35-16AA-B191-C0E1C5914917}"/>
+              </a:ext>
+            </a:extLst>
+          </p:cNvPr>
+          <p:cNvSpPr txBox="1"/>
+          <p:nvPr/>
+        </p:nvSpPr>
+        <p:spPr>
+          <a:xfrm>
+            <a:off x="7289800" y="2633340"/>
+            <a:ext cx="3544387" cy="1908215"/>
+          </a:xfrm>
+          <a:prstGeom prst="rect">
+            <a:avLst/>
+          </a:prstGeom>
+          <a:noFill/>
+        </p:spPr>
+        <p:txBody>
+          <a:bodyPr wrap="square">
+            <a:spAutoFit/>
+          </a:bodyPr>
+          <a:lstStyle/>
+          <a:p>
+            <a:pPr rtl="0">
+              <a:spcBef>
+                <a:spcPts val="1200"/>
+              </a:spcBef>
+              <a:spcAft>
+                <a:spcPts val="1200"/>
+              </a:spcAft>
+              <a:buNone/>
+            </a:pPr>
+            <a:r>
+              <a:rPr lang="ja-JP" altLang="ja-JP" sz="2000" b="0" i="0" u="none" strike="noStrike" dirty="0">
+                <a:solidFill>
+                  <a:srgbClr val="000000"/>
+                </a:solidFill>
+                <a:effectLst/>
+                <a:latin typeface="Arial" panose="020B0604020202020204" pitchFamily="34" charset="0"/>
+              </a:rPr>
+              <a:t>ペットに関するWebサイトを調査し、掲載されている情報の内容やページ構成、デザインなどを研究しました。</a:t>
+            </a:r>
+            <a:endParaRPr lang="ja-JP" altLang="ja-JP" sz="2000" b="0" dirty="0">
+              <a:effectLst/>
+            </a:endParaRPr>
+          </a:p>
+          <a:p>
+            <a:pPr>
+              <a:buNone/>
+            </a:pPr>
+            <a:br>
+              <a:rPr lang="ja-JP" altLang="ja-JP" dirty="0"/>
+            </a:br>
+            <a:endParaRPr lang="ja-JP" altLang="en-US" dirty="0"/>
+          </a:p>
+        </p:txBody>
+      </p:sp>
+      <p:sp>
+        <p:nvSpPr>
+          <p:cNvPr id="12" name="テキスト ボックス 11">
+            <a:extLst>
+              <a:ext uri="{FF2B5EF4-FFF2-40B4-BE49-F238E27FC236}">
+                <a16:creationId xmlns:a16="http://schemas.microsoft.com/office/drawing/2014/main" id="{2159FA22-C1CE-9ACC-A530-F3206D7D8047}"/>
+              </a:ext>
+            </a:extLst>
+          </p:cNvPr>
+          <p:cNvSpPr txBox="1"/>
+          <p:nvPr/>
+        </p:nvSpPr>
+        <p:spPr>
+          <a:xfrm>
+            <a:off x="-966652" y="671142"/>
+            <a:ext cx="6757850" cy="584775"/>
+          </a:xfrm>
+          <a:prstGeom prst="rect">
+            <a:avLst/>
+          </a:prstGeom>
+          <a:noFill/>
+        </p:spPr>
+        <p:txBody>
+          <a:bodyPr wrap="square">
+            <a:spAutoFit/>
+          </a:bodyPr>
+          <a:lstStyle/>
+          <a:p>
+            <a:pPr algn="ctr"/>
+            <a:r>
+              <a:rPr lang="ja-JP" altLang="ja-JP" sz="3200" b="1" i="0" u="none" strike="noStrike" dirty="0">
+                <a:solidFill>
+                  <a:srgbClr val="000000"/>
+                </a:solidFill>
+                <a:effectLst/>
+                <a:latin typeface="Arial" panose="020B0604020202020204" pitchFamily="34" charset="0"/>
+              </a:rPr>
+              <a:t>内容</a:t>
+            </a:r>
+            <a:endParaRPr lang="ja-JP" altLang="en-US" sz="3200" dirty="0"/>
+          </a:p>
+        </p:txBody>
+      </p:sp>
+    </p:spTree>
+    <p:extLst>
+      <p:ext uri="{BB962C8B-B14F-4D97-AF65-F5344CB8AC3E}">
+        <p14:creationId xmlns:p14="http://schemas.microsoft.com/office/powerpoint/2010/main" val="1761350442"/>
       </p:ext>
     </p:extLst>
   </p:cSld>
